--- a/docs/산출물_20260921/07_ECS_구성도_및_흐름도.pptx
+++ b/docs/산출물_20260921/07_ECS_구성도_및_흐름도.pptx
@@ -5,20 +5,20 @@
     <p:sldMasterId id="2147483648" r:id="rId1"/>
   </p:sldMasterIdLst>
   <p:sldIdLst>
-    <p:sldId id="256" r:id="rId7"/>
-    <p:sldId id="257" r:id="rId8"/>
-    <p:sldId id="258" r:id="rId9"/>
-    <p:sldId id="259" r:id="rId10"/>
-    <p:sldId id="260" r:id="rId11"/>
-    <p:sldId id="261" r:id="rId12"/>
-    <p:sldId id="262" r:id="rId13"/>
-    <p:sldId id="263" r:id="rId14"/>
-    <p:sldId id="264" r:id="rId15"/>
-    <p:sldId id="265" r:id="rId16"/>
-    <p:sldId id="266" r:id="rId17"/>
-    <p:sldId id="267" r:id="rId18"/>
+    <p:sldId id="256" r:id="rId2"/>
+    <p:sldId id="257" r:id="rId3"/>
+    <p:sldId id="258" r:id="rId4"/>
+    <p:sldId id="259" r:id="rId5"/>
+    <p:sldId id="260" r:id="rId6"/>
+    <p:sldId id="261" r:id="rId7"/>
+    <p:sldId id="262" r:id="rId8"/>
+    <p:sldId id="263" r:id="rId9"/>
+    <p:sldId id="264" r:id="rId10"/>
+    <p:sldId id="265" r:id="rId11"/>
+    <p:sldId id="266" r:id="rId12"/>
+    <p:sldId id="267" r:id="rId13"/>
   </p:sldIdLst>
-  <p:sldSz cx="12191695" cy="6858000" type="screen4x3"/>
+  <p:sldSz cx="12192000" cy="6858000"/>
   <p:notesSz cx="6858000" cy="9144000"/>
   <p:defaultTextStyle>
     <a:defPPr>
@@ -115,6 +115,22 @@
       </a:defRPr>
     </a:lvl9pPr>
   </p:defaultTextStyle>
+  <p:extLst>
+    <p:ext uri="{EFAFB233-063F-42B5-8137-9DF3F51BA10A}">
+      <p15:sldGuideLst xmlns:p15="http://schemas.microsoft.com/office/powerpoint/2012/main">
+        <p15:guide id="1" orient="horz" pos="2160">
+          <p15:clr>
+            <a:srgbClr val="A4A3A4"/>
+          </p15:clr>
+        </p15:guide>
+        <p15:guide id="2" pos="2880">
+          <p15:clr>
+            <a:srgbClr val="A4A3A4"/>
+          </p15:clr>
+        </p15:guide>
+      </p15:sldGuideLst>
+    </p:ext>
+  </p:extLst>
 </p:presentation>
 </file>
 
@@ -156,10 +172,9 @@
           <a:lstStyle/>
           <a:p>
             <a:r>
-              <a:rPr lang="en-US" smtClean="0"/>
+              <a:rPr lang="en-US"/>
               <a:t>Click to edit Master title style</a:t>
             </a:r>
-            <a:endParaRPr lang="en-US"/>
           </a:p>
         </p:txBody>
       </p:sp>
@@ -275,10 +290,9 @@
           </a:lstStyle>
           <a:p>
             <a:r>
-              <a:rPr lang="en-US" smtClean="0"/>
+              <a:rPr lang="en-US"/>
               <a:t>Click to edit Master subtitle style</a:t>
             </a:r>
-            <a:endParaRPr lang="en-US"/>
           </a:p>
         </p:txBody>
       </p:sp>
@@ -299,7 +313,7 @@
           <a:p>
             <a:fld id="{5BCAD085-E8A6-8845-BD4E-CB4CCA059FC4}" type="datetimeFigureOut">
               <a:rPr lang="en-US" smtClean="0"/>
-              <a:t>1/27/13</a:t>
+              <a:t>9/21/2026</a:t>
             </a:fld>
             <a:endParaRPr lang="en-US"/>
           </a:p>
@@ -393,10 +407,9 @@
           <a:lstStyle/>
           <a:p>
             <a:r>
-              <a:rPr lang="en-US" smtClean="0"/>
+              <a:rPr lang="en-US"/>
               <a:t>Click to edit Master title style</a:t>
             </a:r>
-            <a:endParaRPr lang="en-US"/>
           </a:p>
         </p:txBody>
       </p:sp>
@@ -417,38 +430,37 @@
           <a:p>
             <a:pPr lvl="0"/>
             <a:r>
-              <a:rPr lang="en-US" smtClean="0"/>
+              <a:rPr lang="en-US"/>
               <a:t>Click to edit Master text styles</a:t>
             </a:r>
           </a:p>
           <a:p>
             <a:pPr lvl="1"/>
             <a:r>
-              <a:rPr lang="en-US" smtClean="0"/>
+              <a:rPr lang="en-US"/>
               <a:t>Second level</a:t>
             </a:r>
           </a:p>
           <a:p>
             <a:pPr lvl="2"/>
             <a:r>
-              <a:rPr lang="en-US" smtClean="0"/>
+              <a:rPr lang="en-US"/>
               <a:t>Third level</a:t>
             </a:r>
           </a:p>
           <a:p>
             <a:pPr lvl="3"/>
             <a:r>
-              <a:rPr lang="en-US" smtClean="0"/>
+              <a:rPr lang="en-US"/>
               <a:t>Fourth level</a:t>
             </a:r>
           </a:p>
           <a:p>
             <a:pPr lvl="4"/>
             <a:r>
-              <a:rPr lang="en-US" smtClean="0"/>
+              <a:rPr lang="en-US"/>
               <a:t>Fifth level</a:t>
             </a:r>
-            <a:endParaRPr lang="en-US"/>
           </a:p>
         </p:txBody>
       </p:sp>
@@ -469,7 +481,7 @@
           <a:p>
             <a:fld id="{5BCAD085-E8A6-8845-BD4E-CB4CCA059FC4}" type="datetimeFigureOut">
               <a:rPr lang="en-US" smtClean="0"/>
-              <a:t>1/27/13</a:t>
+              <a:t>9/21/2026</a:t>
             </a:fld>
             <a:endParaRPr lang="en-US"/>
           </a:p>
@@ -568,10 +580,9 @@
           <a:lstStyle/>
           <a:p>
             <a:r>
-              <a:rPr lang="en-US" smtClean="0"/>
+              <a:rPr lang="en-US"/>
               <a:t>Click to edit Master title style</a:t>
             </a:r>
-            <a:endParaRPr lang="en-US"/>
           </a:p>
         </p:txBody>
       </p:sp>
@@ -597,38 +608,37 @@
           <a:p>
             <a:pPr lvl="0"/>
             <a:r>
-              <a:rPr lang="en-US" smtClean="0"/>
+              <a:rPr lang="en-US"/>
               <a:t>Click to edit Master text styles</a:t>
             </a:r>
           </a:p>
           <a:p>
             <a:pPr lvl="1"/>
             <a:r>
-              <a:rPr lang="en-US" smtClean="0"/>
+              <a:rPr lang="en-US"/>
               <a:t>Second level</a:t>
             </a:r>
           </a:p>
           <a:p>
             <a:pPr lvl="2"/>
             <a:r>
-              <a:rPr lang="en-US" smtClean="0"/>
+              <a:rPr lang="en-US"/>
               <a:t>Third level</a:t>
             </a:r>
           </a:p>
           <a:p>
             <a:pPr lvl="3"/>
             <a:r>
-              <a:rPr lang="en-US" smtClean="0"/>
+              <a:rPr lang="en-US"/>
               <a:t>Fourth level</a:t>
             </a:r>
           </a:p>
           <a:p>
             <a:pPr lvl="4"/>
             <a:r>
-              <a:rPr lang="en-US" smtClean="0"/>
+              <a:rPr lang="en-US"/>
               <a:t>Fifth level</a:t>
             </a:r>
-            <a:endParaRPr lang="en-US"/>
           </a:p>
         </p:txBody>
       </p:sp>
@@ -649,7 +659,7 @@
           <a:p>
             <a:fld id="{5BCAD085-E8A6-8845-BD4E-CB4CCA059FC4}" type="datetimeFigureOut">
               <a:rPr lang="en-US" smtClean="0"/>
-              <a:t>1/27/13</a:t>
+              <a:t>9/21/2026</a:t>
             </a:fld>
             <a:endParaRPr lang="en-US"/>
           </a:p>
@@ -743,10 +753,9 @@
           <a:lstStyle/>
           <a:p>
             <a:r>
-              <a:rPr lang="en-US" smtClean="0"/>
+              <a:rPr lang="en-US"/>
               <a:t>Click to edit Master title style</a:t>
             </a:r>
-            <a:endParaRPr lang="en-US"/>
           </a:p>
         </p:txBody>
       </p:sp>
@@ -767,38 +776,37 @@
           <a:p>
             <a:pPr lvl="0"/>
             <a:r>
-              <a:rPr lang="en-US" smtClean="0"/>
+              <a:rPr lang="en-US"/>
               <a:t>Click to edit Master text styles</a:t>
             </a:r>
           </a:p>
           <a:p>
             <a:pPr lvl="1"/>
             <a:r>
-              <a:rPr lang="en-US" smtClean="0"/>
+              <a:rPr lang="en-US"/>
               <a:t>Second level</a:t>
             </a:r>
           </a:p>
           <a:p>
             <a:pPr lvl="2"/>
             <a:r>
-              <a:rPr lang="en-US" smtClean="0"/>
+              <a:rPr lang="en-US"/>
               <a:t>Third level</a:t>
             </a:r>
           </a:p>
           <a:p>
             <a:pPr lvl="3"/>
             <a:r>
-              <a:rPr lang="en-US" smtClean="0"/>
+              <a:rPr lang="en-US"/>
               <a:t>Fourth level</a:t>
             </a:r>
           </a:p>
           <a:p>
             <a:pPr lvl="4"/>
             <a:r>
-              <a:rPr lang="en-US" smtClean="0"/>
+              <a:rPr lang="en-US"/>
               <a:t>Fifth level</a:t>
             </a:r>
-            <a:endParaRPr lang="en-US"/>
           </a:p>
         </p:txBody>
       </p:sp>
@@ -819,7 +827,7 @@
           <a:p>
             <a:fld id="{5BCAD085-E8A6-8845-BD4E-CB4CCA059FC4}" type="datetimeFigureOut">
               <a:rPr lang="en-US" smtClean="0"/>
-              <a:t>1/27/13</a:t>
+              <a:t>9/21/2026</a:t>
             </a:fld>
             <a:endParaRPr lang="en-US"/>
           </a:p>
@@ -922,10 +930,9 @@
           </a:lstStyle>
           <a:p>
             <a:r>
-              <a:rPr lang="en-US" smtClean="0"/>
+              <a:rPr lang="en-US"/>
               <a:t>Click to edit Master title style</a:t>
             </a:r>
-            <a:endParaRPr lang="en-US"/>
           </a:p>
         </p:txBody>
       </p:sp>
@@ -1042,7 +1049,7 @@
           <a:p>
             <a:pPr lvl="0"/>
             <a:r>
-              <a:rPr lang="en-US" smtClean="0"/>
+              <a:rPr lang="en-US"/>
               <a:t>Click to edit Master text styles</a:t>
             </a:r>
           </a:p>
@@ -1065,7 +1072,7 @@
           <a:p>
             <a:fld id="{5BCAD085-E8A6-8845-BD4E-CB4CCA059FC4}" type="datetimeFigureOut">
               <a:rPr lang="en-US" smtClean="0"/>
-              <a:t>1/27/13</a:t>
+              <a:t>9/21/2026</a:t>
             </a:fld>
             <a:endParaRPr lang="en-US"/>
           </a:p>
@@ -1159,10 +1166,9 @@
           <a:lstStyle/>
           <a:p>
             <a:r>
-              <a:rPr lang="en-US" smtClean="0"/>
+              <a:rPr lang="en-US"/>
               <a:t>Click to edit Master title style</a:t>
             </a:r>
-            <a:endParaRPr lang="en-US"/>
           </a:p>
         </p:txBody>
       </p:sp>
@@ -1216,38 +1222,37 @@
           <a:p>
             <a:pPr lvl="0"/>
             <a:r>
-              <a:rPr lang="en-US" smtClean="0"/>
+              <a:rPr lang="en-US"/>
               <a:t>Click to edit Master text styles</a:t>
             </a:r>
           </a:p>
           <a:p>
             <a:pPr lvl="1"/>
             <a:r>
-              <a:rPr lang="en-US" smtClean="0"/>
+              <a:rPr lang="en-US"/>
               <a:t>Second level</a:t>
             </a:r>
           </a:p>
           <a:p>
             <a:pPr lvl="2"/>
             <a:r>
-              <a:rPr lang="en-US" smtClean="0"/>
+              <a:rPr lang="en-US"/>
               <a:t>Third level</a:t>
             </a:r>
           </a:p>
           <a:p>
             <a:pPr lvl="3"/>
             <a:r>
-              <a:rPr lang="en-US" smtClean="0"/>
+              <a:rPr lang="en-US"/>
               <a:t>Fourth level</a:t>
             </a:r>
           </a:p>
           <a:p>
             <a:pPr lvl="4"/>
             <a:r>
-              <a:rPr lang="en-US" smtClean="0"/>
+              <a:rPr lang="en-US"/>
               <a:t>Fifth level</a:t>
             </a:r>
-            <a:endParaRPr lang="en-US"/>
           </a:p>
         </p:txBody>
       </p:sp>
@@ -1301,38 +1306,37 @@
           <a:p>
             <a:pPr lvl="0"/>
             <a:r>
-              <a:rPr lang="en-US" smtClean="0"/>
+              <a:rPr lang="en-US"/>
               <a:t>Click to edit Master text styles</a:t>
             </a:r>
           </a:p>
           <a:p>
             <a:pPr lvl="1"/>
             <a:r>
-              <a:rPr lang="en-US" smtClean="0"/>
+              <a:rPr lang="en-US"/>
               <a:t>Second level</a:t>
             </a:r>
           </a:p>
           <a:p>
             <a:pPr lvl="2"/>
             <a:r>
-              <a:rPr lang="en-US" smtClean="0"/>
+              <a:rPr lang="en-US"/>
               <a:t>Third level</a:t>
             </a:r>
           </a:p>
           <a:p>
             <a:pPr lvl="3"/>
             <a:r>
-              <a:rPr lang="en-US" smtClean="0"/>
+              <a:rPr lang="en-US"/>
               <a:t>Fourth level</a:t>
             </a:r>
           </a:p>
           <a:p>
             <a:pPr lvl="4"/>
             <a:r>
-              <a:rPr lang="en-US" smtClean="0"/>
+              <a:rPr lang="en-US"/>
               <a:t>Fifth level</a:t>
             </a:r>
-            <a:endParaRPr lang="en-US"/>
           </a:p>
         </p:txBody>
       </p:sp>
@@ -1353,7 +1357,7 @@
           <a:p>
             <a:fld id="{5BCAD085-E8A6-8845-BD4E-CB4CCA059FC4}" type="datetimeFigureOut">
               <a:rPr lang="en-US" smtClean="0"/>
-              <a:t>1/27/13</a:t>
+              <a:t>9/21/2026</a:t>
             </a:fld>
             <a:endParaRPr lang="en-US"/>
           </a:p>
@@ -1451,10 +1455,9 @@
           </a:lstStyle>
           <a:p>
             <a:r>
-              <a:rPr lang="en-US" smtClean="0"/>
+              <a:rPr lang="en-US"/>
               <a:t>Click to edit Master title style</a:t>
             </a:r>
-            <a:endParaRPr lang="en-US"/>
           </a:p>
         </p:txBody>
       </p:sp>
@@ -1517,7 +1520,7 @@
           <a:p>
             <a:pPr lvl="0"/>
             <a:r>
-              <a:rPr lang="en-US" smtClean="0"/>
+              <a:rPr lang="en-US"/>
               <a:t>Click to edit Master text styles</a:t>
             </a:r>
           </a:p>
@@ -1573,38 +1576,37 @@
           <a:p>
             <a:pPr lvl="0"/>
             <a:r>
-              <a:rPr lang="en-US" smtClean="0"/>
+              <a:rPr lang="en-US"/>
               <a:t>Click to edit Master text styles</a:t>
             </a:r>
           </a:p>
           <a:p>
             <a:pPr lvl="1"/>
             <a:r>
-              <a:rPr lang="en-US" smtClean="0"/>
+              <a:rPr lang="en-US"/>
               <a:t>Second level</a:t>
             </a:r>
           </a:p>
           <a:p>
             <a:pPr lvl="2"/>
             <a:r>
-              <a:rPr lang="en-US" smtClean="0"/>
+              <a:rPr lang="en-US"/>
               <a:t>Third level</a:t>
             </a:r>
           </a:p>
           <a:p>
             <a:pPr lvl="3"/>
             <a:r>
-              <a:rPr lang="en-US" smtClean="0"/>
+              <a:rPr lang="en-US"/>
               <a:t>Fourth level</a:t>
             </a:r>
           </a:p>
           <a:p>
             <a:pPr lvl="4"/>
             <a:r>
-              <a:rPr lang="en-US" smtClean="0"/>
+              <a:rPr lang="en-US"/>
               <a:t>Fifth level</a:t>
             </a:r>
-            <a:endParaRPr lang="en-US"/>
           </a:p>
         </p:txBody>
       </p:sp>
@@ -1667,7 +1669,7 @@
           <a:p>
             <a:pPr lvl="0"/>
             <a:r>
-              <a:rPr lang="en-US" smtClean="0"/>
+              <a:rPr lang="en-US"/>
               <a:t>Click to edit Master text styles</a:t>
             </a:r>
           </a:p>
@@ -1723,38 +1725,37 @@
           <a:p>
             <a:pPr lvl="0"/>
             <a:r>
-              <a:rPr lang="en-US" smtClean="0"/>
+              <a:rPr lang="en-US"/>
               <a:t>Click to edit Master text styles</a:t>
             </a:r>
           </a:p>
           <a:p>
             <a:pPr lvl="1"/>
             <a:r>
-              <a:rPr lang="en-US" smtClean="0"/>
+              <a:rPr lang="en-US"/>
               <a:t>Second level</a:t>
             </a:r>
           </a:p>
           <a:p>
             <a:pPr lvl="2"/>
             <a:r>
-              <a:rPr lang="en-US" smtClean="0"/>
+              <a:rPr lang="en-US"/>
               <a:t>Third level</a:t>
             </a:r>
           </a:p>
           <a:p>
             <a:pPr lvl="3"/>
             <a:r>
-              <a:rPr lang="en-US" smtClean="0"/>
+              <a:rPr lang="en-US"/>
               <a:t>Fourth level</a:t>
             </a:r>
           </a:p>
           <a:p>
             <a:pPr lvl="4"/>
             <a:r>
-              <a:rPr lang="en-US" smtClean="0"/>
+              <a:rPr lang="en-US"/>
               <a:t>Fifth level</a:t>
             </a:r>
-            <a:endParaRPr lang="en-US"/>
           </a:p>
         </p:txBody>
       </p:sp>
@@ -1775,7 +1776,7 @@
           <a:p>
             <a:fld id="{5BCAD085-E8A6-8845-BD4E-CB4CCA059FC4}" type="datetimeFigureOut">
               <a:rPr lang="en-US" smtClean="0"/>
-              <a:t>1/27/13</a:t>
+              <a:t>9/21/2026</a:t>
             </a:fld>
             <a:endParaRPr lang="en-US"/>
           </a:p>
@@ -1869,10 +1870,9 @@
           <a:lstStyle/>
           <a:p>
             <a:r>
-              <a:rPr lang="en-US" smtClean="0"/>
+              <a:rPr lang="en-US"/>
               <a:t>Click to edit Master title style</a:t>
             </a:r>
-            <a:endParaRPr lang="en-US"/>
           </a:p>
         </p:txBody>
       </p:sp>
@@ -1893,7 +1893,7 @@
           <a:p>
             <a:fld id="{5BCAD085-E8A6-8845-BD4E-CB4CCA059FC4}" type="datetimeFigureOut">
               <a:rPr lang="en-US" smtClean="0"/>
-              <a:t>1/27/13</a:t>
+              <a:t>9/21/2026</a:t>
             </a:fld>
             <a:endParaRPr lang="en-US"/>
           </a:p>
@@ -1988,7 +1988,7 @@
           <a:p>
             <a:fld id="{5BCAD085-E8A6-8845-BD4E-CB4CCA059FC4}" type="datetimeFigureOut">
               <a:rPr lang="en-US" smtClean="0"/>
-              <a:t>1/27/13</a:t>
+              <a:t>9/21/2026</a:t>
             </a:fld>
             <a:endParaRPr lang="en-US"/>
           </a:p>
@@ -2091,10 +2091,9 @@
           </a:lstStyle>
           <a:p>
             <a:r>
-              <a:rPr lang="en-US" smtClean="0"/>
+              <a:rPr lang="en-US"/>
               <a:t>Click to edit Master title style</a:t>
             </a:r>
-            <a:endParaRPr lang="en-US"/>
           </a:p>
         </p:txBody>
       </p:sp>
@@ -2148,38 +2147,37 @@
           <a:p>
             <a:pPr lvl="0"/>
             <a:r>
-              <a:rPr lang="en-US" smtClean="0"/>
+              <a:rPr lang="en-US"/>
               <a:t>Click to edit Master text styles</a:t>
             </a:r>
           </a:p>
           <a:p>
             <a:pPr lvl="1"/>
             <a:r>
-              <a:rPr lang="en-US" smtClean="0"/>
+              <a:rPr lang="en-US"/>
               <a:t>Second level</a:t>
             </a:r>
           </a:p>
           <a:p>
             <a:pPr lvl="2"/>
             <a:r>
-              <a:rPr lang="en-US" smtClean="0"/>
+              <a:rPr lang="en-US"/>
               <a:t>Third level</a:t>
             </a:r>
           </a:p>
           <a:p>
             <a:pPr lvl="3"/>
             <a:r>
-              <a:rPr lang="en-US" smtClean="0"/>
+              <a:rPr lang="en-US"/>
               <a:t>Fourth level</a:t>
             </a:r>
           </a:p>
           <a:p>
             <a:pPr lvl="4"/>
             <a:r>
-              <a:rPr lang="en-US" smtClean="0"/>
+              <a:rPr lang="en-US"/>
               <a:t>Fifth level</a:t>
             </a:r>
-            <a:endParaRPr lang="en-US"/>
           </a:p>
         </p:txBody>
       </p:sp>
@@ -2242,7 +2240,7 @@
           <a:p>
             <a:pPr lvl="0"/>
             <a:r>
-              <a:rPr lang="en-US" smtClean="0"/>
+              <a:rPr lang="en-US"/>
               <a:t>Click to edit Master text styles</a:t>
             </a:r>
           </a:p>
@@ -2265,7 +2263,7 @@
           <a:p>
             <a:fld id="{5BCAD085-E8A6-8845-BD4E-CB4CCA059FC4}" type="datetimeFigureOut">
               <a:rPr lang="en-US" smtClean="0"/>
-              <a:t>1/27/13</a:t>
+              <a:t>9/21/2026</a:t>
             </a:fld>
             <a:endParaRPr lang="en-US"/>
           </a:p>
@@ -2368,10 +2366,9 @@
           </a:lstStyle>
           <a:p>
             <a:r>
-              <a:rPr lang="en-US" smtClean="0"/>
+              <a:rPr lang="en-US"/>
               <a:t>Click to edit Master title style</a:t>
             </a:r>
-            <a:endParaRPr lang="en-US"/>
           </a:p>
         </p:txBody>
       </p:sp>
@@ -2495,7 +2492,7 @@
           <a:p>
             <a:pPr lvl="0"/>
             <a:r>
-              <a:rPr lang="en-US" smtClean="0"/>
+              <a:rPr lang="en-US"/>
               <a:t>Click to edit Master text styles</a:t>
             </a:r>
           </a:p>
@@ -2518,7 +2515,7 @@
           <a:p>
             <a:fld id="{5BCAD085-E8A6-8845-BD4E-CB4CCA059FC4}" type="datetimeFigureOut">
               <a:rPr lang="en-US" smtClean="0"/>
-              <a:t>1/27/13</a:t>
+              <a:t>9/21/2026</a:t>
             </a:fld>
             <a:endParaRPr lang="en-US"/>
           </a:p>
@@ -2627,10 +2624,9 @@
           <a:lstStyle/>
           <a:p>
             <a:r>
-              <a:rPr lang="en-US" smtClean="0"/>
+              <a:rPr lang="en-US"/>
               <a:t>Click to edit Master title style</a:t>
             </a:r>
-            <a:endParaRPr lang="en-US"/>
           </a:p>
         </p:txBody>
       </p:sp>
@@ -2661,38 +2657,37 @@
           <a:p>
             <a:pPr lvl="0"/>
             <a:r>
-              <a:rPr lang="en-US" smtClean="0"/>
+              <a:rPr lang="en-US"/>
               <a:t>Click to edit Master text styles</a:t>
             </a:r>
           </a:p>
           <a:p>
             <a:pPr lvl="1"/>
             <a:r>
-              <a:rPr lang="en-US" smtClean="0"/>
+              <a:rPr lang="en-US"/>
               <a:t>Second level</a:t>
             </a:r>
           </a:p>
           <a:p>
             <a:pPr lvl="2"/>
             <a:r>
-              <a:rPr lang="en-US" smtClean="0"/>
+              <a:rPr lang="en-US"/>
               <a:t>Third level</a:t>
             </a:r>
           </a:p>
           <a:p>
             <a:pPr lvl="3"/>
             <a:r>
-              <a:rPr lang="en-US" smtClean="0"/>
+              <a:rPr lang="en-US"/>
               <a:t>Fourth level</a:t>
             </a:r>
           </a:p>
           <a:p>
             <a:pPr lvl="4"/>
             <a:r>
-              <a:rPr lang="en-US" smtClean="0"/>
+              <a:rPr lang="en-US"/>
               <a:t>Fifth level</a:t>
             </a:r>
-            <a:endParaRPr lang="en-US"/>
           </a:p>
         </p:txBody>
       </p:sp>
@@ -2731,7 +2726,7 @@
           <a:p>
             <a:fld id="{5BCAD085-E8A6-8845-BD4E-CB4CCA059FC4}" type="datetimeFigureOut">
               <a:rPr lang="en-US" smtClean="0"/>
-              <a:t>1/27/13</a:t>
+              <a:t>9/21/2026</a:t>
             </a:fld>
             <a:endParaRPr lang="en-US"/>
           </a:p>
@@ -3090,7 +3085,7 @@
 </file>
 
 <file path=ppt/slides/slide1.xml><?xml version="1.0" encoding="utf-8"?>
-<p:sld xmlns:a="http://schemas.openxmlformats.org/drawingml/2006/main" xmlns:p="http://schemas.openxmlformats.org/presentationml/2006/main" xmlns:r="http://schemas.openxmlformats.org/officeDocument/2006/relationships">
+<p:sld xmlns:a="http://schemas.openxmlformats.org/drawingml/2006/main" xmlns:r="http://schemas.openxmlformats.org/officeDocument/2006/relationships" xmlns:p="http://schemas.openxmlformats.org/presentationml/2006/main">
   <p:cSld>
     <p:spTree>
       <p:nvGrpSpPr>
@@ -3098,7 +3093,14 @@
         <p:cNvGrpSpPr/>
         <p:nvPr/>
       </p:nvGrpSpPr>
-      <p:grpSpPr/>
+      <p:grpSpPr>
+        <a:xfrm>
+          <a:off x="0" y="0"/>
+          <a:ext cx="0" cy="0"/>
+          <a:chOff x="0" y="0"/>
+          <a:chExt cx="0" cy="0"/>
+        </a:xfrm>
+      </p:grpSpPr>
       <p:sp>
         <p:nvSpPr>
           <p:cNvPr id="2" name="Rectangle 1"/>
@@ -3140,6 +3142,7 @@
           <a:lstStyle/>
           <a:p>
             <a:pPr algn="ctr"/>
+            <a:endParaRPr/>
           </a:p>
         </p:txBody>
       </p:sp>
@@ -3160,7 +3163,7 @@
           <a:noFill/>
         </p:spPr>
         <p:txBody>
-          <a:bodyPr wrap="square" anchor="t" lIns="36576" rIns="36576" tIns="0" bIns="0">
+          <a:bodyPr wrap="square" lIns="36576" tIns="0" rIns="36576" bIns="0" anchor="t">
             <a:spAutoFit/>
           </a:bodyPr>
           <a:lstStyle/>
@@ -3195,7 +3198,7 @@
           <a:noFill/>
         </p:spPr>
         <p:txBody>
-          <a:bodyPr wrap="square" anchor="t" lIns="36576" rIns="36576" tIns="0" bIns="0">
+          <a:bodyPr wrap="square" lIns="36576" tIns="0" rIns="36576" bIns="0" anchor="t">
             <a:spAutoFit/>
           </a:bodyPr>
           <a:lstStyle/>
@@ -3230,7 +3233,7 @@
           <a:noFill/>
         </p:spPr>
         <p:txBody>
-          <a:bodyPr wrap="square" anchor="t" lIns="36576" rIns="36576" tIns="0" bIns="0">
+          <a:bodyPr wrap="square" lIns="36576" tIns="0" rIns="36576" bIns="0" anchor="t">
             <a:spAutoFit/>
           </a:bodyPr>
           <a:lstStyle/>
@@ -3265,7 +3268,7 @@
           <a:noFill/>
         </p:spPr>
         <p:txBody>
-          <a:bodyPr wrap="square" anchor="t" lIns="36576" rIns="36576" tIns="0" bIns="0">
+          <a:bodyPr wrap="square" lIns="36576" tIns="0" rIns="36576" bIns="0" anchor="t">
             <a:spAutoFit/>
           </a:bodyPr>
           <a:lstStyle/>
@@ -3292,7 +3295,7 @@
 </file>
 
 <file path=ppt/slides/slide10.xml><?xml version="1.0" encoding="utf-8"?>
-<p:sld xmlns:a="http://schemas.openxmlformats.org/drawingml/2006/main" xmlns:p="http://schemas.openxmlformats.org/presentationml/2006/main" xmlns:r="http://schemas.openxmlformats.org/officeDocument/2006/relationships">
+<p:sld xmlns:a="http://schemas.openxmlformats.org/drawingml/2006/main" xmlns:r="http://schemas.openxmlformats.org/officeDocument/2006/relationships" xmlns:p="http://schemas.openxmlformats.org/presentationml/2006/main">
   <p:cSld>
     <p:spTree>
       <p:nvGrpSpPr>
@@ -3300,7 +3303,14 @@
         <p:cNvGrpSpPr/>
         <p:nvPr/>
       </p:nvGrpSpPr>
-      <p:grpSpPr/>
+      <p:grpSpPr>
+        <a:xfrm>
+          <a:off x="0" y="0"/>
+          <a:ext cx="0" cy="0"/>
+          <a:chOff x="0" y="0"/>
+          <a:chExt cx="0" cy="0"/>
+        </a:xfrm>
+      </p:grpSpPr>
       <p:sp>
         <p:nvSpPr>
           <p:cNvPr id="2" name="TextBox 1"/>
@@ -3318,7 +3328,7 @@
           <a:noFill/>
         </p:spPr>
         <p:txBody>
-          <a:bodyPr wrap="square" anchor="ctr" lIns="36576" rIns="36576" tIns="0" bIns="0">
+          <a:bodyPr wrap="square" lIns="36576" tIns="0" rIns="36576" bIns="0" anchor="ctr">
             <a:spAutoFit/>
           </a:bodyPr>
           <a:lstStyle/>
@@ -3353,7 +3363,7 @@
           <a:noFill/>
         </p:spPr>
         <p:txBody>
-          <a:bodyPr wrap="square" anchor="t" lIns="36576" rIns="36576" tIns="0" bIns="0">
+          <a:bodyPr wrap="square" lIns="36576" tIns="0" rIns="36576" bIns="0" anchor="t">
             <a:spAutoFit/>
           </a:bodyPr>
           <a:lstStyle/>
@@ -3410,7 +3420,7 @@
           </a:fontRef>
         </p:style>
         <p:txBody>
-          <a:bodyPr rtlCol="0" anchor="ctr" wrap="square" lIns="36576" rIns="36576" tIns="0" bIns="0"/>
+          <a:bodyPr wrap="square" lIns="36576" tIns="0" rIns="36576" bIns="0" rtlCol="0" anchor="ctr"/>
           <a:lstStyle/>
           <a:p>
             <a:pPr algn="ctr"/>
@@ -3477,7 +3487,7 @@
           </a:fontRef>
         </p:style>
         <p:txBody>
-          <a:bodyPr rtlCol="0" anchor="ctr" wrap="square" lIns="36576" rIns="36576" tIns="0" bIns="0"/>
+          <a:bodyPr wrap="square" lIns="36576" tIns="0" rIns="36576" bIns="0" rtlCol="0" anchor="ctr"/>
           <a:lstStyle/>
           <a:p>
             <a:pPr algn="ctr"/>
@@ -3544,7 +3554,7 @@
           </a:fontRef>
         </p:style>
         <p:txBody>
-          <a:bodyPr rtlCol="0" anchor="ctr" wrap="square" lIns="36576" rIns="36576" tIns="0" bIns="0"/>
+          <a:bodyPr wrap="square" lIns="36576" tIns="0" rIns="36576" bIns="0" rtlCol="0" anchor="ctr"/>
           <a:lstStyle/>
           <a:p>
             <a:pPr algn="ctr"/>
@@ -3611,7 +3621,7 @@
           </a:fontRef>
         </p:style>
         <p:txBody>
-          <a:bodyPr rtlCol="0" anchor="ctr" wrap="square" lIns="36576" rIns="36576" tIns="0" bIns="0"/>
+          <a:bodyPr wrap="square" lIns="36576" tIns="0" rIns="36576" bIns="0" rtlCol="0" anchor="ctr"/>
           <a:lstStyle/>
           <a:p>
             <a:pPr algn="ctr"/>
@@ -3764,7 +3774,7 @@
           <a:noFill/>
         </p:spPr>
         <p:txBody>
-          <a:bodyPr wrap="square" anchor="t" lIns="36576" rIns="36576" tIns="0" bIns="0">
+          <a:bodyPr wrap="square" lIns="36576" tIns="0" rIns="36576" bIns="0" anchor="t">
             <a:spAutoFit/>
           </a:bodyPr>
           <a:lstStyle/>
@@ -3799,7 +3809,7 @@
           <a:noFill/>
         </p:spPr>
         <p:txBody>
-          <a:bodyPr wrap="square" anchor="t" lIns="36576" rIns="36576" tIns="0" bIns="0">
+          <a:bodyPr wrap="square" lIns="36576" tIns="0" rIns="36576" bIns="0" anchor="t">
             <a:spAutoFit/>
           </a:bodyPr>
           <a:lstStyle/>
@@ -3834,7 +3844,7 @@
           <a:noFill/>
         </p:spPr>
         <p:txBody>
-          <a:bodyPr wrap="square" anchor="t" lIns="36576" rIns="36576" tIns="0" bIns="0">
+          <a:bodyPr wrap="square" lIns="36576" tIns="0" rIns="36576" bIns="0" anchor="t">
             <a:spAutoFit/>
           </a:bodyPr>
           <a:lstStyle/>
@@ -3869,7 +3879,7 @@
           <a:noFill/>
         </p:spPr>
         <p:txBody>
-          <a:bodyPr wrap="square" anchor="t" lIns="36576" rIns="36576" tIns="0" bIns="0">
+          <a:bodyPr wrap="square" lIns="36576" tIns="0" rIns="36576" bIns="0" anchor="t">
             <a:spAutoFit/>
           </a:bodyPr>
           <a:lstStyle/>
@@ -3904,7 +3914,7 @@
           <a:noFill/>
         </p:spPr>
         <p:txBody>
-          <a:bodyPr wrap="square" anchor="t" lIns="36576" rIns="36576" tIns="0" bIns="0">
+          <a:bodyPr wrap="square" lIns="36576" tIns="0" rIns="36576" bIns="0" anchor="t">
             <a:spAutoFit/>
           </a:bodyPr>
           <a:lstStyle/>
@@ -3939,20 +3949,110 @@
           <a:noFill/>
         </p:spPr>
         <p:txBody>
-          <a:bodyPr wrap="square" anchor="t" lIns="36576" rIns="36576" tIns="0" bIns="0">
+          <a:bodyPr wrap="square" lIns="36576" tIns="0" rIns="36576" bIns="0" anchor="t">
             <a:spAutoFit/>
           </a:bodyPr>
           <a:lstStyle/>
           <a:p>
             <a:pPr algn="l"/>
             <a:r>
-              <a:rPr sz="1100" b="0">
-                <a:solidFill>
-                  <a:srgbClr val="595959"/>
-                </a:solidFill>
-                <a:latin typeface="맑은 고딕"/>
-              </a:rPr>
-              <a:t>⑤ Pallet Exist #29 OFF   ※ 사양 주석 : "출고 영역 #29 bit 만 지움"</a:t>
+              <a:rPr sz="1100" b="0" dirty="0">
+                <a:solidFill>
+                  <a:srgbClr val="595959"/>
+                </a:solidFill>
+                <a:latin typeface="맑은 고딕"/>
+              </a:rPr>
+              <a:t>⑤ Pallet Exist #29 OFF   ※ </a:t>
+            </a:r>
+            <a:r>
+              <a:rPr sz="1100" b="0" dirty="0" err="1">
+                <a:solidFill>
+                  <a:srgbClr val="595959"/>
+                </a:solidFill>
+                <a:latin typeface="맑은 고딕"/>
+              </a:rPr>
+              <a:t>사양</a:t>
+            </a:r>
+            <a:r>
+              <a:rPr sz="1100" b="0" dirty="0">
+                <a:solidFill>
+                  <a:srgbClr val="595959"/>
+                </a:solidFill>
+                <a:latin typeface="맑은 고딕"/>
+              </a:rPr>
+              <a:t> </a:t>
+            </a:r>
+            <a:r>
+              <a:rPr sz="1100" b="0" dirty="0" err="1">
+                <a:solidFill>
+                  <a:srgbClr val="595959"/>
+                </a:solidFill>
+                <a:latin typeface="맑은 고딕"/>
+              </a:rPr>
+              <a:t>주석</a:t>
+            </a:r>
+            <a:r>
+              <a:rPr sz="1100" b="0" dirty="0">
+                <a:solidFill>
+                  <a:srgbClr val="595959"/>
+                </a:solidFill>
+                <a:latin typeface="맑은 고딕"/>
+              </a:rPr>
+              <a:t> : "</a:t>
+            </a:r>
+            <a:r>
+              <a:rPr sz="1100" b="0" dirty="0" err="1">
+                <a:solidFill>
+                  <a:srgbClr val="595959"/>
+                </a:solidFill>
+                <a:latin typeface="맑은 고딕"/>
+              </a:rPr>
+              <a:t>출고</a:t>
+            </a:r>
+            <a:r>
+              <a:rPr sz="1100" b="0" dirty="0">
+                <a:solidFill>
+                  <a:srgbClr val="595959"/>
+                </a:solidFill>
+                <a:latin typeface="맑은 고딕"/>
+              </a:rPr>
+              <a:t> </a:t>
+            </a:r>
+            <a:r>
+              <a:rPr sz="1100" b="0" dirty="0" err="1">
+                <a:solidFill>
+                  <a:srgbClr val="595959"/>
+                </a:solidFill>
+                <a:latin typeface="맑은 고딕"/>
+              </a:rPr>
+              <a:t>영역</a:t>
+            </a:r>
+            <a:r>
+              <a:rPr sz="1100" b="0" dirty="0">
+                <a:solidFill>
+                  <a:srgbClr val="595959"/>
+                </a:solidFill>
+                <a:latin typeface="맑은 고딕"/>
+              </a:rPr>
+              <a:t> #29 bit 만 </a:t>
+            </a:r>
+            <a:r>
+              <a:rPr sz="1100" b="0" dirty="0" err="1">
+                <a:solidFill>
+                  <a:srgbClr val="595959"/>
+                </a:solidFill>
+                <a:latin typeface="맑은 고딕"/>
+              </a:rPr>
+              <a:t>지움</a:t>
+            </a:r>
+            <a:r>
+              <a:rPr sz="1100" b="0" dirty="0">
+                <a:solidFill>
+                  <a:srgbClr val="595959"/>
+                </a:solidFill>
+                <a:latin typeface="맑은 고딕"/>
+              </a:rPr>
+              <a:t>"</a:t>
             </a:r>
           </a:p>
         </p:txBody>
@@ -3996,54 +4096,492 @@
           </a:fontRef>
         </p:style>
         <p:txBody>
-          <a:bodyPr rtlCol="0" anchor="ctr" wrap="square" lIns="36576" rIns="36576" tIns="0" bIns="0"/>
+          <a:bodyPr wrap="square" lIns="36576" tIns="0" rIns="36576" bIns="0" rtlCol="0" anchor="ctr"/>
           <a:lstStyle/>
           <a:p>
             <a:pPr algn="ctr"/>
             <a:r>
-              <a:rPr sz="1200" b="1">
+              <a:rPr sz="1200" b="1" dirty="0" err="1">
                 <a:solidFill>
                   <a:srgbClr val="C87A0E"/>
                 </a:solidFill>
                 <a:latin typeface="맑은 고딕"/>
               </a:rPr>
-              <a:t>운영 기준</a:t>
-            </a:r>
+              <a:t>운영</a:t>
+            </a:r>
+            <a:r>
+              <a:rPr sz="1200" b="1" dirty="0">
+                <a:solidFill>
+                  <a:srgbClr val="C87A0E"/>
+                </a:solidFill>
+                <a:latin typeface="맑은 고딕"/>
+              </a:rPr>
+              <a:t> </a:t>
+            </a:r>
+            <a:r>
+              <a:rPr sz="1200" b="1" dirty="0" err="1">
+                <a:solidFill>
+                  <a:srgbClr val="C87A0E"/>
+                </a:solidFill>
+                <a:latin typeface="맑은 고딕"/>
+              </a:rPr>
+              <a:t>기준</a:t>
+            </a:r>
+            <a:endParaRPr sz="1200" b="1" dirty="0">
+              <a:solidFill>
+                <a:srgbClr val="C87A0E"/>
+              </a:solidFill>
+              <a:latin typeface="맑은 고딕"/>
+            </a:endParaRPr>
           </a:p>
           <a:p>
             <a:pPr algn="ctr"/>
             <a:r>
-              <a:rPr sz="1100" b="0">
-                <a:solidFill>
-                  <a:srgbClr val="595959"/>
-                </a:solidFill>
-                <a:latin typeface="맑은 고딕"/>
-              </a:rPr>
-              <a:t>· 재입고는 상위의 새 O 전문(출발 102 → 내부 130)으로 시작한다. RGV 픽업 트랙은 131 이다(C/V#15 슬롯 순서 131,132,130).</a:t>
+              <a:rPr sz="1100" b="0" dirty="0">
+                <a:solidFill>
+                  <a:srgbClr val="595959"/>
+                </a:solidFill>
+                <a:latin typeface="맑은 고딕"/>
+              </a:rPr>
+              <a:t>· </a:t>
+            </a:r>
+            <a:r>
+              <a:rPr sz="1100" b="0" dirty="0" err="1">
+                <a:solidFill>
+                  <a:srgbClr val="595959"/>
+                </a:solidFill>
+                <a:latin typeface="맑은 고딕"/>
+              </a:rPr>
+              <a:t>재입고는</a:t>
+            </a:r>
+            <a:r>
+              <a:rPr sz="1100" b="0" dirty="0">
+                <a:solidFill>
+                  <a:srgbClr val="595959"/>
+                </a:solidFill>
+                <a:latin typeface="맑은 고딕"/>
+              </a:rPr>
+              <a:t> </a:t>
+            </a:r>
+            <a:r>
+              <a:rPr sz="1100" b="0" dirty="0" err="1">
+                <a:solidFill>
+                  <a:srgbClr val="595959"/>
+                </a:solidFill>
+                <a:latin typeface="맑은 고딕"/>
+              </a:rPr>
+              <a:t>상위의</a:t>
+            </a:r>
+            <a:r>
+              <a:rPr sz="1100" b="0" dirty="0">
+                <a:solidFill>
+                  <a:srgbClr val="595959"/>
+                </a:solidFill>
+                <a:latin typeface="맑은 고딕"/>
+              </a:rPr>
+              <a:t> 새 O </a:t>
+            </a:r>
+            <a:r>
+              <a:rPr sz="1100" b="0" dirty="0" err="1">
+                <a:solidFill>
+                  <a:srgbClr val="595959"/>
+                </a:solidFill>
+                <a:latin typeface="맑은 고딕"/>
+              </a:rPr>
+              <a:t>전문</a:t>
+            </a:r>
+            <a:r>
+              <a:rPr sz="1100" b="0" dirty="0">
+                <a:solidFill>
+                  <a:srgbClr val="595959"/>
+                </a:solidFill>
+                <a:latin typeface="맑은 고딕"/>
+              </a:rPr>
+              <a:t>(</a:t>
+            </a:r>
+            <a:r>
+              <a:rPr sz="1100" b="0" dirty="0" err="1">
+                <a:solidFill>
+                  <a:srgbClr val="595959"/>
+                </a:solidFill>
+                <a:latin typeface="맑은 고딕"/>
+              </a:rPr>
+              <a:t>출발</a:t>
+            </a:r>
+            <a:r>
+              <a:rPr sz="1100" b="0" dirty="0">
+                <a:solidFill>
+                  <a:srgbClr val="595959"/>
+                </a:solidFill>
+                <a:latin typeface="맑은 고딕"/>
+              </a:rPr>
+              <a:t> 102 → </a:t>
+            </a:r>
+            <a:r>
+              <a:rPr sz="1100" b="0" dirty="0" err="1">
+                <a:solidFill>
+                  <a:srgbClr val="595959"/>
+                </a:solidFill>
+                <a:latin typeface="맑은 고딕"/>
+              </a:rPr>
+              <a:t>내부</a:t>
+            </a:r>
+            <a:r>
+              <a:rPr sz="1100" b="0" dirty="0">
+                <a:solidFill>
+                  <a:srgbClr val="595959"/>
+                </a:solidFill>
+                <a:latin typeface="맑은 고딕"/>
+              </a:rPr>
+              <a:t> 130)</a:t>
+            </a:r>
+            <a:r>
+              <a:rPr sz="1100" b="0" dirty="0" err="1">
+                <a:solidFill>
+                  <a:srgbClr val="595959"/>
+                </a:solidFill>
+                <a:latin typeface="맑은 고딕"/>
+              </a:rPr>
+              <a:t>으로</a:t>
+            </a:r>
+            <a:r>
+              <a:rPr sz="1100" b="0" dirty="0">
+                <a:solidFill>
+                  <a:srgbClr val="595959"/>
+                </a:solidFill>
+                <a:latin typeface="맑은 고딕"/>
+              </a:rPr>
+              <a:t> </a:t>
+            </a:r>
+            <a:r>
+              <a:rPr sz="1100" b="0" dirty="0" err="1">
+                <a:solidFill>
+                  <a:srgbClr val="595959"/>
+                </a:solidFill>
+                <a:latin typeface="맑은 고딕"/>
+              </a:rPr>
+              <a:t>시작한다</a:t>
+            </a:r>
+            <a:r>
+              <a:rPr sz="1100" b="0" dirty="0">
+                <a:solidFill>
+                  <a:srgbClr val="595959"/>
+                </a:solidFill>
+                <a:latin typeface="맑은 고딕"/>
+              </a:rPr>
+              <a:t>. RGV </a:t>
+            </a:r>
+            <a:r>
+              <a:rPr sz="1100" b="0" dirty="0" err="1">
+                <a:solidFill>
+                  <a:srgbClr val="595959"/>
+                </a:solidFill>
+                <a:latin typeface="맑은 고딕"/>
+              </a:rPr>
+              <a:t>픽업</a:t>
+            </a:r>
+            <a:r>
+              <a:rPr sz="1100" b="0" dirty="0">
+                <a:solidFill>
+                  <a:srgbClr val="595959"/>
+                </a:solidFill>
+                <a:latin typeface="맑은 고딕"/>
+              </a:rPr>
+              <a:t> </a:t>
+            </a:r>
+            <a:r>
+              <a:rPr sz="1100" b="0" dirty="0" err="1">
+                <a:solidFill>
+                  <a:srgbClr val="595959"/>
+                </a:solidFill>
+                <a:latin typeface="맑은 고딕"/>
+              </a:rPr>
+              <a:t>트랙은</a:t>
+            </a:r>
+            <a:r>
+              <a:rPr sz="1100" b="0" dirty="0">
+                <a:solidFill>
+                  <a:srgbClr val="595959"/>
+                </a:solidFill>
+                <a:latin typeface="맑은 고딕"/>
+              </a:rPr>
+              <a:t> 131 </a:t>
+            </a:r>
+            <a:r>
+              <a:rPr sz="1100" b="0" dirty="0" err="1">
+                <a:solidFill>
+                  <a:srgbClr val="595959"/>
+                </a:solidFill>
+                <a:latin typeface="맑은 고딕"/>
+              </a:rPr>
+              <a:t>이다</a:t>
+            </a:r>
+            <a:r>
+              <a:rPr sz="1100" b="0" dirty="0">
+                <a:solidFill>
+                  <a:srgbClr val="595959"/>
+                </a:solidFill>
+                <a:latin typeface="맑은 고딕"/>
+              </a:rPr>
+              <a:t>(C/V#15 </a:t>
+            </a:r>
+            <a:r>
+              <a:rPr sz="1100" b="0" dirty="0" err="1">
+                <a:solidFill>
+                  <a:srgbClr val="595959"/>
+                </a:solidFill>
+                <a:latin typeface="맑은 고딕"/>
+              </a:rPr>
+              <a:t>슬롯</a:t>
+            </a:r>
+            <a:r>
+              <a:rPr sz="1100" b="0" dirty="0">
+                <a:solidFill>
+                  <a:srgbClr val="595959"/>
+                </a:solidFill>
+                <a:latin typeface="맑은 고딕"/>
+              </a:rPr>
+              <a:t> </a:t>
+            </a:r>
+            <a:r>
+              <a:rPr sz="1100" b="0" dirty="0" err="1">
+                <a:solidFill>
+                  <a:srgbClr val="595959"/>
+                </a:solidFill>
+                <a:latin typeface="맑은 고딕"/>
+              </a:rPr>
+              <a:t>순서</a:t>
+            </a:r>
+            <a:r>
+              <a:rPr sz="1100" b="0" dirty="0">
+                <a:solidFill>
+                  <a:srgbClr val="595959"/>
+                </a:solidFill>
+                <a:latin typeface="맑은 고딕"/>
+              </a:rPr>
+              <a:t> 131,132,130).</a:t>
             </a:r>
           </a:p>
           <a:p>
             <a:pPr algn="ctr"/>
             <a:r>
-              <a:rPr sz="1100" b="0">
-                <a:solidFill>
-                  <a:srgbClr val="595959"/>
-                </a:solidFill>
-                <a:latin typeface="맑은 고딕"/>
-              </a:rPr>
-              <a:t>· 상위 보고 시 129 · 130 은 모두 102 로 되돌린다.</a:t>
+              <a:rPr sz="1100" b="0" dirty="0">
+                <a:solidFill>
+                  <a:srgbClr val="595959"/>
+                </a:solidFill>
+                <a:latin typeface="맑은 고딕"/>
+              </a:rPr>
+              <a:t>· </a:t>
+            </a:r>
+            <a:r>
+              <a:rPr sz="1100" b="0" dirty="0" err="1">
+                <a:solidFill>
+                  <a:srgbClr val="595959"/>
+                </a:solidFill>
+                <a:latin typeface="맑은 고딕"/>
+              </a:rPr>
+              <a:t>상위</a:t>
+            </a:r>
+            <a:r>
+              <a:rPr sz="1100" b="0" dirty="0">
+                <a:solidFill>
+                  <a:srgbClr val="595959"/>
+                </a:solidFill>
+                <a:latin typeface="맑은 고딕"/>
+              </a:rPr>
+              <a:t> </a:t>
+            </a:r>
+            <a:r>
+              <a:rPr sz="1100" b="0" dirty="0" err="1">
+                <a:solidFill>
+                  <a:srgbClr val="595959"/>
+                </a:solidFill>
+                <a:latin typeface="맑은 고딕"/>
+              </a:rPr>
+              <a:t>보고</a:t>
+            </a:r>
+            <a:r>
+              <a:rPr sz="1100" b="0" dirty="0">
+                <a:solidFill>
+                  <a:srgbClr val="595959"/>
+                </a:solidFill>
+                <a:latin typeface="맑은 고딕"/>
+              </a:rPr>
+              <a:t> 시 129 · 130 은 </a:t>
+            </a:r>
+            <a:r>
+              <a:rPr sz="1100" b="0" dirty="0" err="1">
+                <a:solidFill>
+                  <a:srgbClr val="595959"/>
+                </a:solidFill>
+                <a:latin typeface="맑은 고딕"/>
+              </a:rPr>
+              <a:t>모두</a:t>
+            </a:r>
+            <a:r>
+              <a:rPr sz="1100" b="0" dirty="0">
+                <a:solidFill>
+                  <a:srgbClr val="595959"/>
+                </a:solidFill>
+                <a:latin typeface="맑은 고딕"/>
+              </a:rPr>
+              <a:t> 102 로 </a:t>
+            </a:r>
+            <a:r>
+              <a:rPr sz="1100" b="0" dirty="0" err="1">
+                <a:solidFill>
+                  <a:srgbClr val="595959"/>
+                </a:solidFill>
+                <a:latin typeface="맑은 고딕"/>
+              </a:rPr>
+              <a:t>되돌린다</a:t>
+            </a:r>
+            <a:r>
+              <a:rPr sz="1100" b="0" dirty="0">
+                <a:solidFill>
+                  <a:srgbClr val="595959"/>
+                </a:solidFill>
+                <a:latin typeface="맑은 고딕"/>
+              </a:rPr>
+              <a:t>.</a:t>
             </a:r>
           </a:p>
           <a:p>
             <a:pPr algn="ctr"/>
             <a:r>
-              <a:rPr sz="1100" b="0">
-                <a:solidFill>
-                  <a:srgbClr val="595959"/>
-                </a:solidFill>
-                <a:latin typeface="맑은 고딕"/>
-              </a:rPr>
-              <a:t>· 피킹대 라인은 3칸이라 입고 드롭 판정이 칸 단위로 3-deep 이 된다.</a:t>
+              <a:rPr sz="1100" b="0" dirty="0">
+                <a:solidFill>
+                  <a:srgbClr val="595959"/>
+                </a:solidFill>
+                <a:latin typeface="맑은 고딕"/>
+              </a:rPr>
+              <a:t>· </a:t>
+            </a:r>
+            <a:r>
+              <a:rPr sz="1100" b="0" dirty="0" err="1">
+                <a:solidFill>
+                  <a:srgbClr val="595959"/>
+                </a:solidFill>
+                <a:latin typeface="맑은 고딕"/>
+              </a:rPr>
+              <a:t>피킹대</a:t>
+            </a:r>
+            <a:r>
+              <a:rPr sz="1100" b="0" dirty="0">
+                <a:solidFill>
+                  <a:srgbClr val="595959"/>
+                </a:solidFill>
+                <a:latin typeface="맑은 고딕"/>
+              </a:rPr>
+              <a:t> </a:t>
+            </a:r>
+            <a:r>
+              <a:rPr sz="1100" b="0" dirty="0" err="1">
+                <a:solidFill>
+                  <a:srgbClr val="595959"/>
+                </a:solidFill>
+                <a:latin typeface="맑은 고딕"/>
+              </a:rPr>
+              <a:t>라인은</a:t>
+            </a:r>
+            <a:r>
+              <a:rPr sz="1100" b="0" dirty="0">
+                <a:solidFill>
+                  <a:srgbClr val="595959"/>
+                </a:solidFill>
+                <a:latin typeface="맑은 고딕"/>
+              </a:rPr>
+              <a:t> 3칸이라 </a:t>
+            </a:r>
+            <a:r>
+              <a:rPr sz="1100" b="0" dirty="0" err="1">
+                <a:solidFill>
+                  <a:srgbClr val="595959"/>
+                </a:solidFill>
+                <a:latin typeface="맑은 고딕"/>
+              </a:rPr>
+              <a:t>입고</a:t>
+            </a:r>
+            <a:r>
+              <a:rPr sz="1100" b="0" dirty="0">
+                <a:solidFill>
+                  <a:srgbClr val="595959"/>
+                </a:solidFill>
+                <a:latin typeface="맑은 고딕"/>
+              </a:rPr>
+              <a:t> </a:t>
+            </a:r>
+            <a:r>
+              <a:rPr sz="1100" b="0" dirty="0" err="1">
+                <a:solidFill>
+                  <a:srgbClr val="595959"/>
+                </a:solidFill>
+                <a:latin typeface="맑은 고딕"/>
+              </a:rPr>
+              <a:t>드롭</a:t>
+            </a:r>
+            <a:r>
+              <a:rPr sz="1100" b="0" dirty="0">
+                <a:solidFill>
+                  <a:srgbClr val="595959"/>
+                </a:solidFill>
+                <a:latin typeface="맑은 고딕"/>
+              </a:rPr>
+              <a:t> </a:t>
+            </a:r>
+            <a:r>
+              <a:rPr sz="1100" b="0" dirty="0" err="1">
+                <a:solidFill>
+                  <a:srgbClr val="595959"/>
+                </a:solidFill>
+                <a:latin typeface="맑은 고딕"/>
+              </a:rPr>
+              <a:t>판정이</a:t>
+            </a:r>
+            <a:r>
+              <a:rPr sz="1100" b="0" dirty="0">
+                <a:solidFill>
+                  <a:srgbClr val="595959"/>
+                </a:solidFill>
+                <a:latin typeface="맑은 고딕"/>
+              </a:rPr>
+              <a:t> 칸 </a:t>
+            </a:r>
+            <a:r>
+              <a:rPr sz="1100" b="0" dirty="0" err="1">
+                <a:solidFill>
+                  <a:srgbClr val="595959"/>
+                </a:solidFill>
+                <a:latin typeface="맑은 고딕"/>
+              </a:rPr>
+              <a:t>단위로</a:t>
+            </a:r>
+            <a:r>
+              <a:rPr sz="1100" b="0" dirty="0">
+                <a:solidFill>
+                  <a:srgbClr val="595959"/>
+                </a:solidFill>
+                <a:latin typeface="맑은 고딕"/>
+              </a:rPr>
+              <a:t> 3-deep 이 </a:t>
+            </a:r>
+            <a:r>
+              <a:rPr sz="1100" b="0" dirty="0" err="1">
+                <a:solidFill>
+                  <a:srgbClr val="595959"/>
+                </a:solidFill>
+                <a:latin typeface="맑은 고딕"/>
+              </a:rPr>
+              <a:t>된다</a:t>
+            </a:r>
+            <a:r>
+              <a:rPr sz="1100" b="0" dirty="0">
+                <a:solidFill>
+                  <a:srgbClr val="595959"/>
+                </a:solidFill>
+                <a:latin typeface="맑은 고딕"/>
+              </a:rPr>
+              <a:t>.</a:t>
             </a:r>
           </a:p>
         </p:txBody>
@@ -4065,7 +4603,7 @@
           <a:noFill/>
         </p:spPr>
         <p:txBody>
-          <a:bodyPr wrap="square" anchor="t" lIns="36576" rIns="36576" tIns="0" bIns="0">
+          <a:bodyPr wrap="square" lIns="36576" tIns="0" rIns="36576" bIns="0" anchor="t">
             <a:spAutoFit/>
           </a:bodyPr>
           <a:lstStyle/>
@@ -4100,7 +4638,7 @@
           <a:noFill/>
         </p:spPr>
         <p:txBody>
-          <a:bodyPr wrap="square" anchor="t" lIns="36576" rIns="36576" tIns="0" bIns="0">
+          <a:bodyPr wrap="square" lIns="36576" tIns="0" rIns="36576" bIns="0" anchor="t">
             <a:spAutoFit/>
           </a:bodyPr>
           <a:lstStyle/>
@@ -4127,7 +4665,7 @@
 </file>
 
 <file path=ppt/slides/slide11.xml><?xml version="1.0" encoding="utf-8"?>
-<p:sld xmlns:a="http://schemas.openxmlformats.org/drawingml/2006/main" xmlns:p="http://schemas.openxmlformats.org/presentationml/2006/main" xmlns:r="http://schemas.openxmlformats.org/officeDocument/2006/relationships">
+<p:sld xmlns:a="http://schemas.openxmlformats.org/drawingml/2006/main" xmlns:r="http://schemas.openxmlformats.org/officeDocument/2006/relationships" xmlns:p="http://schemas.openxmlformats.org/presentationml/2006/main">
   <p:cSld>
     <p:spTree>
       <p:nvGrpSpPr>
@@ -4135,7 +4673,14 @@
         <p:cNvGrpSpPr/>
         <p:nvPr/>
       </p:nvGrpSpPr>
-      <p:grpSpPr/>
+      <p:grpSpPr>
+        <a:xfrm>
+          <a:off x="0" y="0"/>
+          <a:ext cx="0" cy="0"/>
+          <a:chOff x="0" y="0"/>
+          <a:chExt cx="0" cy="0"/>
+        </a:xfrm>
+      </p:grpSpPr>
       <p:sp>
         <p:nvSpPr>
           <p:cNvPr id="2" name="TextBox 1"/>
@@ -4153,7 +4698,7 @@
           <a:noFill/>
         </p:spPr>
         <p:txBody>
-          <a:bodyPr wrap="square" anchor="ctr" lIns="36576" rIns="36576" tIns="0" bIns="0">
+          <a:bodyPr wrap="square" lIns="36576" tIns="0" rIns="36576" bIns="0" anchor="ctr">
             <a:spAutoFit/>
           </a:bodyPr>
           <a:lstStyle/>
@@ -4188,7 +4733,7 @@
           <a:noFill/>
         </p:spPr>
         <p:txBody>
-          <a:bodyPr wrap="square" anchor="t" lIns="36576" rIns="36576" tIns="0" bIns="0">
+          <a:bodyPr wrap="square" lIns="36576" tIns="0" rIns="36576" bIns="0" anchor="t">
             <a:spAutoFit/>
           </a:bodyPr>
           <a:lstStyle/>
@@ -4245,42 +4790,102 @@
           </a:fontRef>
         </p:style>
         <p:txBody>
-          <a:bodyPr rtlCol="0" anchor="ctr" wrap="square" lIns="36576" rIns="36576" tIns="0" bIns="0"/>
+          <a:bodyPr wrap="square" lIns="36576" tIns="0" rIns="36576" bIns="0" rtlCol="0" anchor="ctr"/>
           <a:lstStyle/>
           <a:p>
             <a:pPr algn="ctr"/>
             <a:r>
-              <a:rPr sz="1200" b="1">
+              <a:rPr sz="1200" b="1" dirty="0" err="1">
                 <a:solidFill>
                   <a:srgbClr val="1E2761"/>
                 </a:solidFill>
                 <a:latin typeface="맑은 고딕"/>
               </a:rPr>
-              <a:t>설비 / PLC</a:t>
+              <a:t>설비</a:t>
+            </a:r>
+            <a:r>
+              <a:rPr sz="1200" b="1" dirty="0">
+                <a:solidFill>
+                  <a:srgbClr val="1E2761"/>
+                </a:solidFill>
+                <a:latin typeface="맑은 고딕"/>
+              </a:rPr>
+              <a:t> / PLC</a:t>
             </a:r>
           </a:p>
           <a:p>
             <a:pPr algn="ctr"/>
             <a:r>
-              <a:rPr sz="900" b="0">
-                <a:solidFill>
-                  <a:srgbClr val="595959"/>
-                </a:solidFill>
-                <a:latin typeface="맑은 고딕"/>
-              </a:rPr>
-              <a:t>알람코드 워드</a:t>
-            </a:r>
+              <a:rPr sz="900" b="0" dirty="0" err="1">
+                <a:solidFill>
+                  <a:srgbClr val="595959"/>
+                </a:solidFill>
+                <a:latin typeface="맑은 고딕"/>
+              </a:rPr>
+              <a:t>알람코드</a:t>
+            </a:r>
+            <a:r>
+              <a:rPr sz="900" b="0" dirty="0">
+                <a:solidFill>
+                  <a:srgbClr val="595959"/>
+                </a:solidFill>
+                <a:latin typeface="맑은 고딕"/>
+              </a:rPr>
+              <a:t> </a:t>
+            </a:r>
+            <a:r>
+              <a:rPr sz="900" b="0" dirty="0" err="1">
+                <a:solidFill>
+                  <a:srgbClr val="595959"/>
+                </a:solidFill>
+                <a:latin typeface="맑은 고딕"/>
+              </a:rPr>
+              <a:t>워드</a:t>
+            </a:r>
+            <a:endParaRPr sz="900" b="0" dirty="0">
+              <a:solidFill>
+                <a:srgbClr val="595959"/>
+              </a:solidFill>
+              <a:latin typeface="맑은 고딕"/>
+            </a:endParaRPr>
           </a:p>
           <a:p>
             <a:pPr algn="ctr"/>
             <a:r>
-              <a:rPr sz="900" b="0">
-                <a:solidFill>
-                  <a:srgbClr val="595959"/>
-                </a:solidFill>
-                <a:latin typeface="맑은 고딕"/>
-              </a:rPr>
-              <a:t>알람 비트 M55xx·M56xx</a:t>
+              <a:rPr sz="900" b="0" dirty="0" err="1">
+                <a:solidFill>
+                  <a:srgbClr val="595959"/>
+                </a:solidFill>
+                <a:latin typeface="맑은 고딕"/>
+              </a:rPr>
+              <a:t>알람</a:t>
+            </a:r>
+            <a:r>
+              <a:rPr sz="900" b="0" dirty="0">
+                <a:solidFill>
+                  <a:srgbClr val="595959"/>
+                </a:solidFill>
+                <a:latin typeface="맑은 고딕"/>
+              </a:rPr>
+              <a:t> </a:t>
+            </a:r>
+            <a:r>
+              <a:rPr sz="900" b="0" dirty="0" err="1">
+                <a:solidFill>
+                  <a:srgbClr val="595959"/>
+                </a:solidFill>
+                <a:latin typeface="맑은 고딕"/>
+              </a:rPr>
+              <a:t>비트</a:t>
+            </a:r>
+            <a:r>
+              <a:rPr sz="900" b="0" dirty="0">
+                <a:solidFill>
+                  <a:srgbClr val="595959"/>
+                </a:solidFill>
+                <a:latin typeface="맑은 고딕"/>
+              </a:rPr>
+              <a:t> M55xx·M56xx</a:t>
             </a:r>
           </a:p>
         </p:txBody>
@@ -4360,7 +4965,7 @@
           </a:fontRef>
         </p:style>
         <p:txBody>
-          <a:bodyPr rtlCol="0" anchor="ctr" wrap="square" lIns="36576" rIns="36576" tIns="0" bIns="0"/>
+          <a:bodyPr wrap="square" lIns="36576" tIns="0" rIns="36576" bIns="0" rtlCol="0" anchor="ctr"/>
           <a:lstStyle/>
           <a:p>
             <a:pPr algn="ctr"/>
@@ -4475,7 +5080,7 @@
           </a:fontRef>
         </p:style>
         <p:txBody>
-          <a:bodyPr rtlCol="0" anchor="ctr" wrap="square" lIns="36576" rIns="36576" tIns="0" bIns="0"/>
+          <a:bodyPr wrap="square" lIns="36576" tIns="0" rIns="36576" bIns="0" rtlCol="0" anchor="ctr"/>
           <a:lstStyle/>
           <a:p>
             <a:pPr algn="ctr"/>
@@ -4590,24 +5195,48 @@
           </a:fontRef>
         </p:style>
         <p:txBody>
-          <a:bodyPr rtlCol="0" anchor="ctr" wrap="square" lIns="36576" rIns="36576" tIns="0" bIns="0"/>
+          <a:bodyPr wrap="square" lIns="36576" tIns="0" rIns="36576" bIns="0" rtlCol="0" anchor="ctr"/>
           <a:lstStyle/>
           <a:p>
             <a:pPr algn="ctr"/>
             <a:r>
-              <a:rPr sz="1200" b="1">
+              <a:rPr sz="1200" b="1" dirty="0" err="1">
                 <a:solidFill>
                   <a:srgbClr val="1E2761"/>
                 </a:solidFill>
                 <a:latin typeface="맑은 고딕"/>
               </a:rPr>
-              <a:t>상위 통신</a:t>
-            </a:r>
+              <a:t>상위</a:t>
+            </a:r>
+            <a:r>
+              <a:rPr sz="1200" b="1" dirty="0">
+                <a:solidFill>
+                  <a:srgbClr val="1E2761"/>
+                </a:solidFill>
+                <a:latin typeface="맑은 고딕"/>
+              </a:rPr>
+              <a:t> </a:t>
+            </a:r>
+            <a:r>
+              <a:rPr sz="1200" b="1" dirty="0" err="1">
+                <a:solidFill>
+                  <a:srgbClr val="1E2761"/>
+                </a:solidFill>
+                <a:latin typeface="맑은 고딕"/>
+              </a:rPr>
+              <a:t>통신</a:t>
+            </a:r>
+            <a:endParaRPr sz="1200" b="1" dirty="0">
+              <a:solidFill>
+                <a:srgbClr val="1E2761"/>
+              </a:solidFill>
+              <a:latin typeface="맑은 고딕"/>
+            </a:endParaRPr>
           </a:p>
           <a:p>
             <a:pPr algn="ctr"/>
             <a:r>
-              <a:rPr sz="900" b="0">
+              <a:rPr sz="900" b="0" dirty="0" err="1">
                 <a:solidFill>
                   <a:srgbClr val="595959"/>
                 </a:solidFill>
@@ -4615,18 +5244,39 @@
               </a:rPr>
               <a:t>GetErrorReport</a:t>
             </a:r>
+            <a:endParaRPr sz="900" b="0" dirty="0">
+              <a:solidFill>
+                <a:srgbClr val="595959"/>
+              </a:solidFill>
+              <a:latin typeface="맑은 고딕"/>
+            </a:endParaRPr>
           </a:p>
           <a:p>
             <a:pPr algn="ctr"/>
             <a:r>
-              <a:rPr sz="900" b="0">
-                <a:solidFill>
-                  <a:srgbClr val="595959"/>
-                </a:solidFill>
-                <a:latin typeface="맑은 고딕"/>
-              </a:rPr>
-              <a:t>HOST_ERR_SEND_YN=N 대상</a:t>
-            </a:r>
+              <a:rPr sz="900" b="0" dirty="0">
+                <a:solidFill>
+                  <a:srgbClr val="595959"/>
+                </a:solidFill>
+                <a:latin typeface="맑은 고딕"/>
+              </a:rPr>
+              <a:t>HOST_ERR_SEND_YN=N </a:t>
+            </a:r>
+            <a:r>
+              <a:rPr sz="900" b="0" dirty="0" err="1">
+                <a:solidFill>
+                  <a:srgbClr val="595959"/>
+                </a:solidFill>
+                <a:latin typeface="맑은 고딕"/>
+              </a:rPr>
+              <a:t>대상</a:t>
+            </a:r>
+            <a:endParaRPr sz="900" b="0" dirty="0">
+              <a:solidFill>
+                <a:srgbClr val="595959"/>
+              </a:solidFill>
+              <a:latin typeface="맑은 고딕"/>
+            </a:endParaRPr>
           </a:p>
         </p:txBody>
       </p:sp>
@@ -4705,12 +5355,12 @@
           </a:fontRef>
         </p:style>
         <p:txBody>
-          <a:bodyPr rtlCol="0" anchor="ctr" wrap="square" lIns="36576" rIns="36576" tIns="0" bIns="0"/>
+          <a:bodyPr wrap="square" lIns="36576" tIns="0" rIns="36576" bIns="0" rtlCol="0" anchor="ctr"/>
           <a:lstStyle/>
           <a:p>
             <a:pPr algn="ctr"/>
             <a:r>
-              <a:rPr sz="1200" b="1">
+              <a:rPr sz="1200" b="1" dirty="0">
                 <a:solidFill>
                   <a:srgbClr val="1E2761"/>
                 </a:solidFill>
@@ -4722,26 +5372,83 @@
           <a:p>
             <a:pPr algn="ctr"/>
             <a:r>
-              <a:rPr sz="900" b="0">
-                <a:solidFill>
-                  <a:srgbClr val="595959"/>
-                </a:solidFill>
-                <a:latin typeface="맑은 고딕"/>
-              </a:rPr>
-              <a:t>E 전문 수신</a:t>
-            </a:r>
+              <a:rPr sz="900" b="0" dirty="0">
+                <a:solidFill>
+                  <a:srgbClr val="595959"/>
+                </a:solidFill>
+                <a:latin typeface="맑은 고딕"/>
+              </a:rPr>
+              <a:t>E </a:t>
+            </a:r>
+            <a:r>
+              <a:rPr sz="900" b="0" dirty="0" err="1">
+                <a:solidFill>
+                  <a:srgbClr val="595959"/>
+                </a:solidFill>
+                <a:latin typeface="맑은 고딕"/>
+              </a:rPr>
+              <a:t>전문</a:t>
+            </a:r>
+            <a:r>
+              <a:rPr sz="900" b="0" dirty="0">
+                <a:solidFill>
+                  <a:srgbClr val="595959"/>
+                </a:solidFill>
+                <a:latin typeface="맑은 고딕"/>
+              </a:rPr>
+              <a:t> </a:t>
+            </a:r>
+            <a:r>
+              <a:rPr sz="900" b="0" dirty="0" err="1">
+                <a:solidFill>
+                  <a:srgbClr val="595959"/>
+                </a:solidFill>
+                <a:latin typeface="맑은 고딕"/>
+              </a:rPr>
+              <a:t>수신</a:t>
+            </a:r>
+            <a:endParaRPr sz="900" b="0" dirty="0">
+              <a:solidFill>
+                <a:srgbClr val="595959"/>
+              </a:solidFill>
+              <a:latin typeface="맑은 고딕"/>
+            </a:endParaRPr>
           </a:p>
           <a:p>
             <a:pPr algn="ctr"/>
             <a:r>
-              <a:rPr sz="900" b="0">
-                <a:solidFill>
-                  <a:srgbClr val="595959"/>
-                </a:solidFill>
-                <a:latin typeface="맑은 고딕"/>
-              </a:rPr>
-              <a:t>ErrorKind · 코드</a:t>
-            </a:r>
+              <a:rPr sz="900" b="0" dirty="0" err="1">
+                <a:solidFill>
+                  <a:srgbClr val="595959"/>
+                </a:solidFill>
+                <a:latin typeface="맑은 고딕"/>
+              </a:rPr>
+              <a:t>ErrorKind</a:t>
+            </a:r>
+            <a:r>
+              <a:rPr sz="900" b="0" dirty="0">
+                <a:solidFill>
+                  <a:srgbClr val="595959"/>
+                </a:solidFill>
+                <a:latin typeface="맑은 고딕"/>
+              </a:rPr>
+              <a:t> · </a:t>
+            </a:r>
+            <a:r>
+              <a:rPr sz="900" b="0" dirty="0" err="1">
+                <a:solidFill>
+                  <a:srgbClr val="595959"/>
+                </a:solidFill>
+                <a:latin typeface="맑은 고딕"/>
+              </a:rPr>
+              <a:t>코드</a:t>
+            </a:r>
+            <a:endParaRPr sz="900" b="0" dirty="0">
+              <a:solidFill>
+                <a:srgbClr val="595959"/>
+              </a:solidFill>
+              <a:latin typeface="맑은 고딕"/>
+            </a:endParaRPr>
           </a:p>
         </p:txBody>
       </p:sp>
@@ -4764,10 +5471,34 @@
                 <a:tableStyleId>{5C22544A-7EE6-4342-B048-85BDC9FD1C3A}</a:tableStyleId>
               </a:tblPr>
               <a:tblGrid>
-                <a:gridCol w="1463040"/>
-                <a:gridCol w="2743200"/>
-                <a:gridCol w="3108960"/>
-                <a:gridCol w="3977639"/>
+                <a:gridCol w="1463040">
+                  <a:extLst>
+                    <a:ext uri="{9D8B030D-6E8A-4147-A177-3AD203B41FA5}">
+                      <a16:colId xmlns:a16="http://schemas.microsoft.com/office/drawing/2014/main" val="20000"/>
+                    </a:ext>
+                  </a:extLst>
+                </a:gridCol>
+                <a:gridCol w="2743200">
+                  <a:extLst>
+                    <a:ext uri="{9D8B030D-6E8A-4147-A177-3AD203B41FA5}">
+                      <a16:colId xmlns:a16="http://schemas.microsoft.com/office/drawing/2014/main" val="20001"/>
+                    </a:ext>
+                  </a:extLst>
+                </a:gridCol>
+                <a:gridCol w="3108960">
+                  <a:extLst>
+                    <a:ext uri="{9D8B030D-6E8A-4147-A177-3AD203B41FA5}">
+                      <a16:colId xmlns:a16="http://schemas.microsoft.com/office/drawing/2014/main" val="20002"/>
+                    </a:ext>
+                  </a:extLst>
+                </a:gridCol>
+                <a:gridCol w="3977639">
+                  <a:extLst>
+                    <a:ext uri="{9D8B030D-6E8A-4147-A177-3AD203B41FA5}">
+                      <a16:colId xmlns:a16="http://schemas.microsoft.com/office/drawing/2014/main" val="20003"/>
+                    </a:ext>
+                  </a:extLst>
+                </a:gridCol>
               </a:tblGrid>
               <a:tr h="274320">
                 <a:tc>
@@ -4858,6 +5589,11 @@
                     </a:solidFill>
                   </a:tcPr>
                 </a:tc>
+                <a:extLst>
+                  <a:ext uri="{0D108BD9-81ED-4DB2-BD59-A6C34878D82A}">
+                    <a16:rowId xmlns:a16="http://schemas.microsoft.com/office/drawing/2014/main" val="10000"/>
+                  </a:ext>
+                </a:extLst>
               </a:tr>
               <a:tr h="274320">
                 <a:tc>
@@ -4948,6 +5684,11 @@
                     </a:solidFill>
                   </a:tcPr>
                 </a:tc>
+                <a:extLst>
+                  <a:ext uri="{0D108BD9-81ED-4DB2-BD59-A6C34878D82A}">
+                    <a16:rowId xmlns:a16="http://schemas.microsoft.com/office/drawing/2014/main" val="10001"/>
+                  </a:ext>
+                </a:extLst>
               </a:tr>
               <a:tr h="274320">
                 <a:tc>
@@ -5038,6 +5779,11 @@
                     </a:solidFill>
                   </a:tcPr>
                 </a:tc>
+                <a:extLst>
+                  <a:ext uri="{0D108BD9-81ED-4DB2-BD59-A6C34878D82A}">
+                    <a16:rowId xmlns:a16="http://schemas.microsoft.com/office/drawing/2014/main" val="10002"/>
+                  </a:ext>
+                </a:extLst>
               </a:tr>
               <a:tr h="274320">
                 <a:tc>
@@ -5128,6 +5874,11 @@
                     </a:solidFill>
                   </a:tcPr>
                 </a:tc>
+                <a:extLst>
+                  <a:ext uri="{0D108BD9-81ED-4DB2-BD59-A6C34878D82A}">
+                    <a16:rowId xmlns:a16="http://schemas.microsoft.com/office/drawing/2014/main" val="10003"/>
+                  </a:ext>
+                </a:extLst>
               </a:tr>
               <a:tr h="274320">
                 <a:tc>
@@ -5218,6 +5969,11 @@
                     </a:solidFill>
                   </a:tcPr>
                 </a:tc>
+                <a:extLst>
+                  <a:ext uri="{0D108BD9-81ED-4DB2-BD59-A6C34878D82A}">
+                    <a16:rowId xmlns:a16="http://schemas.microsoft.com/office/drawing/2014/main" val="10004"/>
+                  </a:ext>
+                </a:extLst>
               </a:tr>
             </a:tbl>
           </a:graphicData>
@@ -5240,7 +5996,7 @@
           <a:noFill/>
         </p:spPr>
         <p:txBody>
-          <a:bodyPr wrap="square" anchor="t" lIns="36576" rIns="36576" tIns="0" bIns="0">
+          <a:bodyPr wrap="square" lIns="36576" tIns="0" rIns="36576" bIns="0" anchor="t">
             <a:spAutoFit/>
           </a:bodyPr>
           <a:lstStyle/>
@@ -5277,9 +6033,27 @@
                 <a:tableStyleId>{5C22544A-7EE6-4342-B048-85BDC9FD1C3A}</a:tableStyleId>
               </a:tblPr>
               <a:tblGrid>
-                <a:gridCol w="2011680"/>
-                <a:gridCol w="1188720"/>
-                <a:gridCol w="2377440"/>
+                <a:gridCol w="2011680">
+                  <a:extLst>
+                    <a:ext uri="{9D8B030D-6E8A-4147-A177-3AD203B41FA5}">
+                      <a16:colId xmlns:a16="http://schemas.microsoft.com/office/drawing/2014/main" val="20000"/>
+                    </a:ext>
+                  </a:extLst>
+                </a:gridCol>
+                <a:gridCol w="1188720">
+                  <a:extLst>
+                    <a:ext uri="{9D8B030D-6E8A-4147-A177-3AD203B41FA5}">
+                      <a16:colId xmlns:a16="http://schemas.microsoft.com/office/drawing/2014/main" val="20001"/>
+                    </a:ext>
+                  </a:extLst>
+                </a:gridCol>
+                <a:gridCol w="2377440">
+                  <a:extLst>
+                    <a:ext uri="{9D8B030D-6E8A-4147-A177-3AD203B41FA5}">
+                      <a16:colId xmlns:a16="http://schemas.microsoft.com/office/drawing/2014/main" val="20002"/>
+                    </a:ext>
+                  </a:extLst>
+                </a:gridCol>
               </a:tblGrid>
               <a:tr h="274320">
                 <a:tc>
@@ -5348,6 +6122,11 @@
                     </a:solidFill>
                   </a:tcPr>
                 </a:tc>
+                <a:extLst>
+                  <a:ext uri="{0D108BD9-81ED-4DB2-BD59-A6C34878D82A}">
+                    <a16:rowId xmlns:a16="http://schemas.microsoft.com/office/drawing/2014/main" val="10000"/>
+                  </a:ext>
+                </a:extLst>
               </a:tr>
               <a:tr h="274320">
                 <a:tc>
@@ -5416,6 +6195,11 @@
                     </a:solidFill>
                   </a:tcPr>
                 </a:tc>
+                <a:extLst>
+                  <a:ext uri="{0D108BD9-81ED-4DB2-BD59-A6C34878D82A}">
+                    <a16:rowId xmlns:a16="http://schemas.microsoft.com/office/drawing/2014/main" val="10001"/>
+                  </a:ext>
+                </a:extLst>
               </a:tr>
               <a:tr h="274320">
                 <a:tc>
@@ -5424,13 +6208,31 @@
                     <a:lstStyle/>
                     <a:p>
                       <a:r>
-                        <a:rPr sz="950">
+                        <a:rPr sz="950" dirty="0">
                           <a:solidFill>
                             <a:srgbClr val="222222"/>
                           </a:solidFill>
                           <a:latin typeface="맑은 고딕"/>
                         </a:rPr>
-                        <a:t>75 (ScEmptyCodes)</a:t>
+                        <a:t>75 (</a:t>
+                      </a:r>
+                      <a:r>
+                        <a:rPr sz="950" dirty="0" err="1">
+                          <a:solidFill>
+                            <a:srgbClr val="222222"/>
+                          </a:solidFill>
+                          <a:latin typeface="맑은 고딕"/>
+                        </a:rPr>
+                        <a:t>ScEmptyCodes</a:t>
+                      </a:r>
+                      <a:r>
+                        <a:rPr sz="950" dirty="0">
+                          <a:solidFill>
+                            <a:srgbClr val="222222"/>
+                          </a:solidFill>
+                          <a:latin typeface="맑은 고딕"/>
+                        </a:rPr>
+                        <a:t>)</a:t>
                       </a:r>
                     </a:p>
                   </a:txBody>
@@ -5484,6 +6286,11 @@
                     </a:solidFill>
                   </a:tcPr>
                 </a:tc>
+                <a:extLst>
+                  <a:ext uri="{0D108BD9-81ED-4DB2-BD59-A6C34878D82A}">
+                    <a16:rowId xmlns:a16="http://schemas.microsoft.com/office/drawing/2014/main" val="10002"/>
+                  </a:ext>
+                </a:extLst>
               </a:tr>
               <a:tr h="274320">
                 <a:tc>
@@ -5536,14 +6343,38 @@
                     <a:lstStyle/>
                     <a:p>
                       <a:r>
-                        <a:rPr sz="950">
+                        <a:rPr sz="950" dirty="0" err="1">
                           <a:solidFill>
                             <a:srgbClr val="222222"/>
                           </a:solidFill>
                           <a:latin typeface="맑은 고딕"/>
                         </a:rPr>
-                        <a:t>기계적 에러</a:t>
+                        <a:t>기계적</a:t>
                       </a:r>
+                      <a:r>
+                        <a:rPr sz="950" dirty="0">
+                          <a:solidFill>
+                            <a:srgbClr val="222222"/>
+                          </a:solidFill>
+                          <a:latin typeface="맑은 고딕"/>
+                        </a:rPr>
+                        <a:t> </a:t>
+                      </a:r>
+                      <a:r>
+                        <a:rPr sz="950" dirty="0" err="1">
+                          <a:solidFill>
+                            <a:srgbClr val="222222"/>
+                          </a:solidFill>
+                          <a:latin typeface="맑은 고딕"/>
+                        </a:rPr>
+                        <a:t>에러</a:t>
+                      </a:r>
+                      <a:endParaRPr sz="950" dirty="0">
+                        <a:solidFill>
+                          <a:srgbClr val="222222"/>
+                        </a:solidFill>
+                        <a:latin typeface="맑은 고딕"/>
+                      </a:endParaRPr>
                     </a:p>
                   </a:txBody>
                   <a:tcPr marT="18288" marB="18288">
@@ -5552,6 +6383,11 @@
                     </a:solidFill>
                   </a:tcPr>
                 </a:tc>
+                <a:extLst>
+                  <a:ext uri="{0D108BD9-81ED-4DB2-BD59-A6C34878D82A}">
+                    <a16:rowId xmlns:a16="http://schemas.microsoft.com/office/drawing/2014/main" val="10003"/>
+                  </a:ext>
+                </a:extLst>
               </a:tr>
             </a:tbl>
           </a:graphicData>
@@ -5596,78 +6432,318 @@
           </a:fontRef>
         </p:style>
         <p:txBody>
-          <a:bodyPr rtlCol="0" anchor="ctr" wrap="square" lIns="36576" rIns="36576" tIns="0" bIns="0"/>
+          <a:bodyPr wrap="square" lIns="36576" tIns="0" rIns="36576" bIns="0" rtlCol="0" anchor="ctr"/>
           <a:lstStyle/>
           <a:p>
             <a:pPr algn="ctr"/>
             <a:r>
-              <a:rPr sz="1150" b="1">
+              <a:rPr sz="1150" b="1" dirty="0" err="1">
                 <a:solidFill>
                   <a:srgbClr val="1E2761"/>
                 </a:solidFill>
                 <a:latin typeface="맑은 고딕"/>
               </a:rPr>
-              <a:t>스케줄러의 처리</a:t>
-            </a:r>
+              <a:t>스케줄러의</a:t>
+            </a:r>
+            <a:r>
+              <a:rPr sz="1150" b="1" dirty="0">
+                <a:solidFill>
+                  <a:srgbClr val="1E2761"/>
+                </a:solidFill>
+                <a:latin typeface="맑은 고딕"/>
+              </a:rPr>
+              <a:t> </a:t>
+            </a:r>
+            <a:r>
+              <a:rPr sz="1150" b="1" dirty="0" err="1">
+                <a:solidFill>
+                  <a:srgbClr val="1E2761"/>
+                </a:solidFill>
+                <a:latin typeface="맑은 고딕"/>
+              </a:rPr>
+              <a:t>처리</a:t>
+            </a:r>
+            <a:endParaRPr sz="1150" b="1" dirty="0">
+              <a:solidFill>
+                <a:srgbClr val="1E2761"/>
+              </a:solidFill>
+              <a:latin typeface="맑은 고딕"/>
+            </a:endParaRPr>
           </a:p>
           <a:p>
             <a:pPr algn="ctr"/>
             <a:r>
-              <a:rPr sz="1000" b="0">
-                <a:solidFill>
-                  <a:srgbClr val="595959"/>
-                </a:solidFill>
-                <a:latin typeface="맑은 고딕"/>
-              </a:rPr>
-              <a:t>· MonitorAlarm : 새 알람 코드를 로그로만 남긴다.</a:t>
+              <a:rPr sz="1000" b="0" dirty="0">
+                <a:solidFill>
+                  <a:srgbClr val="595959"/>
+                </a:solidFill>
+                <a:latin typeface="맑은 고딕"/>
+              </a:rPr>
+              <a:t>· </a:t>
+            </a:r>
+            <a:r>
+              <a:rPr sz="1000" b="0" dirty="0" err="1">
+                <a:solidFill>
+                  <a:srgbClr val="595959"/>
+                </a:solidFill>
+                <a:latin typeface="맑은 고딕"/>
+              </a:rPr>
+              <a:t>MonitorAlarm</a:t>
+            </a:r>
+            <a:r>
+              <a:rPr sz="1000" b="0" dirty="0">
+                <a:solidFill>
+                  <a:srgbClr val="595959"/>
+                </a:solidFill>
+                <a:latin typeface="맑은 고딕"/>
+              </a:rPr>
+              <a:t> : 새 </a:t>
+            </a:r>
+            <a:r>
+              <a:rPr sz="1000" b="0" dirty="0" err="1">
+                <a:solidFill>
+                  <a:srgbClr val="595959"/>
+                </a:solidFill>
+                <a:latin typeface="맑은 고딕"/>
+              </a:rPr>
+              <a:t>알람</a:t>
+            </a:r>
+            <a:r>
+              <a:rPr sz="1000" b="0" dirty="0">
+                <a:solidFill>
+                  <a:srgbClr val="595959"/>
+                </a:solidFill>
+                <a:latin typeface="맑은 고딕"/>
+              </a:rPr>
+              <a:t> </a:t>
+            </a:r>
+            <a:r>
+              <a:rPr sz="1000" b="0" dirty="0" err="1">
+                <a:solidFill>
+                  <a:srgbClr val="595959"/>
+                </a:solidFill>
+                <a:latin typeface="맑은 고딕"/>
+              </a:rPr>
+              <a:t>코드를</a:t>
+            </a:r>
+            <a:r>
+              <a:rPr sz="1000" b="0" dirty="0">
+                <a:solidFill>
+                  <a:srgbClr val="595959"/>
+                </a:solidFill>
+                <a:latin typeface="맑은 고딕"/>
+              </a:rPr>
+              <a:t> </a:t>
+            </a:r>
+            <a:r>
+              <a:rPr sz="1000" b="0" dirty="0" err="1">
+                <a:solidFill>
+                  <a:srgbClr val="595959"/>
+                </a:solidFill>
+                <a:latin typeface="맑은 고딕"/>
+              </a:rPr>
+              <a:t>로그로만</a:t>
+            </a:r>
+            <a:r>
+              <a:rPr sz="1000" b="0" dirty="0">
+                <a:solidFill>
+                  <a:srgbClr val="595959"/>
+                </a:solidFill>
+                <a:latin typeface="맑은 고딕"/>
+              </a:rPr>
+              <a:t> </a:t>
+            </a:r>
+            <a:r>
+              <a:rPr sz="1000" b="0" dirty="0" err="1">
+                <a:solidFill>
+                  <a:srgbClr val="595959"/>
+                </a:solidFill>
+                <a:latin typeface="맑은 고딕"/>
+              </a:rPr>
+              <a:t>남긴다</a:t>
+            </a:r>
+            <a:r>
+              <a:rPr sz="1000" b="0" dirty="0">
+                <a:solidFill>
+                  <a:srgbClr val="595959"/>
+                </a:solidFill>
+                <a:latin typeface="맑은 고딕"/>
+              </a:rPr>
+              <a:t>.</a:t>
             </a:r>
           </a:p>
           <a:p>
             <a:pPr algn="ctr"/>
             <a:r>
-              <a:rPr sz="1000" b="0">
-                <a:solidFill>
-                  <a:srgbClr val="595959"/>
-                </a:solidFill>
-                <a:latin typeface="맑은 고딕"/>
-              </a:rPr>
-              <a:t>· DriveSC / DriveRGV / DriveCV 는 에러 코드가 있는 설비에 지시하지 않는다.</a:t>
-            </a:r>
-          </a:p>
-          <a:p>
-            <a:pPr algn="ctr"/>
-            <a:r>
-              <a:rPr sz="1000" b="0">
-                <a:solidFill>
-                  <a:srgbClr val="595959"/>
-                </a:solidFill>
-                <a:latin typeface="맑은 고딕"/>
-              </a:rPr>
-              <a:t>· 이중입고·공출고 작업상태 처리(MarkErrorJobStatus)와</a:t>
-            </a:r>
-          </a:p>
-          <a:p>
-            <a:pPr algn="ctr"/>
-            <a:r>
-              <a:rPr sz="1000" b="0">
-                <a:solidFill>
-                  <a:srgbClr val="595959"/>
-                </a:solidFill>
-                <a:latin typeface="맑은 고딕"/>
-              </a:rPr>
-              <a:t>  재지정 재개(ResumeRedirectedJobs)는 호출하지 않는다.</a:t>
-            </a:r>
-          </a:p>
-          <a:p>
-            <a:pPr algn="ctr"/>
-            <a:r>
-              <a:rPr sz="1000" b="0">
-                <a:solidFill>
-                  <a:srgbClr val="B02E2E"/>
-                </a:solidFill>
-                <a:latin typeface="맑은 고딕"/>
-              </a:rPr>
-              <a:t>  "이 현장 없음"(사용자 확인 2026-09-16) - 정의만 보존.</a:t>
+              <a:rPr sz="1000" b="0" dirty="0">
+                <a:solidFill>
+                  <a:srgbClr val="595959"/>
+                </a:solidFill>
+                <a:latin typeface="맑은 고딕"/>
+              </a:rPr>
+              <a:t>· </a:t>
+            </a:r>
+            <a:r>
+              <a:rPr sz="1000" b="0" dirty="0" err="1">
+                <a:solidFill>
+                  <a:srgbClr val="595959"/>
+                </a:solidFill>
+                <a:latin typeface="맑은 고딕"/>
+              </a:rPr>
+              <a:t>DriveSC</a:t>
+            </a:r>
+            <a:r>
+              <a:rPr sz="1000" b="0" dirty="0">
+                <a:solidFill>
+                  <a:srgbClr val="595959"/>
+                </a:solidFill>
+                <a:latin typeface="맑은 고딕"/>
+              </a:rPr>
+              <a:t> / </a:t>
+            </a:r>
+            <a:r>
+              <a:rPr sz="1000" b="0" dirty="0" err="1">
+                <a:solidFill>
+                  <a:srgbClr val="595959"/>
+                </a:solidFill>
+                <a:latin typeface="맑은 고딕"/>
+              </a:rPr>
+              <a:t>DriveRGV</a:t>
+            </a:r>
+            <a:r>
+              <a:rPr sz="1000" b="0" dirty="0">
+                <a:solidFill>
+                  <a:srgbClr val="595959"/>
+                </a:solidFill>
+                <a:latin typeface="맑은 고딕"/>
+              </a:rPr>
+              <a:t> / </a:t>
+            </a:r>
+            <a:r>
+              <a:rPr sz="1000" b="0" dirty="0" err="1">
+                <a:solidFill>
+                  <a:srgbClr val="595959"/>
+                </a:solidFill>
+                <a:latin typeface="맑은 고딕"/>
+              </a:rPr>
+              <a:t>DriveCV</a:t>
+            </a:r>
+            <a:r>
+              <a:rPr sz="1000" b="0" dirty="0">
+                <a:solidFill>
+                  <a:srgbClr val="595959"/>
+                </a:solidFill>
+                <a:latin typeface="맑은 고딕"/>
+              </a:rPr>
+              <a:t> 는 </a:t>
+            </a:r>
+            <a:r>
+              <a:rPr sz="1000" b="0" dirty="0" err="1">
+                <a:solidFill>
+                  <a:srgbClr val="595959"/>
+                </a:solidFill>
+                <a:latin typeface="맑은 고딕"/>
+              </a:rPr>
+              <a:t>에러</a:t>
+            </a:r>
+            <a:r>
+              <a:rPr sz="1000" b="0" dirty="0">
+                <a:solidFill>
+                  <a:srgbClr val="595959"/>
+                </a:solidFill>
+                <a:latin typeface="맑은 고딕"/>
+              </a:rPr>
+              <a:t> </a:t>
+            </a:r>
+            <a:r>
+              <a:rPr sz="1000" b="0" dirty="0" err="1">
+                <a:solidFill>
+                  <a:srgbClr val="595959"/>
+                </a:solidFill>
+                <a:latin typeface="맑은 고딕"/>
+              </a:rPr>
+              <a:t>코드가</a:t>
+            </a:r>
+            <a:r>
+              <a:rPr sz="1000" b="0" dirty="0">
+                <a:solidFill>
+                  <a:srgbClr val="595959"/>
+                </a:solidFill>
+                <a:latin typeface="맑은 고딕"/>
+              </a:rPr>
+              <a:t> </a:t>
+            </a:r>
+            <a:r>
+              <a:rPr sz="1000" b="0" dirty="0" err="1">
+                <a:solidFill>
+                  <a:srgbClr val="595959"/>
+                </a:solidFill>
+                <a:latin typeface="맑은 고딕"/>
+              </a:rPr>
+              <a:t>있는</a:t>
+            </a:r>
+            <a:r>
+              <a:rPr sz="1000" b="0" dirty="0">
+                <a:solidFill>
+                  <a:srgbClr val="595959"/>
+                </a:solidFill>
+                <a:latin typeface="맑은 고딕"/>
+              </a:rPr>
+              <a:t> </a:t>
+            </a:r>
+            <a:r>
+              <a:rPr sz="1000" b="0" dirty="0" err="1">
+                <a:solidFill>
+                  <a:srgbClr val="595959"/>
+                </a:solidFill>
+                <a:latin typeface="맑은 고딕"/>
+              </a:rPr>
+              <a:t>설비에</a:t>
+            </a:r>
+            <a:r>
+              <a:rPr sz="1000" b="0" dirty="0">
+                <a:solidFill>
+                  <a:srgbClr val="595959"/>
+                </a:solidFill>
+                <a:latin typeface="맑은 고딕"/>
+              </a:rPr>
+              <a:t> </a:t>
+            </a:r>
+            <a:r>
+              <a:rPr sz="1000" b="0" dirty="0" err="1">
+                <a:solidFill>
+                  <a:srgbClr val="595959"/>
+                </a:solidFill>
+                <a:latin typeface="맑은 고딕"/>
+              </a:rPr>
+              <a:t>지시하지</a:t>
+            </a:r>
+            <a:r>
+              <a:rPr sz="1000" b="0" dirty="0">
+                <a:solidFill>
+                  <a:srgbClr val="595959"/>
+                </a:solidFill>
+                <a:latin typeface="맑은 고딕"/>
+              </a:rPr>
+              <a:t> </a:t>
+            </a:r>
+            <a:r>
+              <a:rPr sz="1000" b="0" dirty="0" err="1">
+                <a:solidFill>
+                  <a:srgbClr val="595959"/>
+                </a:solidFill>
+                <a:latin typeface="맑은 고딕"/>
+              </a:rPr>
+              <a:t>않는다</a:t>
+            </a:r>
+            <a:r>
+              <a:rPr sz="1000" b="0" dirty="0">
+                <a:solidFill>
+                  <a:srgbClr val="595959"/>
+                </a:solidFill>
+                <a:latin typeface="맑은 고딕"/>
+              </a:rPr>
+              <a:t>.</a:t>
             </a:r>
           </a:p>
         </p:txBody>
@@ -5689,7 +6765,7 @@
           <a:noFill/>
         </p:spPr>
         <p:txBody>
-          <a:bodyPr wrap="square" anchor="t" lIns="36576" rIns="36576" tIns="0" bIns="0">
+          <a:bodyPr wrap="square" lIns="36576" tIns="0" rIns="36576" bIns="0" anchor="t">
             <a:spAutoFit/>
           </a:bodyPr>
           <a:lstStyle/>
@@ -5724,7 +6800,7 @@
           <a:noFill/>
         </p:spPr>
         <p:txBody>
-          <a:bodyPr wrap="square" anchor="t" lIns="36576" rIns="36576" tIns="0" bIns="0">
+          <a:bodyPr wrap="square" lIns="36576" tIns="0" rIns="36576" bIns="0" anchor="t">
             <a:spAutoFit/>
           </a:bodyPr>
           <a:lstStyle/>
@@ -5751,7 +6827,7 @@
 </file>
 
 <file path=ppt/slides/slide12.xml><?xml version="1.0" encoding="utf-8"?>
-<p:sld xmlns:a="http://schemas.openxmlformats.org/drawingml/2006/main" xmlns:p="http://schemas.openxmlformats.org/presentationml/2006/main" xmlns:r="http://schemas.openxmlformats.org/officeDocument/2006/relationships">
+<p:sld xmlns:a="http://schemas.openxmlformats.org/drawingml/2006/main" xmlns:r="http://schemas.openxmlformats.org/officeDocument/2006/relationships" xmlns:p="http://schemas.openxmlformats.org/presentationml/2006/main">
   <p:cSld>
     <p:spTree>
       <p:nvGrpSpPr>
@@ -5759,7 +6835,14 @@
         <p:cNvGrpSpPr/>
         <p:nvPr/>
       </p:nvGrpSpPr>
-      <p:grpSpPr/>
+      <p:grpSpPr>
+        <a:xfrm>
+          <a:off x="0" y="0"/>
+          <a:ext cx="0" cy="0"/>
+          <a:chOff x="0" y="0"/>
+          <a:chExt cx="0" cy="0"/>
+        </a:xfrm>
+      </p:grpSpPr>
       <p:sp>
         <p:nvSpPr>
           <p:cNvPr id="2" name="TextBox 1"/>
@@ -5777,7 +6860,7 @@
           <a:noFill/>
         </p:spPr>
         <p:txBody>
-          <a:bodyPr wrap="square" anchor="ctr" lIns="36576" rIns="36576" tIns="0" bIns="0">
+          <a:bodyPr wrap="square" lIns="36576" tIns="0" rIns="36576" bIns="0" anchor="ctr">
             <a:spAutoFit/>
           </a:bodyPr>
           <a:lstStyle/>
@@ -5812,7 +6895,7 @@
           <a:noFill/>
         </p:spPr>
         <p:txBody>
-          <a:bodyPr wrap="square" anchor="t" lIns="36576" rIns="36576" tIns="0" bIns="0">
+          <a:bodyPr wrap="square" lIns="36576" tIns="0" rIns="36576" bIns="0" anchor="t">
             <a:spAutoFit/>
           </a:bodyPr>
           <a:lstStyle/>
@@ -5847,7 +6930,7 @@
           <a:noFill/>
         </p:spPr>
         <p:txBody>
-          <a:bodyPr wrap="square" anchor="t" lIns="36576" rIns="36576" tIns="0" bIns="0">
+          <a:bodyPr wrap="square" lIns="36576" tIns="0" rIns="36576" bIns="0" anchor="t">
             <a:spAutoFit/>
           </a:bodyPr>
           <a:lstStyle/>
@@ -5882,7 +6965,7 @@
           <a:noFill/>
         </p:spPr>
         <p:txBody>
-          <a:bodyPr wrap="square" anchor="t" lIns="36576" rIns="36576" tIns="0" bIns="0">
+          <a:bodyPr wrap="square" lIns="36576" tIns="0" rIns="36576" bIns="0" anchor="t">
             <a:spAutoFit/>
           </a:bodyPr>
           <a:lstStyle/>
@@ -5917,7 +7000,7 @@
           <a:noFill/>
         </p:spPr>
         <p:txBody>
-          <a:bodyPr wrap="square" anchor="t" lIns="36576" rIns="36576" tIns="0" bIns="0">
+          <a:bodyPr wrap="square" lIns="36576" tIns="0" rIns="36576" bIns="0" anchor="t">
             <a:spAutoFit/>
           </a:bodyPr>
           <a:lstStyle/>
@@ -5952,7 +7035,7 @@
           <a:noFill/>
         </p:spPr>
         <p:txBody>
-          <a:bodyPr wrap="square" anchor="t" lIns="36576" rIns="36576" tIns="0" bIns="0">
+          <a:bodyPr wrap="square" lIns="36576" tIns="0" rIns="36576" bIns="0" anchor="t">
             <a:spAutoFit/>
           </a:bodyPr>
           <a:lstStyle/>
@@ -5987,7 +7070,7 @@
           <a:noFill/>
         </p:spPr>
         <p:txBody>
-          <a:bodyPr wrap="square" anchor="t" lIns="36576" rIns="36576" tIns="0" bIns="0">
+          <a:bodyPr wrap="square" lIns="36576" tIns="0" rIns="36576" bIns="0" anchor="t">
             <a:spAutoFit/>
           </a:bodyPr>
           <a:lstStyle/>
@@ -6022,7 +7105,7 @@
           <a:noFill/>
         </p:spPr>
         <p:txBody>
-          <a:bodyPr wrap="square" anchor="t" lIns="36576" rIns="36576" tIns="0" bIns="0">
+          <a:bodyPr wrap="square" lIns="36576" tIns="0" rIns="36576" bIns="0" anchor="t">
             <a:spAutoFit/>
           </a:bodyPr>
           <a:lstStyle/>
@@ -6057,7 +7140,7 @@
           <a:noFill/>
         </p:spPr>
         <p:txBody>
-          <a:bodyPr wrap="square" anchor="t" lIns="36576" rIns="36576" tIns="0" bIns="0">
+          <a:bodyPr wrap="square" lIns="36576" tIns="0" rIns="36576" bIns="0" anchor="t">
             <a:spAutoFit/>
           </a:bodyPr>
           <a:lstStyle/>
@@ -6092,7 +7175,7 @@
           <a:noFill/>
         </p:spPr>
         <p:txBody>
-          <a:bodyPr wrap="square" anchor="t" lIns="36576" rIns="36576" tIns="0" bIns="0">
+          <a:bodyPr wrap="square" lIns="36576" tIns="0" rIns="36576" bIns="0" anchor="t">
             <a:spAutoFit/>
           </a:bodyPr>
           <a:lstStyle/>
@@ -6127,21 +7210,144 @@
           <a:noFill/>
         </p:spPr>
         <p:txBody>
-          <a:bodyPr wrap="square" anchor="t" lIns="36576" rIns="36576" tIns="0" bIns="0">
+          <a:bodyPr wrap="square" lIns="36576" tIns="0" rIns="36576" bIns="0" anchor="t">
             <a:spAutoFit/>
           </a:bodyPr>
           <a:lstStyle/>
           <a:p>
             <a:pPr algn="l"/>
             <a:r>
-              <a:rPr sz="1050" b="1">
+              <a:rPr sz="1050" b="1" dirty="0">
                 <a:solidFill>
                   <a:srgbClr val="C87A0E"/>
                 </a:solidFill>
                 <a:latin typeface="맑은 고딕"/>
               </a:rPr>
-              <a:t>→ 체류 복구(시간 기반 자동 완료)는 2026-09-17 폐기</a:t>
-            </a:r>
+              <a:t>→ </a:t>
+            </a:r>
+            <a:r>
+              <a:rPr sz="1050" b="1" dirty="0" err="1">
+                <a:solidFill>
+                  <a:srgbClr val="C87A0E"/>
+                </a:solidFill>
+                <a:latin typeface="맑은 고딕"/>
+              </a:rPr>
+              <a:t>체류</a:t>
+            </a:r>
+            <a:r>
+              <a:rPr sz="1050" b="1" dirty="0">
+                <a:solidFill>
+                  <a:srgbClr val="C87A0E"/>
+                </a:solidFill>
+                <a:latin typeface="맑은 고딕"/>
+              </a:rPr>
+              <a:t> </a:t>
+            </a:r>
+            <a:r>
+              <a:rPr sz="1050" b="1" dirty="0" err="1">
+                <a:solidFill>
+                  <a:srgbClr val="C87A0E"/>
+                </a:solidFill>
+                <a:latin typeface="맑은 고딕"/>
+              </a:rPr>
+              <a:t>복구</a:t>
+            </a:r>
+            <a:r>
+              <a:rPr sz="1050" b="1" dirty="0">
+                <a:solidFill>
+                  <a:srgbClr val="C87A0E"/>
+                </a:solidFill>
+                <a:latin typeface="맑은 고딕"/>
+              </a:rPr>
+              <a:t>(</a:t>
+            </a:r>
+            <a:r>
+              <a:rPr sz="1050" b="1" dirty="0" err="1">
+                <a:solidFill>
+                  <a:srgbClr val="C87A0E"/>
+                </a:solidFill>
+                <a:latin typeface="맑은 고딕"/>
+              </a:rPr>
+              <a:t>시간</a:t>
+            </a:r>
+            <a:r>
+              <a:rPr sz="1050" b="1" dirty="0">
+                <a:solidFill>
+                  <a:srgbClr val="C87A0E"/>
+                </a:solidFill>
+                <a:latin typeface="맑은 고딕"/>
+              </a:rPr>
+              <a:t> </a:t>
+            </a:r>
+            <a:r>
+              <a:rPr sz="1050" b="1" dirty="0" err="1">
+                <a:solidFill>
+                  <a:srgbClr val="C87A0E"/>
+                </a:solidFill>
+                <a:latin typeface="맑은 고딕"/>
+              </a:rPr>
+              <a:t>기반</a:t>
+            </a:r>
+            <a:r>
+              <a:rPr sz="1050" b="1" dirty="0">
+                <a:solidFill>
+                  <a:srgbClr val="C87A0E"/>
+                </a:solidFill>
+                <a:latin typeface="맑은 고딕"/>
+              </a:rPr>
+              <a:t> </a:t>
+            </a:r>
+            <a:r>
+              <a:rPr sz="1050" b="1" dirty="0" err="1">
+                <a:solidFill>
+                  <a:srgbClr val="C87A0E"/>
+                </a:solidFill>
+                <a:latin typeface="맑은 고딕"/>
+              </a:rPr>
+              <a:t>자동</a:t>
+            </a:r>
+            <a:r>
+              <a:rPr sz="1050" b="1" dirty="0">
+                <a:solidFill>
+                  <a:srgbClr val="C87A0E"/>
+                </a:solidFill>
+                <a:latin typeface="맑은 고딕"/>
+              </a:rPr>
+              <a:t> </a:t>
+            </a:r>
+            <a:r>
+              <a:rPr sz="1050" b="1" dirty="0" err="1">
+                <a:solidFill>
+                  <a:srgbClr val="C87A0E"/>
+                </a:solidFill>
+                <a:latin typeface="맑은 고딕"/>
+              </a:rPr>
+              <a:t>완료</a:t>
+            </a:r>
+            <a:r>
+              <a:rPr sz="1050" b="1" dirty="0">
+                <a:solidFill>
+                  <a:srgbClr val="C87A0E"/>
+                </a:solidFill>
+                <a:latin typeface="맑은 고딕"/>
+              </a:rPr>
+              <a:t>)는 2026-09-17 </a:t>
+            </a:r>
+            <a:r>
+              <a:rPr sz="1050" b="1" dirty="0" err="1">
+                <a:solidFill>
+                  <a:srgbClr val="C87A0E"/>
+                </a:solidFill>
+                <a:latin typeface="맑은 고딕"/>
+              </a:rPr>
+              <a:t>폐기</a:t>
+            </a:r>
+            <a:endParaRPr sz="1050" b="1" dirty="0">
+              <a:solidFill>
+                <a:srgbClr val="C87A0E"/>
+              </a:solidFill>
+              <a:latin typeface="맑은 고딕"/>
+            </a:endParaRPr>
           </a:p>
         </p:txBody>
       </p:sp>
@@ -6162,7 +7368,7 @@
           <a:noFill/>
         </p:spPr>
         <p:txBody>
-          <a:bodyPr wrap="square" anchor="t" lIns="36576" rIns="36576" tIns="0" bIns="0">
+          <a:bodyPr wrap="square" lIns="36576" tIns="0" rIns="36576" bIns="0" anchor="t">
             <a:spAutoFit/>
           </a:bodyPr>
           <a:lstStyle/>
@@ -6197,7 +7403,7 @@
           <a:noFill/>
         </p:spPr>
         <p:txBody>
-          <a:bodyPr wrap="square" anchor="t" lIns="36576" rIns="36576" tIns="0" bIns="0">
+          <a:bodyPr wrap="square" lIns="36576" tIns="0" rIns="36576" bIns="0" anchor="t">
             <a:spAutoFit/>
           </a:bodyPr>
           <a:lstStyle/>
@@ -6232,21 +7438,180 @@
           <a:noFill/>
         </p:spPr>
         <p:txBody>
-          <a:bodyPr wrap="square" anchor="t" lIns="36576" rIns="36576" tIns="0" bIns="0">
+          <a:bodyPr wrap="square" lIns="36576" tIns="0" rIns="36576" bIns="0" anchor="t">
             <a:spAutoFit/>
           </a:bodyPr>
           <a:lstStyle/>
           <a:p>
             <a:pPr algn="l"/>
             <a:r>
-              <a:rPr sz="1100" b="0">
-                <a:solidFill>
-                  <a:srgbClr val="595959"/>
-                </a:solidFill>
-                <a:latin typeface="맑은 고딕"/>
-              </a:rPr>
-              <a:t>② 상태를 자동으로 바꾸지 않는다 - 실물 위치를 잃지 않기 위함</a:t>
-            </a:r>
+              <a:rPr sz="1100" b="0" dirty="0">
+                <a:solidFill>
+                  <a:srgbClr val="595959"/>
+                </a:solidFill>
+                <a:latin typeface="맑은 고딕"/>
+              </a:rPr>
+              <a:t>② </a:t>
+            </a:r>
+            <a:r>
+              <a:rPr sz="1100" b="0" dirty="0" err="1">
+                <a:solidFill>
+                  <a:srgbClr val="595959"/>
+                </a:solidFill>
+                <a:latin typeface="맑은 고딕"/>
+              </a:rPr>
+              <a:t>상태를</a:t>
+            </a:r>
+            <a:r>
+              <a:rPr sz="1100" b="0" dirty="0">
+                <a:solidFill>
+                  <a:srgbClr val="595959"/>
+                </a:solidFill>
+                <a:latin typeface="맑은 고딕"/>
+              </a:rPr>
+              <a:t> </a:t>
+            </a:r>
+            <a:r>
+              <a:rPr sz="1100" b="0" dirty="0" err="1">
+                <a:solidFill>
+                  <a:srgbClr val="595959"/>
+                </a:solidFill>
+                <a:latin typeface="맑은 고딕"/>
+              </a:rPr>
+              <a:t>자동으로</a:t>
+            </a:r>
+            <a:r>
+              <a:rPr sz="1100" b="0" dirty="0">
+                <a:solidFill>
+                  <a:srgbClr val="595959"/>
+                </a:solidFill>
+                <a:latin typeface="맑은 고딕"/>
+              </a:rPr>
+              <a:t> </a:t>
+            </a:r>
+            <a:r>
+              <a:rPr sz="1100" b="0" dirty="0" err="1">
+                <a:solidFill>
+                  <a:srgbClr val="595959"/>
+                </a:solidFill>
+                <a:latin typeface="맑은 고딕"/>
+              </a:rPr>
+              <a:t>바꾸지</a:t>
+            </a:r>
+            <a:r>
+              <a:rPr sz="1100" b="0" dirty="0">
+                <a:solidFill>
+                  <a:srgbClr val="595959"/>
+                </a:solidFill>
+                <a:latin typeface="맑은 고딕"/>
+              </a:rPr>
+              <a:t> </a:t>
+            </a:r>
+            <a:r>
+              <a:rPr sz="1100" b="0" dirty="0" err="1">
+                <a:solidFill>
+                  <a:srgbClr val="595959"/>
+                </a:solidFill>
+                <a:latin typeface="맑은 고딕"/>
+              </a:rPr>
+              <a:t>않는다</a:t>
+            </a:r>
+            <a:r>
+              <a:rPr sz="1100" b="0" dirty="0">
+                <a:solidFill>
+                  <a:srgbClr val="595959"/>
+                </a:solidFill>
+                <a:latin typeface="맑은 고딕"/>
+              </a:rPr>
+              <a:t> - </a:t>
+            </a:r>
+            <a:r>
+              <a:rPr sz="1100" b="0" dirty="0" err="1">
+                <a:solidFill>
+                  <a:srgbClr val="595959"/>
+                </a:solidFill>
+                <a:latin typeface="맑은 고딕"/>
+              </a:rPr>
+              <a:t>실물</a:t>
+            </a:r>
+            <a:r>
+              <a:rPr sz="1100" b="0" dirty="0">
+                <a:solidFill>
+                  <a:srgbClr val="595959"/>
+                </a:solidFill>
+                <a:latin typeface="맑은 고딕"/>
+              </a:rPr>
+              <a:t> </a:t>
+            </a:r>
+            <a:r>
+              <a:rPr sz="1100" b="0" dirty="0" err="1">
+                <a:solidFill>
+                  <a:srgbClr val="595959"/>
+                </a:solidFill>
+                <a:latin typeface="맑은 고딕"/>
+              </a:rPr>
+              <a:t>위치를</a:t>
+            </a:r>
+            <a:r>
+              <a:rPr sz="1100" b="0" dirty="0">
+                <a:solidFill>
+                  <a:srgbClr val="595959"/>
+                </a:solidFill>
+                <a:latin typeface="맑은 고딕"/>
+              </a:rPr>
+              <a:t> </a:t>
+            </a:r>
+            <a:r>
+              <a:rPr sz="1100" b="0" dirty="0" err="1">
+                <a:solidFill>
+                  <a:srgbClr val="595959"/>
+                </a:solidFill>
+                <a:latin typeface="맑은 고딕"/>
+              </a:rPr>
+              <a:t>잃지</a:t>
+            </a:r>
+            <a:r>
+              <a:rPr sz="1100" b="0" dirty="0">
+                <a:solidFill>
+                  <a:srgbClr val="595959"/>
+                </a:solidFill>
+                <a:latin typeface="맑은 고딕"/>
+              </a:rPr>
+              <a:t> </a:t>
+            </a:r>
+            <a:r>
+              <a:rPr sz="1100" b="0" dirty="0" err="1">
+                <a:solidFill>
+                  <a:srgbClr val="595959"/>
+                </a:solidFill>
+                <a:latin typeface="맑은 고딕"/>
+              </a:rPr>
+              <a:t>않기</a:t>
+            </a:r>
+            <a:r>
+              <a:rPr sz="1100" b="0" dirty="0">
+                <a:solidFill>
+                  <a:srgbClr val="595959"/>
+                </a:solidFill>
+                <a:latin typeface="맑은 고딕"/>
+              </a:rPr>
+              <a:t> </a:t>
+            </a:r>
+            <a:r>
+              <a:rPr sz="1100" b="0" dirty="0" err="1">
+                <a:solidFill>
+                  <a:srgbClr val="595959"/>
+                </a:solidFill>
+                <a:latin typeface="맑은 고딕"/>
+              </a:rPr>
+              <a:t>위함</a:t>
+            </a:r>
+            <a:endParaRPr sz="1100" b="0" dirty="0">
+              <a:solidFill>
+                <a:srgbClr val="595959"/>
+              </a:solidFill>
+              <a:latin typeface="맑은 고딕"/>
+            </a:endParaRPr>
           </a:p>
         </p:txBody>
       </p:sp>
@@ -6267,20 +7632,110 @@
           <a:noFill/>
         </p:spPr>
         <p:txBody>
-          <a:bodyPr wrap="square" anchor="t" lIns="36576" rIns="36576" tIns="0" bIns="0">
+          <a:bodyPr wrap="square" lIns="36576" tIns="0" rIns="36576" bIns="0" anchor="t">
             <a:spAutoFit/>
           </a:bodyPr>
           <a:lstStyle/>
           <a:p>
             <a:pPr algn="l"/>
             <a:r>
-              <a:rPr sz="1100" b="0">
-                <a:solidFill>
-                  <a:srgbClr val="595959"/>
-                </a:solidFill>
-                <a:latin typeface="맑은 고딕"/>
-              </a:rPr>
-              <a:t>③ 사람이 화물을 제자리에 옮긴 뒤 [강제완료]</a:t>
+              <a:rPr sz="1100" b="0" dirty="0">
+                <a:solidFill>
+                  <a:srgbClr val="595959"/>
+                </a:solidFill>
+                <a:latin typeface="맑은 고딕"/>
+              </a:rPr>
+              <a:t>③ </a:t>
+            </a:r>
+            <a:r>
+              <a:rPr sz="1100" b="0" dirty="0" err="1">
+                <a:solidFill>
+                  <a:srgbClr val="595959"/>
+                </a:solidFill>
+                <a:latin typeface="맑은 고딕"/>
+              </a:rPr>
+              <a:t>사람이</a:t>
+            </a:r>
+            <a:r>
+              <a:rPr sz="1100" b="0" dirty="0">
+                <a:solidFill>
+                  <a:srgbClr val="595959"/>
+                </a:solidFill>
+                <a:latin typeface="맑은 고딕"/>
+              </a:rPr>
+              <a:t> </a:t>
+            </a:r>
+            <a:r>
+              <a:rPr sz="1100" b="0" dirty="0" err="1">
+                <a:solidFill>
+                  <a:srgbClr val="595959"/>
+                </a:solidFill>
+                <a:latin typeface="맑은 고딕"/>
+              </a:rPr>
+              <a:t>화물을</a:t>
+            </a:r>
+            <a:r>
+              <a:rPr sz="1100" b="0" dirty="0">
+                <a:solidFill>
+                  <a:srgbClr val="595959"/>
+                </a:solidFill>
+                <a:latin typeface="맑은 고딕"/>
+              </a:rPr>
+              <a:t> </a:t>
+            </a:r>
+            <a:r>
+              <a:rPr sz="1100" b="0" dirty="0" err="1">
+                <a:solidFill>
+                  <a:srgbClr val="595959"/>
+                </a:solidFill>
+                <a:latin typeface="맑은 고딕"/>
+              </a:rPr>
+              <a:t>제자리에</a:t>
+            </a:r>
+            <a:r>
+              <a:rPr sz="1100" b="0" dirty="0">
+                <a:solidFill>
+                  <a:srgbClr val="595959"/>
+                </a:solidFill>
+                <a:latin typeface="맑은 고딕"/>
+              </a:rPr>
+              <a:t> </a:t>
+            </a:r>
+            <a:r>
+              <a:rPr sz="1100" b="0" dirty="0" err="1">
+                <a:solidFill>
+                  <a:srgbClr val="595959"/>
+                </a:solidFill>
+                <a:latin typeface="맑은 고딕"/>
+              </a:rPr>
+              <a:t>옮긴</a:t>
+            </a:r>
+            <a:r>
+              <a:rPr sz="1100" b="0" dirty="0">
+                <a:solidFill>
+                  <a:srgbClr val="595959"/>
+                </a:solidFill>
+                <a:latin typeface="맑은 고딕"/>
+              </a:rPr>
+              <a:t> 뒤 [</a:t>
+            </a:r>
+            <a:r>
+              <a:rPr sz="1100" b="0" dirty="0" err="1">
+                <a:solidFill>
+                  <a:srgbClr val="595959"/>
+                </a:solidFill>
+                <a:latin typeface="맑은 고딕"/>
+              </a:rPr>
+              <a:t>강제완료</a:t>
+            </a:r>
+            <a:r>
+              <a:rPr sz="1100" b="0" dirty="0">
+                <a:solidFill>
+                  <a:srgbClr val="595959"/>
+                </a:solidFill>
+                <a:latin typeface="맑은 고딕"/>
+              </a:rPr>
+              <a:t>]</a:t>
             </a:r>
           </a:p>
         </p:txBody>
@@ -6302,20 +7757,110 @@
           <a:noFill/>
         </p:spPr>
         <p:txBody>
-          <a:bodyPr wrap="square" anchor="t" lIns="36576" rIns="36576" tIns="0" bIns="0">
+          <a:bodyPr wrap="square" lIns="36576" tIns="0" rIns="36576" bIns="0" anchor="t">
             <a:spAutoFit/>
           </a:bodyPr>
           <a:lstStyle/>
           <a:p>
             <a:pPr algn="l"/>
             <a:r>
-              <a:rPr sz="1100" b="0">
-                <a:solidFill>
-                  <a:srgbClr val="595959"/>
-                </a:solidFill>
-                <a:latin typeface="맑은 고딕"/>
-              </a:rPr>
-              <a:t>   (S/C 25 → 29, RTV 35 → 39, 설비가 화물을 들고 있으면 거부)</a:t>
+              <a:rPr sz="1100" b="0" dirty="0">
+                <a:solidFill>
+                  <a:srgbClr val="595959"/>
+                </a:solidFill>
+                <a:latin typeface="맑은 고딕"/>
+              </a:rPr>
+              <a:t>   (S/C 25 → 29, RTV 35 → 39, </a:t>
+            </a:r>
+            <a:r>
+              <a:rPr sz="1100" b="0" dirty="0" err="1">
+                <a:solidFill>
+                  <a:srgbClr val="595959"/>
+                </a:solidFill>
+                <a:latin typeface="맑은 고딕"/>
+              </a:rPr>
+              <a:t>설비가</a:t>
+            </a:r>
+            <a:r>
+              <a:rPr sz="1100" b="0" dirty="0">
+                <a:solidFill>
+                  <a:srgbClr val="595959"/>
+                </a:solidFill>
+                <a:latin typeface="맑은 고딕"/>
+              </a:rPr>
+              <a:t> </a:t>
+            </a:r>
+            <a:r>
+              <a:rPr sz="1100" b="0" dirty="0" err="1">
+                <a:solidFill>
+                  <a:srgbClr val="595959"/>
+                </a:solidFill>
+                <a:latin typeface="맑은 고딕"/>
+              </a:rPr>
+              <a:t>화물을</a:t>
+            </a:r>
+            <a:r>
+              <a:rPr sz="1100" b="0" dirty="0">
+                <a:solidFill>
+                  <a:srgbClr val="595959"/>
+                </a:solidFill>
+                <a:latin typeface="맑은 고딕"/>
+              </a:rPr>
+              <a:t> </a:t>
+            </a:r>
+            <a:r>
+              <a:rPr sz="1100" b="0" dirty="0" err="1">
+                <a:solidFill>
+                  <a:srgbClr val="595959"/>
+                </a:solidFill>
+                <a:latin typeface="맑은 고딕"/>
+              </a:rPr>
+              <a:t>들고</a:t>
+            </a:r>
+            <a:r>
+              <a:rPr sz="1100" b="0" dirty="0">
+                <a:solidFill>
+                  <a:srgbClr val="595959"/>
+                </a:solidFill>
+                <a:latin typeface="맑은 고딕"/>
+              </a:rPr>
+              <a:t> </a:t>
+            </a:r>
+            <a:r>
+              <a:rPr sz="1100" b="0" dirty="0" err="1">
+                <a:solidFill>
+                  <a:srgbClr val="595959"/>
+                </a:solidFill>
+                <a:latin typeface="맑은 고딕"/>
+              </a:rPr>
+              <a:t>있으면</a:t>
+            </a:r>
+            <a:r>
+              <a:rPr sz="1100" b="0" dirty="0">
+                <a:solidFill>
+                  <a:srgbClr val="595959"/>
+                </a:solidFill>
+                <a:latin typeface="맑은 고딕"/>
+              </a:rPr>
+              <a:t> </a:t>
+            </a:r>
+            <a:r>
+              <a:rPr sz="1100" b="0" dirty="0" err="1">
+                <a:solidFill>
+                  <a:srgbClr val="595959"/>
+                </a:solidFill>
+                <a:latin typeface="맑은 고딕"/>
+              </a:rPr>
+              <a:t>거부</a:t>
+            </a:r>
+            <a:r>
+              <a:rPr sz="1100" b="0" dirty="0">
+                <a:solidFill>
+                  <a:srgbClr val="595959"/>
+                </a:solidFill>
+                <a:latin typeface="맑은 고딕"/>
+              </a:rPr>
+              <a:t>)</a:t>
             </a:r>
           </a:p>
         </p:txBody>
@@ -6359,42 +7904,660 @@
           </a:fontRef>
         </p:style>
         <p:txBody>
-          <a:bodyPr rtlCol="0" anchor="ctr" wrap="square" lIns="36576" rIns="36576" tIns="0" bIns="0"/>
+          <a:bodyPr wrap="square" lIns="36576" tIns="0" rIns="36576" bIns="0" rtlCol="0" anchor="ctr"/>
           <a:lstStyle/>
           <a:p>
             <a:pPr algn="ctr"/>
             <a:r>
-              <a:rPr sz="1150" b="1">
+              <a:rPr sz="1150" b="1" dirty="0" err="1">
                 <a:solidFill>
                   <a:srgbClr val="1E2761"/>
                 </a:solidFill>
                 <a:latin typeface="맑은 고딕"/>
               </a:rPr>
-              <a:t>설비 에러 해제는 운전 화면의 기능이 아니다</a:t>
-            </a:r>
+              <a:t>설비</a:t>
+            </a:r>
+            <a:r>
+              <a:rPr sz="1150" b="1" dirty="0">
+                <a:solidFill>
+                  <a:srgbClr val="1E2761"/>
+                </a:solidFill>
+                <a:latin typeface="맑은 고딕"/>
+              </a:rPr>
+              <a:t> </a:t>
+            </a:r>
+            <a:r>
+              <a:rPr sz="1150" b="1" dirty="0" err="1">
+                <a:solidFill>
+                  <a:srgbClr val="1E2761"/>
+                </a:solidFill>
+                <a:latin typeface="맑은 고딕"/>
+              </a:rPr>
+              <a:t>에러</a:t>
+            </a:r>
+            <a:r>
+              <a:rPr sz="1150" b="1" dirty="0">
+                <a:solidFill>
+                  <a:srgbClr val="1E2761"/>
+                </a:solidFill>
+                <a:latin typeface="맑은 고딕"/>
+              </a:rPr>
+              <a:t> </a:t>
+            </a:r>
+            <a:r>
+              <a:rPr sz="1150" b="1" dirty="0" err="1">
+                <a:solidFill>
+                  <a:srgbClr val="1E2761"/>
+                </a:solidFill>
+                <a:latin typeface="맑은 고딕"/>
+              </a:rPr>
+              <a:t>해제는</a:t>
+            </a:r>
+            <a:r>
+              <a:rPr sz="1150" b="1" dirty="0">
+                <a:solidFill>
+                  <a:srgbClr val="1E2761"/>
+                </a:solidFill>
+                <a:latin typeface="맑은 고딕"/>
+              </a:rPr>
+              <a:t> </a:t>
+            </a:r>
+            <a:r>
+              <a:rPr sz="1150" b="1" dirty="0" err="1">
+                <a:solidFill>
+                  <a:srgbClr val="1E2761"/>
+                </a:solidFill>
+                <a:latin typeface="맑은 고딕"/>
+              </a:rPr>
+              <a:t>운전</a:t>
+            </a:r>
+            <a:r>
+              <a:rPr sz="1150" b="1" dirty="0">
+                <a:solidFill>
+                  <a:srgbClr val="1E2761"/>
+                </a:solidFill>
+                <a:latin typeface="맑은 고딕"/>
+              </a:rPr>
+              <a:t> </a:t>
+            </a:r>
+            <a:r>
+              <a:rPr sz="1150" b="1" dirty="0" err="1">
+                <a:solidFill>
+                  <a:srgbClr val="1E2761"/>
+                </a:solidFill>
+                <a:latin typeface="맑은 고딕"/>
+              </a:rPr>
+              <a:t>화면의</a:t>
+            </a:r>
+            <a:r>
+              <a:rPr sz="1150" b="1" dirty="0">
+                <a:solidFill>
+                  <a:srgbClr val="1E2761"/>
+                </a:solidFill>
+                <a:latin typeface="맑은 고딕"/>
+              </a:rPr>
+              <a:t> </a:t>
+            </a:r>
+            <a:r>
+              <a:rPr sz="1150" b="1" dirty="0" err="1">
+                <a:solidFill>
+                  <a:srgbClr val="1E2761"/>
+                </a:solidFill>
+                <a:latin typeface="맑은 고딕"/>
+              </a:rPr>
+              <a:t>기능이</a:t>
+            </a:r>
+            <a:r>
+              <a:rPr sz="1150" b="1" dirty="0">
+                <a:solidFill>
+                  <a:srgbClr val="1E2761"/>
+                </a:solidFill>
+                <a:latin typeface="맑은 고딕"/>
+              </a:rPr>
+              <a:t> </a:t>
+            </a:r>
+            <a:r>
+              <a:rPr sz="1150" b="1" dirty="0" err="1">
+                <a:solidFill>
+                  <a:srgbClr val="1E2761"/>
+                </a:solidFill>
+                <a:latin typeface="맑은 고딕"/>
+              </a:rPr>
+              <a:t>아니다</a:t>
+            </a:r>
+            <a:endParaRPr sz="1150" b="1" dirty="0">
+              <a:solidFill>
+                <a:srgbClr val="1E2761"/>
+              </a:solidFill>
+              <a:latin typeface="맑은 고딕"/>
+            </a:endParaRPr>
           </a:p>
           <a:p>
             <a:pPr algn="ctr"/>
             <a:r>
-              <a:rPr sz="1050" b="0">
-                <a:solidFill>
-                  <a:srgbClr val="595959"/>
-                </a:solidFill>
-                <a:latin typeface="맑은 고딕"/>
-              </a:rPr>
-              <a:t>S/C · RGV 에러는 설비(조작반)에서 해제한다. 설비가 알람 해제를 알리면 설비 통신이 Ack 하고 에러 코드를 내린다.</a:t>
+              <a:rPr sz="1050" b="0" dirty="0">
+                <a:solidFill>
+                  <a:srgbClr val="595959"/>
+                </a:solidFill>
+                <a:latin typeface="맑은 고딕"/>
+              </a:rPr>
+              <a:t>S/C · RGV </a:t>
+            </a:r>
+            <a:r>
+              <a:rPr sz="1050" b="0" dirty="0" err="1">
+                <a:solidFill>
+                  <a:srgbClr val="595959"/>
+                </a:solidFill>
+                <a:latin typeface="맑은 고딕"/>
+              </a:rPr>
+              <a:t>에러는</a:t>
+            </a:r>
+            <a:r>
+              <a:rPr sz="1050" b="0" dirty="0">
+                <a:solidFill>
+                  <a:srgbClr val="595959"/>
+                </a:solidFill>
+                <a:latin typeface="맑은 고딕"/>
+              </a:rPr>
+              <a:t> </a:t>
+            </a:r>
+            <a:r>
+              <a:rPr sz="1050" b="0" dirty="0" err="1">
+                <a:solidFill>
+                  <a:srgbClr val="595959"/>
+                </a:solidFill>
+                <a:latin typeface="맑은 고딕"/>
+              </a:rPr>
+              <a:t>설비</a:t>
+            </a:r>
+            <a:r>
+              <a:rPr sz="1050" b="0" dirty="0">
+                <a:solidFill>
+                  <a:srgbClr val="595959"/>
+                </a:solidFill>
+                <a:latin typeface="맑은 고딕"/>
+              </a:rPr>
+              <a:t>(</a:t>
+            </a:r>
+            <a:r>
+              <a:rPr sz="1050" b="0" dirty="0" err="1">
+                <a:solidFill>
+                  <a:srgbClr val="595959"/>
+                </a:solidFill>
+                <a:latin typeface="맑은 고딕"/>
+              </a:rPr>
+              <a:t>조작반</a:t>
+            </a:r>
+            <a:r>
+              <a:rPr sz="1050" b="0" dirty="0">
+                <a:solidFill>
+                  <a:srgbClr val="595959"/>
+                </a:solidFill>
+                <a:latin typeface="맑은 고딕"/>
+              </a:rPr>
+              <a:t>)</a:t>
+            </a:r>
+            <a:r>
+              <a:rPr sz="1050" b="0" dirty="0" err="1">
+                <a:solidFill>
+                  <a:srgbClr val="595959"/>
+                </a:solidFill>
+                <a:latin typeface="맑은 고딕"/>
+              </a:rPr>
+              <a:t>에서</a:t>
+            </a:r>
+            <a:r>
+              <a:rPr sz="1050" b="0" dirty="0">
+                <a:solidFill>
+                  <a:srgbClr val="595959"/>
+                </a:solidFill>
+                <a:latin typeface="맑은 고딕"/>
+              </a:rPr>
+              <a:t> </a:t>
+            </a:r>
+            <a:r>
+              <a:rPr sz="1050" b="0" dirty="0" err="1">
+                <a:solidFill>
+                  <a:srgbClr val="595959"/>
+                </a:solidFill>
+                <a:latin typeface="맑은 고딕"/>
+              </a:rPr>
+              <a:t>해제한다</a:t>
+            </a:r>
+            <a:r>
+              <a:rPr sz="1050" b="0" dirty="0">
+                <a:solidFill>
+                  <a:srgbClr val="595959"/>
+                </a:solidFill>
+                <a:latin typeface="맑은 고딕"/>
+              </a:rPr>
+              <a:t>. </a:t>
+            </a:r>
+            <a:r>
+              <a:rPr sz="1050" b="0" dirty="0" err="1">
+                <a:solidFill>
+                  <a:srgbClr val="595959"/>
+                </a:solidFill>
+                <a:latin typeface="맑은 고딕"/>
+              </a:rPr>
+              <a:t>설비가</a:t>
+            </a:r>
+            <a:r>
+              <a:rPr sz="1050" b="0" dirty="0">
+                <a:solidFill>
+                  <a:srgbClr val="595959"/>
+                </a:solidFill>
+                <a:latin typeface="맑은 고딕"/>
+              </a:rPr>
+              <a:t> </a:t>
+            </a:r>
+            <a:r>
+              <a:rPr sz="1050" b="0" dirty="0" err="1">
+                <a:solidFill>
+                  <a:srgbClr val="595959"/>
+                </a:solidFill>
+                <a:latin typeface="맑은 고딕"/>
+              </a:rPr>
+              <a:t>알람</a:t>
+            </a:r>
+            <a:r>
+              <a:rPr sz="1050" b="0" dirty="0">
+                <a:solidFill>
+                  <a:srgbClr val="595959"/>
+                </a:solidFill>
+                <a:latin typeface="맑은 고딕"/>
+              </a:rPr>
+              <a:t> </a:t>
+            </a:r>
+            <a:r>
+              <a:rPr sz="1050" b="0" dirty="0" err="1">
+                <a:solidFill>
+                  <a:srgbClr val="595959"/>
+                </a:solidFill>
+                <a:latin typeface="맑은 고딕"/>
+              </a:rPr>
+              <a:t>해제를</a:t>
+            </a:r>
+            <a:r>
+              <a:rPr sz="1050" b="0" dirty="0">
+                <a:solidFill>
+                  <a:srgbClr val="595959"/>
+                </a:solidFill>
+                <a:latin typeface="맑은 고딕"/>
+              </a:rPr>
+              <a:t> </a:t>
+            </a:r>
+            <a:r>
+              <a:rPr sz="1050" b="0" dirty="0" err="1">
+                <a:solidFill>
+                  <a:srgbClr val="595959"/>
+                </a:solidFill>
+                <a:latin typeface="맑은 고딕"/>
+              </a:rPr>
+              <a:t>알리면</a:t>
+            </a:r>
+            <a:r>
+              <a:rPr sz="1050" b="0" dirty="0">
+                <a:solidFill>
+                  <a:srgbClr val="595959"/>
+                </a:solidFill>
+                <a:latin typeface="맑은 고딕"/>
+              </a:rPr>
+              <a:t> </a:t>
+            </a:r>
+            <a:r>
+              <a:rPr sz="1050" b="0" dirty="0" err="1">
+                <a:solidFill>
+                  <a:srgbClr val="595959"/>
+                </a:solidFill>
+                <a:latin typeface="맑은 고딕"/>
+              </a:rPr>
+              <a:t>설비</a:t>
+            </a:r>
+            <a:r>
+              <a:rPr sz="1050" b="0" dirty="0">
+                <a:solidFill>
+                  <a:srgbClr val="595959"/>
+                </a:solidFill>
+                <a:latin typeface="맑은 고딕"/>
+              </a:rPr>
+              <a:t> </a:t>
+            </a:r>
+            <a:r>
+              <a:rPr sz="1050" b="0" dirty="0" err="1">
+                <a:solidFill>
+                  <a:srgbClr val="595959"/>
+                </a:solidFill>
+                <a:latin typeface="맑은 고딕"/>
+              </a:rPr>
+              <a:t>통신이</a:t>
+            </a:r>
+            <a:r>
+              <a:rPr sz="1050" b="0" dirty="0">
+                <a:solidFill>
+                  <a:srgbClr val="595959"/>
+                </a:solidFill>
+                <a:latin typeface="맑은 고딕"/>
+              </a:rPr>
+              <a:t> Ack </a:t>
+            </a:r>
+            <a:r>
+              <a:rPr sz="1050" b="0" dirty="0" err="1">
+                <a:solidFill>
+                  <a:srgbClr val="595959"/>
+                </a:solidFill>
+                <a:latin typeface="맑은 고딕"/>
+              </a:rPr>
+              <a:t>하고</a:t>
+            </a:r>
+            <a:r>
+              <a:rPr sz="1050" b="0" dirty="0">
+                <a:solidFill>
+                  <a:srgbClr val="595959"/>
+                </a:solidFill>
+                <a:latin typeface="맑은 고딕"/>
+              </a:rPr>
+              <a:t> </a:t>
+            </a:r>
+            <a:r>
+              <a:rPr sz="1050" b="0" dirty="0" err="1">
+                <a:solidFill>
+                  <a:srgbClr val="595959"/>
+                </a:solidFill>
+                <a:latin typeface="맑은 고딕"/>
+              </a:rPr>
+              <a:t>에러</a:t>
+            </a:r>
+            <a:r>
+              <a:rPr sz="1050" b="0" dirty="0">
+                <a:solidFill>
+                  <a:srgbClr val="595959"/>
+                </a:solidFill>
+                <a:latin typeface="맑은 고딕"/>
+              </a:rPr>
+              <a:t> </a:t>
+            </a:r>
+            <a:r>
+              <a:rPr sz="1050" b="0" dirty="0" err="1">
+                <a:solidFill>
+                  <a:srgbClr val="595959"/>
+                </a:solidFill>
+                <a:latin typeface="맑은 고딕"/>
+              </a:rPr>
+              <a:t>코드를</a:t>
+            </a:r>
+            <a:r>
+              <a:rPr sz="1050" b="0" dirty="0">
+                <a:solidFill>
+                  <a:srgbClr val="595959"/>
+                </a:solidFill>
+                <a:latin typeface="맑은 고딕"/>
+              </a:rPr>
+              <a:t> </a:t>
+            </a:r>
+            <a:r>
+              <a:rPr sz="1050" b="0" dirty="0" err="1">
+                <a:solidFill>
+                  <a:srgbClr val="595959"/>
+                </a:solidFill>
+                <a:latin typeface="맑은 고딕"/>
+              </a:rPr>
+              <a:t>내린다</a:t>
+            </a:r>
+            <a:r>
+              <a:rPr sz="1050" b="0" dirty="0">
+                <a:solidFill>
+                  <a:srgbClr val="595959"/>
+                </a:solidFill>
+                <a:latin typeface="맑은 고딕"/>
+              </a:rPr>
+              <a:t>.</a:t>
             </a:r>
           </a:p>
           <a:p>
             <a:pPr algn="ctr"/>
             <a:r>
-              <a:rPr sz="1050" b="0">
-                <a:solidFill>
-                  <a:srgbClr val="595959"/>
-                </a:solidFill>
-                <a:latin typeface="맑은 고딕"/>
-              </a:rPr>
-              <a:t>[환경설정] 의 "시간 기반 자동 처리" 는 기본 사용 안 함이다. 켰을 때만 경과시간으로 완료를 추정한다.</a:t>
+              <a:rPr sz="1050" b="0" dirty="0">
+                <a:solidFill>
+                  <a:srgbClr val="595959"/>
+                </a:solidFill>
+                <a:latin typeface="맑은 고딕"/>
+              </a:rPr>
+              <a:t>[</a:t>
+            </a:r>
+            <a:r>
+              <a:rPr sz="1050" b="0" dirty="0" err="1">
+                <a:solidFill>
+                  <a:srgbClr val="595959"/>
+                </a:solidFill>
+                <a:latin typeface="맑은 고딕"/>
+              </a:rPr>
+              <a:t>환경설정</a:t>
+            </a:r>
+            <a:r>
+              <a:rPr sz="1050" b="0" dirty="0">
+                <a:solidFill>
+                  <a:srgbClr val="595959"/>
+                </a:solidFill>
+                <a:latin typeface="맑은 고딕"/>
+              </a:rPr>
+              <a:t>] 의 "</a:t>
+            </a:r>
+            <a:r>
+              <a:rPr sz="1050" b="0" dirty="0" err="1">
+                <a:solidFill>
+                  <a:srgbClr val="595959"/>
+                </a:solidFill>
+                <a:latin typeface="맑은 고딕"/>
+              </a:rPr>
+              <a:t>시간</a:t>
+            </a:r>
+            <a:r>
+              <a:rPr sz="1050" b="0" dirty="0">
+                <a:solidFill>
+                  <a:srgbClr val="595959"/>
+                </a:solidFill>
+                <a:latin typeface="맑은 고딕"/>
+              </a:rPr>
+              <a:t> </a:t>
+            </a:r>
+            <a:r>
+              <a:rPr sz="1050" b="0" dirty="0" err="1">
+                <a:solidFill>
+                  <a:srgbClr val="595959"/>
+                </a:solidFill>
+                <a:latin typeface="맑은 고딕"/>
+              </a:rPr>
+              <a:t>기반</a:t>
+            </a:r>
+            <a:r>
+              <a:rPr sz="1050" b="0" dirty="0">
+                <a:solidFill>
+                  <a:srgbClr val="595959"/>
+                </a:solidFill>
+                <a:latin typeface="맑은 고딕"/>
+              </a:rPr>
+              <a:t> </a:t>
+            </a:r>
+            <a:r>
+              <a:rPr sz="1050" b="0" dirty="0" err="1">
+                <a:solidFill>
+                  <a:srgbClr val="595959"/>
+                </a:solidFill>
+                <a:latin typeface="맑은 고딕"/>
+              </a:rPr>
+              <a:t>자동</a:t>
+            </a:r>
+            <a:r>
+              <a:rPr sz="1050" b="0" dirty="0">
+                <a:solidFill>
+                  <a:srgbClr val="595959"/>
+                </a:solidFill>
+                <a:latin typeface="맑은 고딕"/>
+              </a:rPr>
+              <a:t> </a:t>
+            </a:r>
+            <a:r>
+              <a:rPr sz="1050" b="0" dirty="0" err="1">
+                <a:solidFill>
+                  <a:srgbClr val="595959"/>
+                </a:solidFill>
+                <a:latin typeface="맑은 고딕"/>
+              </a:rPr>
+              <a:t>처리</a:t>
+            </a:r>
+            <a:r>
+              <a:rPr sz="1050" b="0" dirty="0">
+                <a:solidFill>
+                  <a:srgbClr val="595959"/>
+                </a:solidFill>
+                <a:latin typeface="맑은 고딕"/>
+              </a:rPr>
+              <a:t>" 는 </a:t>
+            </a:r>
+            <a:r>
+              <a:rPr sz="1050" b="0" dirty="0" err="1">
+                <a:solidFill>
+                  <a:srgbClr val="595959"/>
+                </a:solidFill>
+                <a:latin typeface="맑은 고딕"/>
+              </a:rPr>
+              <a:t>기본</a:t>
+            </a:r>
+            <a:r>
+              <a:rPr sz="1050" b="0" dirty="0">
+                <a:solidFill>
+                  <a:srgbClr val="595959"/>
+                </a:solidFill>
+                <a:latin typeface="맑은 고딕"/>
+              </a:rPr>
+              <a:t> </a:t>
+            </a:r>
+            <a:r>
+              <a:rPr sz="1050" b="0" dirty="0" err="1">
+                <a:solidFill>
+                  <a:srgbClr val="595959"/>
+                </a:solidFill>
+                <a:latin typeface="맑은 고딕"/>
+              </a:rPr>
+              <a:t>사용</a:t>
+            </a:r>
+            <a:r>
+              <a:rPr sz="1050" b="0" dirty="0">
+                <a:solidFill>
+                  <a:srgbClr val="595959"/>
+                </a:solidFill>
+                <a:latin typeface="맑은 고딕"/>
+              </a:rPr>
+              <a:t> 안 </a:t>
+            </a:r>
+            <a:r>
+              <a:rPr sz="1050" b="0" dirty="0" err="1">
+                <a:solidFill>
+                  <a:srgbClr val="595959"/>
+                </a:solidFill>
+                <a:latin typeface="맑은 고딕"/>
+              </a:rPr>
+              <a:t>함이다</a:t>
+            </a:r>
+            <a:r>
+              <a:rPr sz="1050" b="0" dirty="0">
+                <a:solidFill>
+                  <a:srgbClr val="595959"/>
+                </a:solidFill>
+                <a:latin typeface="맑은 고딕"/>
+              </a:rPr>
+              <a:t>. </a:t>
+            </a:r>
+            <a:r>
+              <a:rPr sz="1050" b="0" dirty="0" err="1">
+                <a:solidFill>
+                  <a:srgbClr val="595959"/>
+                </a:solidFill>
+                <a:latin typeface="맑은 고딕"/>
+              </a:rPr>
+              <a:t>켰을</a:t>
+            </a:r>
+            <a:r>
+              <a:rPr sz="1050" b="0" dirty="0">
+                <a:solidFill>
+                  <a:srgbClr val="595959"/>
+                </a:solidFill>
+                <a:latin typeface="맑은 고딕"/>
+              </a:rPr>
+              <a:t> </a:t>
+            </a:r>
+            <a:r>
+              <a:rPr sz="1050" b="0" dirty="0" err="1">
+                <a:solidFill>
+                  <a:srgbClr val="595959"/>
+                </a:solidFill>
+                <a:latin typeface="맑은 고딕"/>
+              </a:rPr>
+              <a:t>때만</a:t>
+            </a:r>
+            <a:r>
+              <a:rPr sz="1050" b="0" dirty="0">
+                <a:solidFill>
+                  <a:srgbClr val="595959"/>
+                </a:solidFill>
+                <a:latin typeface="맑은 고딕"/>
+              </a:rPr>
+              <a:t> </a:t>
+            </a:r>
+            <a:r>
+              <a:rPr sz="1050" b="0" dirty="0" err="1">
+                <a:solidFill>
+                  <a:srgbClr val="595959"/>
+                </a:solidFill>
+                <a:latin typeface="맑은 고딕"/>
+              </a:rPr>
+              <a:t>경과시간으로</a:t>
+            </a:r>
+            <a:r>
+              <a:rPr sz="1050" b="0" dirty="0">
+                <a:solidFill>
+                  <a:srgbClr val="595959"/>
+                </a:solidFill>
+                <a:latin typeface="맑은 고딕"/>
+              </a:rPr>
+              <a:t> </a:t>
+            </a:r>
+            <a:r>
+              <a:rPr sz="1050" b="0" dirty="0" err="1">
+                <a:solidFill>
+                  <a:srgbClr val="595959"/>
+                </a:solidFill>
+                <a:latin typeface="맑은 고딕"/>
+              </a:rPr>
+              <a:t>완료를</a:t>
+            </a:r>
+            <a:r>
+              <a:rPr sz="1050" b="0" dirty="0">
+                <a:solidFill>
+                  <a:srgbClr val="595959"/>
+                </a:solidFill>
+                <a:latin typeface="맑은 고딕"/>
+              </a:rPr>
+              <a:t> </a:t>
+            </a:r>
+            <a:r>
+              <a:rPr sz="1050" b="0" dirty="0" err="1">
+                <a:solidFill>
+                  <a:srgbClr val="595959"/>
+                </a:solidFill>
+                <a:latin typeface="맑은 고딕"/>
+              </a:rPr>
+              <a:t>추정한다</a:t>
+            </a:r>
+            <a:r>
+              <a:rPr sz="1050" b="0" dirty="0">
+                <a:solidFill>
+                  <a:srgbClr val="595959"/>
+                </a:solidFill>
+                <a:latin typeface="맑은 고딕"/>
+              </a:rPr>
+              <a:t>.</a:t>
             </a:r>
           </a:p>
         </p:txBody>
@@ -6416,7 +8579,7 @@
           <a:noFill/>
         </p:spPr>
         <p:txBody>
-          <a:bodyPr wrap="square" anchor="t" lIns="36576" rIns="36576" tIns="0" bIns="0">
+          <a:bodyPr wrap="square" lIns="36576" tIns="0" rIns="36576" bIns="0" anchor="t">
             <a:spAutoFit/>
           </a:bodyPr>
           <a:lstStyle/>
@@ -6453,8 +8616,20 @@
                 <a:tableStyleId>{5C22544A-7EE6-4342-B048-85BDC9FD1C3A}</a:tableStyleId>
               </a:tblPr>
               <a:tblGrid>
-                <a:gridCol w="3931920"/>
-                <a:gridCol w="7132320"/>
+                <a:gridCol w="3931920">
+                  <a:extLst>
+                    <a:ext uri="{9D8B030D-6E8A-4147-A177-3AD203B41FA5}">
+                      <a16:colId xmlns:a16="http://schemas.microsoft.com/office/drawing/2014/main" val="20000"/>
+                    </a:ext>
+                  </a:extLst>
+                </a:gridCol>
+                <a:gridCol w="7132320">
+                  <a:extLst>
+                    <a:ext uri="{9D8B030D-6E8A-4147-A177-3AD203B41FA5}">
+                      <a16:colId xmlns:a16="http://schemas.microsoft.com/office/drawing/2014/main" val="20001"/>
+                    </a:ext>
+                  </a:extLst>
+                </a:gridCol>
               </a:tblGrid>
               <a:tr h="219456">
                 <a:tc>
@@ -6501,6 +8676,11 @@
                     </a:solidFill>
                   </a:tcPr>
                 </a:tc>
+                <a:extLst>
+                  <a:ext uri="{0D108BD9-81ED-4DB2-BD59-A6C34878D82A}">
+                    <a16:rowId xmlns:a16="http://schemas.microsoft.com/office/drawing/2014/main" val="10000"/>
+                  </a:ext>
+                </a:extLst>
               </a:tr>
               <a:tr h="219456">
                 <a:tc>
@@ -6509,14 +8689,110 @@
                     <a:lstStyle/>
                     <a:p>
                       <a:r>
+                        <a:rPr sz="900" dirty="0" err="1">
+                          <a:solidFill>
+                            <a:srgbClr val="222222"/>
+                          </a:solidFill>
+                          <a:latin typeface="맑은 고딕"/>
+                        </a:rPr>
+                        <a:t>작업</a:t>
+                      </a:r>
+                      <a:r>
+                        <a:rPr sz="900" dirty="0">
+                          <a:solidFill>
+                            <a:srgbClr val="222222"/>
+                          </a:solidFill>
+                          <a:latin typeface="맑은 고딕"/>
+                        </a:rPr>
+                        <a:t> </a:t>
+                      </a:r>
+                      <a:r>
+                        <a:rPr sz="900" dirty="0" err="1">
+                          <a:solidFill>
+                            <a:srgbClr val="222222"/>
+                          </a:solidFill>
+                          <a:latin typeface="맑은 고딕"/>
+                        </a:rPr>
+                        <a:t>삭제</a:t>
+                      </a:r>
+                      <a:r>
+                        <a:rPr sz="900" dirty="0">
+                          <a:solidFill>
+                            <a:srgbClr val="222222"/>
+                          </a:solidFill>
+                          <a:latin typeface="맑은 고딕"/>
+                        </a:rPr>
+                        <a:t> 뒤 RTV/</a:t>
+                      </a:r>
+                      <a:r>
                         <a:rPr sz="900">
                           <a:solidFill>
                             <a:srgbClr val="222222"/>
                           </a:solidFill>
                           <a:latin typeface="맑은 고딕"/>
                         </a:rPr>
-                        <a:t>작업 삭제 뒤 RTV/크레인에 지시 흔적이 남음</a:t>
+                        <a:t>크레인에</a:t>
                       </a:r>
+                      <a:r>
+                        <a:rPr sz="900" dirty="0">
+                          <a:solidFill>
+                            <a:srgbClr val="222222"/>
+                          </a:solidFill>
+                          <a:latin typeface="맑은 고딕"/>
+                        </a:rPr>
+                        <a:t> </a:t>
+                      </a:r>
+                      <a:r>
+                        <a:rPr sz="900" dirty="0" err="1">
+                          <a:solidFill>
+                            <a:srgbClr val="222222"/>
+                          </a:solidFill>
+                          <a:latin typeface="맑은 고딕"/>
+                        </a:rPr>
+                        <a:t>지시</a:t>
+                      </a:r>
+                      <a:r>
+                        <a:rPr sz="900" dirty="0">
+                          <a:solidFill>
+                            <a:srgbClr val="222222"/>
+                          </a:solidFill>
+                          <a:latin typeface="맑은 고딕"/>
+                        </a:rPr>
+                        <a:t> </a:t>
+                      </a:r>
+                      <a:r>
+                        <a:rPr sz="900" dirty="0" err="1">
+                          <a:solidFill>
+                            <a:srgbClr val="222222"/>
+                          </a:solidFill>
+                          <a:latin typeface="맑은 고딕"/>
+                        </a:rPr>
+                        <a:t>흔적이</a:t>
+                      </a:r>
+                      <a:r>
+                        <a:rPr sz="900" dirty="0">
+                          <a:solidFill>
+                            <a:srgbClr val="222222"/>
+                          </a:solidFill>
+                          <a:latin typeface="맑은 고딕"/>
+                        </a:rPr>
+                        <a:t> </a:t>
+                      </a:r>
+                      <a:r>
+                        <a:rPr sz="900" dirty="0" err="1">
+                          <a:solidFill>
+                            <a:srgbClr val="222222"/>
+                          </a:solidFill>
+                          <a:latin typeface="맑은 고딕"/>
+                        </a:rPr>
+                        <a:t>남음</a:t>
+                      </a:r>
+                      <a:endParaRPr sz="900" dirty="0">
+                        <a:solidFill>
+                          <a:srgbClr val="222222"/>
+                        </a:solidFill>
+                        <a:latin typeface="맑은 고딕"/>
+                      </a:endParaRPr>
                     </a:p>
                   </a:txBody>
                   <a:tcPr marT="18288" marB="18288">
@@ -6547,6 +8823,11 @@
                     </a:solidFill>
                   </a:tcPr>
                 </a:tc>
+                <a:extLst>
+                  <a:ext uri="{0D108BD9-81ED-4DB2-BD59-A6C34878D82A}">
+                    <a16:rowId xmlns:a16="http://schemas.microsoft.com/office/drawing/2014/main" val="10001"/>
+                  </a:ext>
+                </a:extLst>
               </a:tr>
               <a:tr h="219456">
                 <a:tc>
@@ -6555,14 +8836,92 @@
                     <a:lstStyle/>
                     <a:p>
                       <a:r>
-                        <a:rPr sz="900">
+                        <a:rPr sz="900" dirty="0" err="1">
                           <a:solidFill>
                             <a:srgbClr val="222222"/>
                           </a:solidFill>
                           <a:latin typeface="맑은 고딕"/>
                         </a:rPr>
-                        <a:t>상위 완료 응답이 오지 않음</a:t>
+                        <a:t>상위</a:t>
                       </a:r>
+                      <a:r>
+                        <a:rPr sz="900" dirty="0">
+                          <a:solidFill>
+                            <a:srgbClr val="222222"/>
+                          </a:solidFill>
+                          <a:latin typeface="맑은 고딕"/>
+                        </a:rPr>
+                        <a:t> </a:t>
+                      </a:r>
+                      <a:r>
+                        <a:rPr sz="900" dirty="0" err="1">
+                          <a:solidFill>
+                            <a:srgbClr val="222222"/>
+                          </a:solidFill>
+                          <a:latin typeface="맑은 고딕"/>
+                        </a:rPr>
+                        <a:t>완료</a:t>
+                      </a:r>
+                      <a:r>
+                        <a:rPr sz="900" dirty="0">
+                          <a:solidFill>
+                            <a:srgbClr val="222222"/>
+                          </a:solidFill>
+                          <a:latin typeface="맑은 고딕"/>
+                        </a:rPr>
+                        <a:t> </a:t>
+                      </a:r>
+                      <a:r>
+                        <a:rPr sz="900" dirty="0" err="1">
+                          <a:solidFill>
+                            <a:srgbClr val="222222"/>
+                          </a:solidFill>
+                          <a:latin typeface="맑은 고딕"/>
+                        </a:rPr>
+                        <a:t>응답이</a:t>
+                      </a:r>
+                      <a:r>
+                        <a:rPr sz="900" dirty="0">
+                          <a:solidFill>
+                            <a:srgbClr val="222222"/>
+                          </a:solidFill>
+                          <a:latin typeface="맑은 고딕"/>
+                        </a:rPr>
+                        <a:t> </a:t>
+                      </a:r>
+                      <a:r>
+                        <a:rPr sz="900" dirty="0" err="1">
+                          <a:solidFill>
+                            <a:srgbClr val="222222"/>
+                          </a:solidFill>
+                          <a:latin typeface="맑은 고딕"/>
+                        </a:rPr>
+                        <a:t>오지</a:t>
+                      </a:r>
+                      <a:r>
+                        <a:rPr sz="900" dirty="0">
+                          <a:solidFill>
+                            <a:srgbClr val="222222"/>
+                          </a:solidFill>
+                          <a:latin typeface="맑은 고딕"/>
+                        </a:rPr>
+                        <a:t> </a:t>
+                      </a:r>
+                      <a:r>
+                        <a:rPr sz="900" dirty="0" err="1">
+                          <a:solidFill>
+                            <a:srgbClr val="222222"/>
+                          </a:solidFill>
+                          <a:latin typeface="맑은 고딕"/>
+                        </a:rPr>
+                        <a:t>않음</a:t>
+                      </a:r>
+                      <a:endParaRPr sz="900" dirty="0">
+                        <a:solidFill>
+                          <a:srgbClr val="222222"/>
+                        </a:solidFill>
+                        <a:latin typeface="맑은 고딕"/>
+                      </a:endParaRPr>
                     </a:p>
                   </a:txBody>
                   <a:tcPr marT="18288" marB="18288">
@@ -6593,6 +8952,11 @@
                     </a:solidFill>
                   </a:tcPr>
                 </a:tc>
+                <a:extLst>
+                  <a:ext uri="{0D108BD9-81ED-4DB2-BD59-A6C34878D82A}">
+                    <a16:rowId xmlns:a16="http://schemas.microsoft.com/office/drawing/2014/main" val="10002"/>
+                  </a:ext>
+                </a:extLst>
               </a:tr>
               <a:tr h="219456">
                 <a:tc>
@@ -6639,6 +9003,11 @@
                     </a:solidFill>
                   </a:tcPr>
                 </a:tc>
+                <a:extLst>
+                  <a:ext uri="{0D108BD9-81ED-4DB2-BD59-A6C34878D82A}">
+                    <a16:rowId xmlns:a16="http://schemas.microsoft.com/office/drawing/2014/main" val="10003"/>
+                  </a:ext>
+                </a:extLst>
               </a:tr>
               <a:tr h="219456">
                 <a:tc>
@@ -6669,13 +9038,157 @@
                     <a:lstStyle/>
                     <a:p>
                       <a:r>
-                        <a:rPr sz="900">
+                        <a:rPr sz="900" dirty="0">
                           <a:solidFill>
                             <a:srgbClr val="222222"/>
                           </a:solidFill>
                           <a:latin typeface="맑은 고딕"/>
                         </a:rPr>
-                        <a:t>CV2_DIR_MODE 확인. 필요 시 운전 화면에서 방향 칸 더블클릭(수동 전환)</a:t>
+                        <a:t>CV2_DIR_MODE </a:t>
+                      </a:r>
+                      <a:r>
+                        <a:rPr sz="900" dirty="0" err="1">
+                          <a:solidFill>
+                            <a:srgbClr val="222222"/>
+                          </a:solidFill>
+                          <a:latin typeface="맑은 고딕"/>
+                        </a:rPr>
+                        <a:t>확인</a:t>
+                      </a:r>
+                      <a:r>
+                        <a:rPr sz="900" dirty="0">
+                          <a:solidFill>
+                            <a:srgbClr val="222222"/>
+                          </a:solidFill>
+                          <a:latin typeface="맑은 고딕"/>
+                        </a:rPr>
+                        <a:t>. </a:t>
+                      </a:r>
+                      <a:r>
+                        <a:rPr sz="900" dirty="0" err="1">
+                          <a:solidFill>
+                            <a:srgbClr val="222222"/>
+                          </a:solidFill>
+                          <a:latin typeface="맑은 고딕"/>
+                        </a:rPr>
+                        <a:t>필요</a:t>
+                      </a:r>
+                      <a:r>
+                        <a:rPr sz="900" dirty="0">
+                          <a:solidFill>
+                            <a:srgbClr val="222222"/>
+                          </a:solidFill>
+                          <a:latin typeface="맑은 고딕"/>
+                        </a:rPr>
+                        <a:t> 시 </a:t>
+                      </a:r>
+                      <a:r>
+                        <a:rPr sz="900" dirty="0" err="1">
+                          <a:solidFill>
+                            <a:srgbClr val="222222"/>
+                          </a:solidFill>
+                          <a:latin typeface="맑은 고딕"/>
+                        </a:rPr>
+                        <a:t>운전</a:t>
+                      </a:r>
+                      <a:r>
+                        <a:rPr sz="900" dirty="0">
+                          <a:solidFill>
+                            <a:srgbClr val="222222"/>
+                          </a:solidFill>
+                          <a:latin typeface="맑은 고딕"/>
+                        </a:rPr>
+                        <a:t> </a:t>
+                      </a:r>
+                      <a:r>
+                        <a:rPr sz="900" dirty="0" err="1">
+                          <a:solidFill>
+                            <a:srgbClr val="222222"/>
+                          </a:solidFill>
+                          <a:latin typeface="맑은 고딕"/>
+                        </a:rPr>
+                        <a:t>화면에서</a:t>
+                      </a:r>
+                      <a:r>
+                        <a:rPr sz="900" dirty="0">
+                          <a:solidFill>
+                            <a:srgbClr val="222222"/>
+                          </a:solidFill>
+                          <a:latin typeface="맑은 고딕"/>
+                        </a:rPr>
+                        <a:t> </a:t>
+                      </a:r>
+                      <a:r>
+                        <a:rPr sz="900" dirty="0" err="1">
+                          <a:solidFill>
+                            <a:srgbClr val="222222"/>
+                          </a:solidFill>
+                          <a:latin typeface="맑은 고딕"/>
+                        </a:rPr>
+                        <a:t>방향</a:t>
+                      </a:r>
+                      <a:r>
+                        <a:rPr sz="900" dirty="0">
+                          <a:solidFill>
+                            <a:srgbClr val="222222"/>
+                          </a:solidFill>
+                          <a:latin typeface="맑은 고딕"/>
+                        </a:rPr>
+                        <a:t> 칸 </a:t>
+                      </a:r>
+                      <a:r>
+                        <a:rPr sz="900" dirty="0" err="1">
+                          <a:solidFill>
+                            <a:srgbClr val="222222"/>
+                          </a:solidFill>
+                          <a:latin typeface="맑은 고딕"/>
+                        </a:rPr>
+                        <a:t>더블클릭</a:t>
+                      </a:r>
+                      <a:r>
+                        <a:rPr sz="900" dirty="0">
+                          <a:solidFill>
+                            <a:srgbClr val="222222"/>
+                          </a:solidFill>
+                          <a:latin typeface="맑은 고딕"/>
+                        </a:rPr>
+                        <a:t>(</a:t>
+                      </a:r>
+                      <a:r>
+                        <a:rPr sz="900" dirty="0" err="1">
+                          <a:solidFill>
+                            <a:srgbClr val="222222"/>
+                          </a:solidFill>
+                          <a:latin typeface="맑은 고딕"/>
+                        </a:rPr>
+                        <a:t>수동</a:t>
+                      </a:r>
+                      <a:r>
+                        <a:rPr sz="900" dirty="0">
+                          <a:solidFill>
+                            <a:srgbClr val="222222"/>
+                          </a:solidFill>
+                          <a:latin typeface="맑은 고딕"/>
+                        </a:rPr>
+                        <a:t> </a:t>
+                      </a:r>
+                      <a:r>
+                        <a:rPr sz="900" dirty="0" err="1">
+                          <a:solidFill>
+                            <a:srgbClr val="222222"/>
+                          </a:solidFill>
+                          <a:latin typeface="맑은 고딕"/>
+                        </a:rPr>
+                        <a:t>전환</a:t>
+                      </a:r>
+                      <a:r>
+                        <a:rPr sz="900" dirty="0">
+                          <a:solidFill>
+                            <a:srgbClr val="222222"/>
+                          </a:solidFill>
+                          <a:latin typeface="맑은 고딕"/>
+                        </a:rPr>
+                        <a:t>)</a:t>
                       </a:r>
                     </a:p>
                   </a:txBody>
@@ -6685,6 +9198,11 @@
                     </a:solidFill>
                   </a:tcPr>
                 </a:tc>
+                <a:extLst>
+                  <a:ext uri="{0D108BD9-81ED-4DB2-BD59-A6C34878D82A}">
+                    <a16:rowId xmlns:a16="http://schemas.microsoft.com/office/drawing/2014/main" val="10004"/>
+                  </a:ext>
+                </a:extLst>
               </a:tr>
             </a:tbl>
           </a:graphicData>
@@ -6707,7 +9225,7 @@
           <a:noFill/>
         </p:spPr>
         <p:txBody>
-          <a:bodyPr wrap="square" anchor="t" lIns="36576" rIns="36576" tIns="0" bIns="0">
+          <a:bodyPr wrap="square" lIns="36576" tIns="0" rIns="36576" bIns="0" anchor="t">
             <a:spAutoFit/>
           </a:bodyPr>
           <a:lstStyle/>
@@ -6742,7 +9260,7 @@
           <a:noFill/>
         </p:spPr>
         <p:txBody>
-          <a:bodyPr wrap="square" anchor="t" lIns="36576" rIns="36576" tIns="0" bIns="0">
+          <a:bodyPr wrap="square" lIns="36576" tIns="0" rIns="36576" bIns="0" anchor="t">
             <a:spAutoFit/>
           </a:bodyPr>
           <a:lstStyle/>
@@ -6769,7 +9287,7 @@
 </file>
 
 <file path=ppt/slides/slide2.xml><?xml version="1.0" encoding="utf-8"?>
-<p:sld xmlns:a="http://schemas.openxmlformats.org/drawingml/2006/main" xmlns:p="http://schemas.openxmlformats.org/presentationml/2006/main" xmlns:r="http://schemas.openxmlformats.org/officeDocument/2006/relationships">
+<p:sld xmlns:a="http://schemas.openxmlformats.org/drawingml/2006/main" xmlns:r="http://schemas.openxmlformats.org/officeDocument/2006/relationships" xmlns:p="http://schemas.openxmlformats.org/presentationml/2006/main">
   <p:cSld>
     <p:spTree>
       <p:nvGrpSpPr>
@@ -6777,7 +9295,14 @@
         <p:cNvGrpSpPr/>
         <p:nvPr/>
       </p:nvGrpSpPr>
-      <p:grpSpPr/>
+      <p:grpSpPr>
+        <a:xfrm>
+          <a:off x="0" y="0"/>
+          <a:ext cx="0" cy="0"/>
+          <a:chOff x="0" y="0"/>
+          <a:chExt cx="0" cy="0"/>
+        </a:xfrm>
+      </p:grpSpPr>
       <p:sp>
         <p:nvSpPr>
           <p:cNvPr id="2" name="TextBox 1"/>
@@ -6795,7 +9320,7 @@
           <a:noFill/>
         </p:spPr>
         <p:txBody>
-          <a:bodyPr wrap="square" anchor="ctr" lIns="36576" rIns="36576" tIns="0" bIns="0">
+          <a:bodyPr wrap="square" lIns="36576" tIns="0" rIns="36576" bIns="0" anchor="ctr">
             <a:spAutoFit/>
           </a:bodyPr>
           <a:lstStyle/>
@@ -6832,10 +9357,34 @@
                 <a:tableStyleId>{5C22544A-7EE6-4342-B048-85BDC9FD1C3A}</a:tableStyleId>
               </a:tblPr>
               <a:tblGrid>
-                <a:gridCol w="1188720"/>
-                <a:gridCol w="1645920"/>
-                <a:gridCol w="2377440"/>
-                <a:gridCol w="6035040"/>
+                <a:gridCol w="1188720">
+                  <a:extLst>
+                    <a:ext uri="{9D8B030D-6E8A-4147-A177-3AD203B41FA5}">
+                      <a16:colId xmlns:a16="http://schemas.microsoft.com/office/drawing/2014/main" val="20000"/>
+                    </a:ext>
+                  </a:extLst>
+                </a:gridCol>
+                <a:gridCol w="1645920">
+                  <a:extLst>
+                    <a:ext uri="{9D8B030D-6E8A-4147-A177-3AD203B41FA5}">
+                      <a16:colId xmlns:a16="http://schemas.microsoft.com/office/drawing/2014/main" val="20001"/>
+                    </a:ext>
+                  </a:extLst>
+                </a:gridCol>
+                <a:gridCol w="2377440">
+                  <a:extLst>
+                    <a:ext uri="{9D8B030D-6E8A-4147-A177-3AD203B41FA5}">
+                      <a16:colId xmlns:a16="http://schemas.microsoft.com/office/drawing/2014/main" val="20002"/>
+                    </a:ext>
+                  </a:extLst>
+                </a:gridCol>
+                <a:gridCol w="6035040">
+                  <a:extLst>
+                    <a:ext uri="{9D8B030D-6E8A-4147-A177-3AD203B41FA5}">
+                      <a16:colId xmlns:a16="http://schemas.microsoft.com/office/drawing/2014/main" val="20003"/>
+                    </a:ext>
+                  </a:extLst>
+                </a:gridCol>
               </a:tblGrid>
               <a:tr h="411480">
                 <a:tc>
@@ -6926,6 +9475,11 @@
                     </a:solidFill>
                   </a:tcPr>
                 </a:tc>
+                <a:extLst>
+                  <a:ext uri="{0D108BD9-81ED-4DB2-BD59-A6C34878D82A}">
+                    <a16:rowId xmlns:a16="http://schemas.microsoft.com/office/drawing/2014/main" val="10000"/>
+                  </a:ext>
+                </a:extLst>
               </a:tr>
               <a:tr h="411480">
                 <a:tc>
@@ -7016,6 +9570,11 @@
                     </a:solidFill>
                   </a:tcPr>
                 </a:tc>
+                <a:extLst>
+                  <a:ext uri="{0D108BD9-81ED-4DB2-BD59-A6C34878D82A}">
+                    <a16:rowId xmlns:a16="http://schemas.microsoft.com/office/drawing/2014/main" val="10001"/>
+                  </a:ext>
+                </a:extLst>
               </a:tr>
               <a:tr h="411480">
                 <a:tc>
@@ -7106,6 +9665,11 @@
                     </a:solidFill>
                   </a:tcPr>
                 </a:tc>
+                <a:extLst>
+                  <a:ext uri="{0D108BD9-81ED-4DB2-BD59-A6C34878D82A}">
+                    <a16:rowId xmlns:a16="http://schemas.microsoft.com/office/drawing/2014/main" val="10002"/>
+                  </a:ext>
+                </a:extLst>
               </a:tr>
             </a:tbl>
           </a:graphicData>
@@ -7128,7 +9692,7 @@
           <a:noFill/>
         </p:spPr>
         <p:txBody>
-          <a:bodyPr wrap="square" anchor="t" lIns="36576" rIns="36576" tIns="0" bIns="0">
+          <a:bodyPr wrap="square" lIns="36576" tIns="0" rIns="36576" bIns="0" anchor="t">
             <a:spAutoFit/>
           </a:bodyPr>
           <a:lstStyle/>
@@ -7163,7 +9727,7 @@
           <a:noFill/>
         </p:spPr>
         <p:txBody>
-          <a:bodyPr wrap="square" anchor="t" lIns="36576" rIns="36576" tIns="0" bIns="0">
+          <a:bodyPr wrap="square" lIns="36576" tIns="0" rIns="36576" bIns="0" anchor="t">
             <a:spAutoFit/>
           </a:bodyPr>
           <a:lstStyle/>
@@ -7190,7 +9754,7 @@
 </file>
 
 <file path=ppt/slides/slide3.xml><?xml version="1.0" encoding="utf-8"?>
-<p:sld xmlns:a="http://schemas.openxmlformats.org/drawingml/2006/main" xmlns:p="http://schemas.openxmlformats.org/presentationml/2006/main" xmlns:r="http://schemas.openxmlformats.org/officeDocument/2006/relationships">
+<p:sld xmlns:a="http://schemas.openxmlformats.org/drawingml/2006/main" xmlns:r="http://schemas.openxmlformats.org/officeDocument/2006/relationships" xmlns:p="http://schemas.openxmlformats.org/presentationml/2006/main">
   <p:cSld>
     <p:spTree>
       <p:nvGrpSpPr>
@@ -7198,7 +9762,14 @@
         <p:cNvGrpSpPr/>
         <p:nvPr/>
       </p:nvGrpSpPr>
-      <p:grpSpPr/>
+      <p:grpSpPr>
+        <a:xfrm>
+          <a:off x="0" y="0"/>
+          <a:ext cx="0" cy="0"/>
+          <a:chOff x="0" y="0"/>
+          <a:chExt cx="0" cy="0"/>
+        </a:xfrm>
+      </p:grpSpPr>
       <p:sp>
         <p:nvSpPr>
           <p:cNvPr id="2" name="TextBox 1"/>
@@ -7216,7 +9787,7 @@
           <a:noFill/>
         </p:spPr>
         <p:txBody>
-          <a:bodyPr wrap="square" anchor="ctr" lIns="36576" rIns="36576" tIns="0" bIns="0">
+          <a:bodyPr wrap="square" lIns="36576" tIns="0" rIns="36576" bIns="0" anchor="ctr">
             <a:spAutoFit/>
           </a:bodyPr>
           <a:lstStyle/>
@@ -7251,7 +9822,7 @@
           <a:noFill/>
         </p:spPr>
         <p:txBody>
-          <a:bodyPr wrap="square" anchor="t" lIns="36576" rIns="36576" tIns="0" bIns="0">
+          <a:bodyPr wrap="square" lIns="36576" tIns="0" rIns="36576" bIns="0" anchor="t">
             <a:spAutoFit/>
           </a:bodyPr>
           <a:lstStyle/>
@@ -7308,7 +9879,7 @@
           </a:fontRef>
         </p:style>
         <p:txBody>
-          <a:bodyPr rtlCol="0" anchor="ctr" wrap="square" lIns="36576" rIns="36576" tIns="0" bIns="0"/>
+          <a:bodyPr wrap="square" lIns="36576" tIns="0" rIns="36576" bIns="0" rtlCol="0" anchor="ctr"/>
           <a:lstStyle/>
           <a:p>
             <a:pPr algn="ctr"/>
@@ -7375,7 +9946,7 @@
           </a:fontRef>
         </p:style>
         <p:txBody>
-          <a:bodyPr rtlCol="0" anchor="ctr" wrap="square" lIns="36576" rIns="36576" tIns="0" bIns="0"/>
+          <a:bodyPr wrap="square" lIns="36576" tIns="0" rIns="36576" bIns="0" rtlCol="0" anchor="ctr"/>
           <a:lstStyle/>
           <a:p>
             <a:pPr algn="ctr"/>
@@ -7442,7 +10013,7 @@
           </a:fontRef>
         </p:style>
         <p:txBody>
-          <a:bodyPr rtlCol="0" anchor="ctr" wrap="square" lIns="36576" rIns="36576" tIns="0" bIns="0"/>
+          <a:bodyPr wrap="square" lIns="36576" tIns="0" rIns="36576" bIns="0" rtlCol="0" anchor="ctr"/>
           <a:lstStyle/>
           <a:p>
             <a:pPr algn="ctr"/>
@@ -7509,7 +10080,7 @@
           </a:fontRef>
         </p:style>
         <p:txBody>
-          <a:bodyPr rtlCol="0" anchor="ctr" wrap="square" lIns="36576" rIns="36576" tIns="0" bIns="0"/>
+          <a:bodyPr wrap="square" lIns="36576" tIns="0" rIns="36576" bIns="0" rtlCol="0" anchor="ctr"/>
           <a:lstStyle/>
           <a:p>
             <a:pPr algn="ctr"/>
@@ -7588,7 +10159,7 @@
           </a:fontRef>
         </p:style>
         <p:txBody>
-          <a:bodyPr rtlCol="0" anchor="ctr" wrap="square" lIns="36576" rIns="36576" tIns="0" bIns="0"/>
+          <a:bodyPr wrap="square" lIns="36576" tIns="0" rIns="36576" bIns="0" rtlCol="0" anchor="ctr"/>
           <a:lstStyle/>
           <a:p>
             <a:pPr algn="ctr"/>
@@ -7655,7 +10226,7 @@
           </a:fontRef>
         </p:style>
         <p:txBody>
-          <a:bodyPr rtlCol="0" anchor="ctr" wrap="square" lIns="36576" rIns="36576" tIns="0" bIns="0"/>
+          <a:bodyPr wrap="square" lIns="36576" tIns="0" rIns="36576" bIns="0" rtlCol="0" anchor="ctr"/>
           <a:lstStyle/>
           <a:p>
             <a:pPr algn="ctr"/>
@@ -7722,7 +10293,7 @@
           </a:fontRef>
         </p:style>
         <p:txBody>
-          <a:bodyPr rtlCol="0" anchor="ctr" wrap="square" lIns="36576" rIns="36576" tIns="0" bIns="0"/>
+          <a:bodyPr wrap="square" lIns="36576" tIns="0" rIns="36576" bIns="0" rtlCol="0" anchor="ctr"/>
           <a:lstStyle/>
           <a:p>
             <a:pPr algn="ctr"/>
@@ -8127,7 +10698,7 @@
           <a:noFill/>
         </p:spPr>
         <p:txBody>
-          <a:bodyPr wrap="square" anchor="t" lIns="36576" rIns="36576" tIns="0" bIns="0">
+          <a:bodyPr wrap="square" lIns="36576" tIns="0" rIns="36576" bIns="0" anchor="t">
             <a:spAutoFit/>
           </a:bodyPr>
           <a:lstStyle/>
@@ -8162,7 +10733,7 @@
           <a:noFill/>
         </p:spPr>
         <p:txBody>
-          <a:bodyPr wrap="square" anchor="t" lIns="36576" rIns="36576" tIns="0" bIns="0">
+          <a:bodyPr wrap="square" lIns="36576" tIns="0" rIns="36576" bIns="0" anchor="t">
             <a:spAutoFit/>
           </a:bodyPr>
           <a:lstStyle/>
@@ -8197,7 +10768,7 @@
           <a:noFill/>
         </p:spPr>
         <p:txBody>
-          <a:bodyPr wrap="square" anchor="t" lIns="36576" rIns="36576" tIns="0" bIns="0">
+          <a:bodyPr wrap="square" lIns="36576" tIns="0" rIns="36576" bIns="0" anchor="t">
             <a:spAutoFit/>
           </a:bodyPr>
           <a:lstStyle/>
@@ -8316,7 +10887,7 @@
           <a:noFill/>
         </p:spPr>
         <p:txBody>
-          <a:bodyPr wrap="square" anchor="t" lIns="36576" rIns="36576" tIns="0" bIns="0">
+          <a:bodyPr wrap="square" lIns="36576" tIns="0" rIns="36576" bIns="0" anchor="t">
             <a:spAutoFit/>
           </a:bodyPr>
           <a:lstStyle/>
@@ -8387,7 +10958,7 @@
           <a:noFill/>
         </p:spPr>
         <p:txBody>
-          <a:bodyPr wrap="square" anchor="t" lIns="36576" rIns="36576" tIns="0" bIns="0">
+          <a:bodyPr wrap="square" lIns="36576" tIns="0" rIns="36576" bIns="0" anchor="t">
             <a:spAutoFit/>
           </a:bodyPr>
           <a:lstStyle/>
@@ -8422,7 +10993,7 @@
           <a:noFill/>
         </p:spPr>
         <p:txBody>
-          <a:bodyPr wrap="square" anchor="t" lIns="36576" rIns="36576" tIns="0" bIns="0">
+          <a:bodyPr wrap="square" lIns="36576" tIns="0" rIns="36576" bIns="0" anchor="t">
             <a:spAutoFit/>
           </a:bodyPr>
           <a:lstStyle/>
@@ -8449,7 +11020,7 @@
 </file>
 
 <file path=ppt/slides/slide4.xml><?xml version="1.0" encoding="utf-8"?>
-<p:sld xmlns:a="http://schemas.openxmlformats.org/drawingml/2006/main" xmlns:p="http://schemas.openxmlformats.org/presentationml/2006/main" xmlns:r="http://schemas.openxmlformats.org/officeDocument/2006/relationships">
+<p:sld xmlns:a="http://schemas.openxmlformats.org/drawingml/2006/main" xmlns:r="http://schemas.openxmlformats.org/officeDocument/2006/relationships" xmlns:p="http://schemas.openxmlformats.org/presentationml/2006/main">
   <p:cSld>
     <p:spTree>
       <p:nvGrpSpPr>
@@ -8457,7 +11028,14 @@
         <p:cNvGrpSpPr/>
         <p:nvPr/>
       </p:nvGrpSpPr>
-      <p:grpSpPr/>
+      <p:grpSpPr>
+        <a:xfrm>
+          <a:off x="0" y="0"/>
+          <a:ext cx="0" cy="0"/>
+          <a:chOff x="0" y="0"/>
+          <a:chExt cx="0" cy="0"/>
+        </a:xfrm>
+      </p:grpSpPr>
       <p:sp>
         <p:nvSpPr>
           <p:cNvPr id="2" name="TextBox 1"/>
@@ -8475,7 +11053,7 @@
           <a:noFill/>
         </p:spPr>
         <p:txBody>
-          <a:bodyPr wrap="square" anchor="ctr" lIns="36576" rIns="36576" tIns="0" bIns="0">
+          <a:bodyPr wrap="square" lIns="36576" tIns="0" rIns="36576" bIns="0" anchor="ctr">
             <a:spAutoFit/>
           </a:bodyPr>
           <a:lstStyle/>
@@ -8510,7 +11088,7 @@
           <a:noFill/>
         </p:spPr>
         <p:txBody>
-          <a:bodyPr wrap="square" anchor="t" lIns="36576" rIns="36576" tIns="0" bIns="0">
+          <a:bodyPr wrap="square" lIns="36576" tIns="0" rIns="36576" bIns="0" anchor="t">
             <a:spAutoFit/>
           </a:bodyPr>
           <a:lstStyle/>
@@ -8567,7 +11145,7 @@
           </a:fontRef>
         </p:style>
         <p:txBody>
-          <a:bodyPr rtlCol="0" anchor="ctr" wrap="square" lIns="36576" rIns="36576" tIns="0" bIns="0"/>
+          <a:bodyPr wrap="square" lIns="36576" tIns="0" rIns="36576" bIns="0" rtlCol="0" anchor="ctr"/>
           <a:lstStyle/>
           <a:p>
             <a:pPr algn="ctr"/>
@@ -8658,7 +11236,7 @@
           </a:fontRef>
         </p:style>
         <p:txBody>
-          <a:bodyPr rtlCol="0" anchor="ctr" wrap="square" lIns="36576" rIns="36576" tIns="0" bIns="0"/>
+          <a:bodyPr wrap="square" lIns="36576" tIns="0" rIns="36576" bIns="0" rtlCol="0" anchor="ctr"/>
           <a:lstStyle/>
           <a:p>
             <a:pPr algn="ctr"/>
@@ -8691,7 +11269,7 @@
           <a:noFill/>
         </p:spPr>
         <p:txBody>
-          <a:bodyPr wrap="square" anchor="t" lIns="36576" rIns="36576" tIns="0" bIns="0">
+          <a:bodyPr wrap="square" lIns="36576" tIns="0" rIns="36576" bIns="0" anchor="t">
             <a:spAutoFit/>
           </a:bodyPr>
           <a:lstStyle/>
@@ -8784,7 +11362,7 @@
           </a:fontRef>
         </p:style>
         <p:txBody>
-          <a:bodyPr rtlCol="0" anchor="ctr" wrap="square" lIns="36576" rIns="36576" tIns="0" bIns="0"/>
+          <a:bodyPr wrap="square" lIns="36576" tIns="0" rIns="36576" bIns="0" rtlCol="0" anchor="ctr"/>
           <a:lstStyle/>
           <a:p>
             <a:pPr algn="ctr"/>
@@ -8829,7 +11407,7 @@
           <a:noFill/>
         </p:spPr>
         <p:txBody>
-          <a:bodyPr wrap="square" anchor="t" lIns="36576" rIns="36576" tIns="0" bIns="0">
+          <a:bodyPr wrap="square" lIns="36576" tIns="0" rIns="36576" bIns="0" anchor="t">
             <a:spAutoFit/>
           </a:bodyPr>
           <a:lstStyle/>
@@ -8922,7 +11500,7 @@
           </a:fontRef>
         </p:style>
         <p:txBody>
-          <a:bodyPr rtlCol="0" anchor="ctr" wrap="square" lIns="36576" rIns="36576" tIns="0" bIns="0"/>
+          <a:bodyPr wrap="square" lIns="36576" tIns="0" rIns="36576" bIns="0" rtlCol="0" anchor="ctr"/>
           <a:lstStyle/>
           <a:p>
             <a:pPr algn="ctr"/>
@@ -8967,7 +11545,7 @@
           <a:noFill/>
         </p:spPr>
         <p:txBody>
-          <a:bodyPr wrap="square" anchor="t" lIns="36576" rIns="36576" tIns="0" bIns="0">
+          <a:bodyPr wrap="square" lIns="36576" tIns="0" rIns="36576" bIns="0" anchor="t">
             <a:spAutoFit/>
           </a:bodyPr>
           <a:lstStyle/>
@@ -9060,7 +11638,7 @@
           </a:fontRef>
         </p:style>
         <p:txBody>
-          <a:bodyPr rtlCol="0" anchor="ctr" wrap="square" lIns="36576" rIns="36576" tIns="0" bIns="0"/>
+          <a:bodyPr wrap="square" lIns="36576" tIns="0" rIns="36576" bIns="0" rtlCol="0" anchor="ctr"/>
           <a:lstStyle/>
           <a:p>
             <a:pPr algn="ctr"/>
@@ -9093,7 +11671,7 @@
           <a:noFill/>
         </p:spPr>
         <p:txBody>
-          <a:bodyPr wrap="square" anchor="t" lIns="36576" rIns="36576" tIns="0" bIns="0">
+          <a:bodyPr wrap="square" lIns="36576" tIns="0" rIns="36576" bIns="0" anchor="t">
             <a:spAutoFit/>
           </a:bodyPr>
           <a:lstStyle/>
@@ -9186,7 +11764,7 @@
           </a:fontRef>
         </p:style>
         <p:txBody>
-          <a:bodyPr rtlCol="0" anchor="ctr" wrap="square" lIns="36576" rIns="36576" tIns="0" bIns="0"/>
+          <a:bodyPr wrap="square" lIns="36576" tIns="0" rIns="36576" bIns="0" rtlCol="0" anchor="ctr"/>
           <a:lstStyle/>
           <a:p>
             <a:pPr algn="ctr"/>
@@ -9231,7 +11809,7 @@
           <a:noFill/>
         </p:spPr>
         <p:txBody>
-          <a:bodyPr wrap="square" anchor="t" lIns="36576" rIns="36576" tIns="0" bIns="0">
+          <a:bodyPr wrap="square" lIns="36576" tIns="0" rIns="36576" bIns="0" anchor="t">
             <a:spAutoFit/>
           </a:bodyPr>
           <a:lstStyle/>
@@ -9324,7 +11902,7 @@
           </a:fontRef>
         </p:style>
         <p:txBody>
-          <a:bodyPr rtlCol="0" anchor="ctr" wrap="square" lIns="36576" rIns="36576" tIns="0" bIns="0"/>
+          <a:bodyPr wrap="square" lIns="36576" tIns="0" rIns="36576" bIns="0" rtlCol="0" anchor="ctr"/>
           <a:lstStyle/>
           <a:p>
             <a:pPr algn="ctr"/>
@@ -9357,7 +11935,7 @@
           <a:noFill/>
         </p:spPr>
         <p:txBody>
-          <a:bodyPr wrap="square" anchor="t" lIns="36576" rIns="36576" tIns="0" bIns="0">
+          <a:bodyPr wrap="square" lIns="36576" tIns="0" rIns="36576" bIns="0" anchor="t">
             <a:spAutoFit/>
           </a:bodyPr>
           <a:lstStyle/>
@@ -9450,7 +12028,7 @@
           </a:fontRef>
         </p:style>
         <p:txBody>
-          <a:bodyPr rtlCol="0" anchor="ctr" wrap="square" lIns="36576" rIns="36576" tIns="0" bIns="0"/>
+          <a:bodyPr wrap="square" lIns="36576" tIns="0" rIns="36576" bIns="0" rtlCol="0" anchor="ctr"/>
           <a:lstStyle/>
           <a:p>
             <a:pPr algn="ctr"/>
@@ -9483,7 +12061,7 @@
           <a:noFill/>
         </p:spPr>
         <p:txBody>
-          <a:bodyPr wrap="square" anchor="t" lIns="36576" rIns="36576" tIns="0" bIns="0">
+          <a:bodyPr wrap="square" lIns="36576" tIns="0" rIns="36576" bIns="0" anchor="t">
             <a:spAutoFit/>
           </a:bodyPr>
           <a:lstStyle/>
@@ -9518,7 +12096,7 @@
           <a:noFill/>
         </p:spPr>
         <p:txBody>
-          <a:bodyPr wrap="square" anchor="t" lIns="36576" rIns="36576" tIns="0" bIns="0">
+          <a:bodyPr wrap="square" lIns="36576" tIns="0" rIns="36576" bIns="0" anchor="t">
             <a:spAutoFit/>
           </a:bodyPr>
           <a:lstStyle/>
@@ -9553,7 +12131,7 @@
           <a:noFill/>
         </p:spPr>
         <p:txBody>
-          <a:bodyPr wrap="square" anchor="t" lIns="36576" rIns="36576" tIns="0" bIns="0">
+          <a:bodyPr wrap="square" lIns="36576" tIns="0" rIns="36576" bIns="0" anchor="t">
             <a:spAutoFit/>
           </a:bodyPr>
           <a:lstStyle/>
@@ -9588,7 +12166,7 @@
           <a:noFill/>
         </p:spPr>
         <p:txBody>
-          <a:bodyPr wrap="square" anchor="t" lIns="36576" rIns="36576" tIns="0" bIns="0">
+          <a:bodyPr wrap="square" lIns="36576" tIns="0" rIns="36576" bIns="0" anchor="t">
             <a:spAutoFit/>
           </a:bodyPr>
           <a:lstStyle/>
@@ -9623,7 +12201,7 @@
           <a:noFill/>
         </p:spPr>
         <p:txBody>
-          <a:bodyPr wrap="square" anchor="t" lIns="36576" rIns="36576" tIns="0" bIns="0">
+          <a:bodyPr wrap="square" lIns="36576" tIns="0" rIns="36576" bIns="0" anchor="t">
             <a:spAutoFit/>
           </a:bodyPr>
           <a:lstStyle/>
@@ -9658,7 +12236,7 @@
           <a:noFill/>
         </p:spPr>
         <p:txBody>
-          <a:bodyPr wrap="square" anchor="t" lIns="36576" rIns="36576" tIns="0" bIns="0">
+          <a:bodyPr wrap="square" lIns="36576" tIns="0" rIns="36576" bIns="0" anchor="t">
             <a:spAutoFit/>
           </a:bodyPr>
           <a:lstStyle/>
@@ -9693,7 +12271,7 @@
           <a:noFill/>
         </p:spPr>
         <p:txBody>
-          <a:bodyPr wrap="square" anchor="t" lIns="36576" rIns="36576" tIns="0" bIns="0">
+          <a:bodyPr wrap="square" lIns="36576" tIns="0" rIns="36576" bIns="0" anchor="t">
             <a:spAutoFit/>
           </a:bodyPr>
           <a:lstStyle/>
@@ -9728,7 +12306,7 @@
           <a:noFill/>
         </p:spPr>
         <p:txBody>
-          <a:bodyPr wrap="square" anchor="t" lIns="36576" rIns="36576" tIns="0" bIns="0">
+          <a:bodyPr wrap="square" lIns="36576" tIns="0" rIns="36576" bIns="0" anchor="t">
             <a:spAutoFit/>
           </a:bodyPr>
           <a:lstStyle/>
@@ -9785,7 +12363,7 @@
           </a:fontRef>
         </p:style>
         <p:txBody>
-          <a:bodyPr rtlCol="0" anchor="ctr" wrap="square" lIns="36576" rIns="36576" tIns="0" bIns="0"/>
+          <a:bodyPr wrap="square" lIns="36576" tIns="0" rIns="36576" bIns="0" rtlCol="0" anchor="ctr"/>
           <a:lstStyle/>
           <a:p>
             <a:pPr algn="ctr"/>
@@ -9830,7 +12408,7 @@
           <a:noFill/>
         </p:spPr>
         <p:txBody>
-          <a:bodyPr wrap="square" anchor="t" lIns="36576" rIns="36576" tIns="0" bIns="0">
+          <a:bodyPr wrap="square" lIns="36576" tIns="0" rIns="36576" bIns="0" anchor="t">
             <a:spAutoFit/>
           </a:bodyPr>
           <a:lstStyle/>
@@ -9865,7 +12443,7 @@
           <a:noFill/>
         </p:spPr>
         <p:txBody>
-          <a:bodyPr wrap="square" anchor="t" lIns="36576" rIns="36576" tIns="0" bIns="0">
+          <a:bodyPr wrap="square" lIns="36576" tIns="0" rIns="36576" bIns="0" anchor="t">
             <a:spAutoFit/>
           </a:bodyPr>
           <a:lstStyle/>
@@ -9900,7 +12478,7 @@
           <a:noFill/>
         </p:spPr>
         <p:txBody>
-          <a:bodyPr wrap="square" anchor="t" lIns="36576" rIns="36576" tIns="0" bIns="0">
+          <a:bodyPr wrap="square" lIns="36576" tIns="0" rIns="36576" bIns="0" anchor="t">
             <a:spAutoFit/>
           </a:bodyPr>
           <a:lstStyle/>
@@ -9935,7 +12513,7 @@
           <a:noFill/>
         </p:spPr>
         <p:txBody>
-          <a:bodyPr wrap="square" anchor="t" lIns="36576" rIns="36576" tIns="0" bIns="0">
+          <a:bodyPr wrap="square" lIns="36576" tIns="0" rIns="36576" bIns="0" anchor="t">
             <a:spAutoFit/>
           </a:bodyPr>
           <a:lstStyle/>
@@ -9970,7 +12548,7 @@
           <a:noFill/>
         </p:spPr>
         <p:txBody>
-          <a:bodyPr wrap="square" anchor="t" lIns="36576" rIns="36576" tIns="0" bIns="0">
+          <a:bodyPr wrap="square" lIns="36576" tIns="0" rIns="36576" bIns="0" anchor="t">
             <a:spAutoFit/>
           </a:bodyPr>
           <a:lstStyle/>
@@ -10005,7 +12583,7 @@
           <a:noFill/>
         </p:spPr>
         <p:txBody>
-          <a:bodyPr wrap="square" anchor="t" lIns="36576" rIns="36576" tIns="0" bIns="0">
+          <a:bodyPr wrap="square" lIns="36576" tIns="0" rIns="36576" bIns="0" anchor="t">
             <a:spAutoFit/>
           </a:bodyPr>
           <a:lstStyle/>
@@ -10040,7 +12618,7 @@
           <a:noFill/>
         </p:spPr>
         <p:txBody>
-          <a:bodyPr wrap="square" anchor="t" lIns="36576" rIns="36576" tIns="0" bIns="0">
+          <a:bodyPr wrap="square" lIns="36576" tIns="0" rIns="36576" bIns="0" anchor="t">
             <a:spAutoFit/>
           </a:bodyPr>
           <a:lstStyle/>
@@ -10075,7 +12653,7 @@
           <a:noFill/>
         </p:spPr>
         <p:txBody>
-          <a:bodyPr wrap="square" anchor="t" lIns="36576" rIns="36576" tIns="0" bIns="0">
+          <a:bodyPr wrap="square" lIns="36576" tIns="0" rIns="36576" bIns="0" anchor="t">
             <a:spAutoFit/>
           </a:bodyPr>
           <a:lstStyle/>
@@ -10102,7 +12680,7 @@
 </file>
 
 <file path=ppt/slides/slide5.xml><?xml version="1.0" encoding="utf-8"?>
-<p:sld xmlns:a="http://schemas.openxmlformats.org/drawingml/2006/main" xmlns:p="http://schemas.openxmlformats.org/presentationml/2006/main" xmlns:r="http://schemas.openxmlformats.org/officeDocument/2006/relationships">
+<p:sld xmlns:a="http://schemas.openxmlformats.org/drawingml/2006/main" xmlns:r="http://schemas.openxmlformats.org/officeDocument/2006/relationships" xmlns:p="http://schemas.openxmlformats.org/presentationml/2006/main">
   <p:cSld>
     <p:spTree>
       <p:nvGrpSpPr>
@@ -10110,7 +12688,14 @@
         <p:cNvGrpSpPr/>
         <p:nvPr/>
       </p:nvGrpSpPr>
-      <p:grpSpPr/>
+      <p:grpSpPr>
+        <a:xfrm>
+          <a:off x="0" y="0"/>
+          <a:ext cx="0" cy="0"/>
+          <a:chOff x="0" y="0"/>
+          <a:chExt cx="0" cy="0"/>
+        </a:xfrm>
+      </p:grpSpPr>
       <p:sp>
         <p:nvSpPr>
           <p:cNvPr id="2" name="TextBox 1"/>
@@ -10128,7 +12713,7 @@
           <a:noFill/>
         </p:spPr>
         <p:txBody>
-          <a:bodyPr wrap="square" anchor="ctr" lIns="36576" rIns="36576" tIns="0" bIns="0">
+          <a:bodyPr wrap="square" lIns="36576" tIns="0" rIns="36576" bIns="0" anchor="ctr">
             <a:spAutoFit/>
           </a:bodyPr>
           <a:lstStyle/>
@@ -10163,7 +12748,7 @@
           <a:noFill/>
         </p:spPr>
         <p:txBody>
-          <a:bodyPr wrap="square" anchor="t" lIns="36576" rIns="36576" tIns="0" bIns="0">
+          <a:bodyPr wrap="square" lIns="36576" tIns="0" rIns="36576" bIns="0" anchor="t">
             <a:spAutoFit/>
           </a:bodyPr>
           <a:lstStyle/>
@@ -10196,11 +12781,11 @@
             <a:avLst/>
           </a:prstGeom>
           <a:solidFill>
-            <a:srgbClr val="EEF1F7"/>
+            <a:srgbClr val="EFE9E1"/>
           </a:solidFill>
           <a:ln w="9525">
             <a:solidFill>
-              <a:srgbClr val="B6BFD0"/>
+              <a:srgbClr val="B0A69A"/>
             </a:solidFill>
           </a:ln>
           <a:effectLst/>
@@ -10222,7 +12807,9 @@
         <p:txBody>
           <a:bodyPr rtlCol="0" anchor="ctr"/>
           <a:lstStyle/>
-          <a:p/>
+          <a:p>
+            <a:endParaRPr/>
+          </a:p>
         </p:txBody>
       </p:sp>
       <p:sp>
@@ -10242,7 +12829,7 @@
           <a:noFill/>
         </p:spPr>
         <p:txBody>
-          <a:bodyPr wrap="square" anchor="t" lIns="36576" rIns="36576" tIns="0" bIns="0">
+          <a:bodyPr wrap="square" lIns="36576" tIns="0" rIns="36576" bIns="0" anchor="t">
             <a:spAutoFit/>
           </a:bodyPr>
           <a:lstStyle/>
@@ -10255,7 +12842,7 @@
                 </a:solidFill>
                 <a:latin typeface="맑은 고딕"/>
               </a:rPr>
-              <a:t>WMS / IMS</a:t>
+              <a:t>WMS / IMS   (외부 시스템)</a:t>
             </a:r>
           </a:p>
         </p:txBody>
@@ -10275,11 +12862,11 @@
             <a:avLst/>
           </a:prstGeom>
           <a:solidFill>
-            <a:srgbClr val="EEF1F7"/>
+            <a:srgbClr val="E3EDFA"/>
           </a:solidFill>
-          <a:ln w="9525">
+          <a:ln w="15875">
             <a:solidFill>
-              <a:srgbClr val="B6BFD0"/>
+              <a:srgbClr val="2E5C9E"/>
             </a:solidFill>
           </a:ln>
           <a:effectLst/>
@@ -10301,7 +12888,9 @@
         <p:txBody>
           <a:bodyPr rtlCol="0" anchor="ctr"/>
           <a:lstStyle/>
-          <a:p/>
+          <a:p>
+            <a:endParaRPr/>
+          </a:p>
         </p:txBody>
       </p:sp>
       <p:sp>
@@ -10321,7 +12910,7 @@
           <a:noFill/>
         </p:spPr>
         <p:txBody>
-          <a:bodyPr wrap="square" anchor="t" lIns="36576" rIns="36576" tIns="0" bIns="0">
+          <a:bodyPr wrap="square" lIns="36576" tIns="0" rIns="36576" bIns="0" anchor="t">
             <a:spAutoFit/>
           </a:bodyPr>
           <a:lstStyle/>
@@ -10334,7 +12923,7 @@
                 </a:solidFill>
                 <a:latin typeface="맑은 고딕"/>
               </a:rPr>
-              <a:t>상위 통신</a:t>
+              <a:t>상위 통신   (ECS)</a:t>
             </a:r>
           </a:p>
         </p:txBody>
@@ -10354,11 +12943,11 @@
             <a:avLst/>
           </a:prstGeom>
           <a:solidFill>
-            <a:srgbClr val="EEF1F7"/>
+            <a:srgbClr val="E3EDFA"/>
           </a:solidFill>
-          <a:ln w="9525">
+          <a:ln w="15875">
             <a:solidFill>
-              <a:srgbClr val="B6BFD0"/>
+              <a:srgbClr val="2E5C9E"/>
             </a:solidFill>
           </a:ln>
           <a:effectLst/>
@@ -10380,7 +12969,9 @@
         <p:txBody>
           <a:bodyPr rtlCol="0" anchor="ctr"/>
           <a:lstStyle/>
-          <a:p/>
+          <a:p>
+            <a:endParaRPr/>
+          </a:p>
         </p:txBody>
       </p:sp>
       <p:sp>
@@ -10400,7 +12991,7 @@
           <a:noFill/>
         </p:spPr>
         <p:txBody>
-          <a:bodyPr wrap="square" anchor="t" lIns="36576" rIns="36576" tIns="0" bIns="0">
+          <a:bodyPr wrap="square" lIns="36576" tIns="0" rIns="36576" bIns="0" anchor="t">
             <a:spAutoFit/>
           </a:bodyPr>
           <a:lstStyle/>
@@ -10413,7 +13004,7 @@
                 </a:solidFill>
                 <a:latin typeface="맑은 고딕"/>
               </a:rPr>
-              <a:t>스케줄러</a:t>
+              <a:t>스케줄러   (ECS)</a:t>
             </a:r>
           </a:p>
         </p:txBody>
@@ -10433,11 +13024,11 @@
             <a:avLst/>
           </a:prstGeom>
           <a:solidFill>
-            <a:srgbClr val="EEF1F7"/>
+            <a:srgbClr val="E3EDFA"/>
           </a:solidFill>
-          <a:ln w="9525">
+          <a:ln w="15875">
             <a:solidFill>
-              <a:srgbClr val="B6BFD0"/>
+              <a:srgbClr val="2E5C9E"/>
             </a:solidFill>
           </a:ln>
           <a:effectLst/>
@@ -10459,7 +13050,9 @@
         <p:txBody>
           <a:bodyPr rtlCol="0" anchor="ctr"/>
           <a:lstStyle/>
-          <a:p/>
+          <a:p>
+            <a:endParaRPr/>
+          </a:p>
         </p:txBody>
       </p:sp>
       <p:sp>
@@ -10479,7 +13072,7 @@
           <a:noFill/>
         </p:spPr>
         <p:txBody>
-          <a:bodyPr wrap="square" anchor="t" lIns="36576" rIns="36576" tIns="0" bIns="0">
+          <a:bodyPr wrap="square" lIns="36576" tIns="0" rIns="36576" bIns="0" anchor="t">
             <a:spAutoFit/>
           </a:bodyPr>
           <a:lstStyle/>
@@ -10492,7 +13085,7 @@
                 </a:solidFill>
                 <a:latin typeface="맑은 고딕"/>
               </a:rPr>
-              <a:t>설비 통신</a:t>
+              <a:t>설비 통신   (ECS)</a:t>
             </a:r>
           </a:p>
         </p:txBody>
@@ -10512,11 +13105,11 @@
             <a:avLst/>
           </a:prstGeom>
           <a:solidFill>
-            <a:srgbClr val="EEF1F7"/>
+            <a:srgbClr val="EFE9E1"/>
           </a:solidFill>
           <a:ln w="9525">
             <a:solidFill>
-              <a:srgbClr val="B6BFD0"/>
+              <a:srgbClr val="B0A69A"/>
             </a:solidFill>
           </a:ln>
           <a:effectLst/>
@@ -10538,7 +13131,9 @@
         <p:txBody>
           <a:bodyPr rtlCol="0" anchor="ctr"/>
           <a:lstStyle/>
-          <a:p/>
+          <a:p>
+            <a:endParaRPr/>
+          </a:p>
         </p:txBody>
       </p:sp>
       <p:sp>
@@ -10558,7 +13153,7 @@
           <a:noFill/>
         </p:spPr>
         <p:txBody>
-          <a:bodyPr wrap="square" anchor="t" lIns="36576" rIns="36576" tIns="0" bIns="0">
+          <a:bodyPr wrap="square" lIns="36576" tIns="0" rIns="36576" bIns="0" anchor="t">
             <a:spAutoFit/>
           </a:bodyPr>
           <a:lstStyle/>
@@ -10571,7 +13166,7 @@
                 </a:solidFill>
                 <a:latin typeface="맑은 고딕"/>
               </a:rPr>
-              <a:t>설비 / PLC</a:t>
+              <a:t>설비 / PLC   (외부 설비)</a:t>
             </a:r>
           </a:p>
         </p:txBody>
@@ -10593,44 +13188,782 @@
           <a:noFill/>
         </p:spPr>
         <p:txBody>
-          <a:bodyPr wrap="square" anchor="t" lIns="36576" rIns="36576" tIns="0" bIns="0">
+          <a:bodyPr wrap="square" lIns="36576" tIns="0" rIns="36576" bIns="0" anchor="t">
             <a:spAutoFit/>
           </a:bodyPr>
           <a:lstStyle/>
           <a:p>
             <a:pPr algn="l"/>
             <a:r>
-              <a:rPr sz="1100" b="0">
-                <a:solidFill>
-                  <a:srgbClr val="595959"/>
-                </a:solidFill>
-                <a:latin typeface="맑은 고딕"/>
-              </a:rPr>
-              <a:t>· 스케줄러는 설비에 직접 말하지 않는다. 지시를 DB(_OD)에 쓰면 설비 통신이 PLC 로 전송한다.</a:t>
+              <a:rPr sz="1100" b="0" dirty="0">
+                <a:solidFill>
+                  <a:srgbClr val="595959"/>
+                </a:solidFill>
+                <a:latin typeface="맑은 고딕"/>
+              </a:rPr>
+              <a:t>· </a:t>
+            </a:r>
+            <a:r>
+              <a:rPr sz="1100" b="0" dirty="0" err="1">
+                <a:solidFill>
+                  <a:srgbClr val="595959"/>
+                </a:solidFill>
+                <a:latin typeface="맑은 고딕"/>
+              </a:rPr>
+              <a:t>스케줄러는</a:t>
+            </a:r>
+            <a:r>
+              <a:rPr sz="1100" b="0" dirty="0">
+                <a:solidFill>
+                  <a:srgbClr val="595959"/>
+                </a:solidFill>
+                <a:latin typeface="맑은 고딕"/>
+              </a:rPr>
+              <a:t> </a:t>
+            </a:r>
+            <a:r>
+              <a:rPr sz="1100" b="0" dirty="0" err="1">
+                <a:solidFill>
+                  <a:srgbClr val="595959"/>
+                </a:solidFill>
+                <a:latin typeface="맑은 고딕"/>
+              </a:rPr>
+              <a:t>설비에</a:t>
+            </a:r>
+            <a:r>
+              <a:rPr sz="1100" b="0" dirty="0">
+                <a:solidFill>
+                  <a:srgbClr val="595959"/>
+                </a:solidFill>
+                <a:latin typeface="맑은 고딕"/>
+              </a:rPr>
+              <a:t> </a:t>
+            </a:r>
+            <a:r>
+              <a:rPr sz="1100" b="0" dirty="0" err="1">
+                <a:solidFill>
+                  <a:srgbClr val="595959"/>
+                </a:solidFill>
+                <a:latin typeface="맑은 고딕"/>
+              </a:rPr>
+              <a:t>직접</a:t>
+            </a:r>
+            <a:r>
+              <a:rPr sz="1100" b="0" dirty="0">
+                <a:solidFill>
+                  <a:srgbClr val="595959"/>
+                </a:solidFill>
+                <a:latin typeface="맑은 고딕"/>
+              </a:rPr>
+              <a:t> </a:t>
+            </a:r>
+            <a:r>
+              <a:rPr sz="1100" b="0" dirty="0" err="1">
+                <a:solidFill>
+                  <a:srgbClr val="595959"/>
+                </a:solidFill>
+                <a:latin typeface="맑은 고딕"/>
+              </a:rPr>
+              <a:t>말하지</a:t>
+            </a:r>
+            <a:r>
+              <a:rPr sz="1100" b="0" dirty="0">
+                <a:solidFill>
+                  <a:srgbClr val="595959"/>
+                </a:solidFill>
+                <a:latin typeface="맑은 고딕"/>
+              </a:rPr>
+              <a:t> </a:t>
+            </a:r>
+            <a:r>
+              <a:rPr sz="1100" b="0" dirty="0" err="1">
+                <a:solidFill>
+                  <a:srgbClr val="595959"/>
+                </a:solidFill>
+                <a:latin typeface="맑은 고딕"/>
+              </a:rPr>
+              <a:t>않는다</a:t>
+            </a:r>
+            <a:r>
+              <a:rPr sz="1100" b="0" dirty="0">
+                <a:solidFill>
+                  <a:srgbClr val="595959"/>
+                </a:solidFill>
+                <a:latin typeface="맑은 고딕"/>
+              </a:rPr>
+              <a:t>. </a:t>
+            </a:r>
+            <a:r>
+              <a:rPr sz="1100" b="0" dirty="0" err="1">
+                <a:solidFill>
+                  <a:srgbClr val="595959"/>
+                </a:solidFill>
+                <a:latin typeface="맑은 고딕"/>
+              </a:rPr>
+              <a:t>지시를</a:t>
+            </a:r>
+            <a:r>
+              <a:rPr sz="1100" b="0" dirty="0">
+                <a:solidFill>
+                  <a:srgbClr val="595959"/>
+                </a:solidFill>
+                <a:latin typeface="맑은 고딕"/>
+              </a:rPr>
+              <a:t> DB(_OD)에 </a:t>
+            </a:r>
+            <a:r>
+              <a:rPr sz="1100" b="0" dirty="0" err="1">
+                <a:solidFill>
+                  <a:srgbClr val="595959"/>
+                </a:solidFill>
+                <a:latin typeface="맑은 고딕"/>
+              </a:rPr>
+              <a:t>쓰면</a:t>
+            </a:r>
+            <a:r>
+              <a:rPr sz="1100" b="0" dirty="0">
+                <a:solidFill>
+                  <a:srgbClr val="595959"/>
+                </a:solidFill>
+                <a:latin typeface="맑은 고딕"/>
+              </a:rPr>
+              <a:t> </a:t>
+            </a:r>
+            <a:r>
+              <a:rPr sz="1100" b="0" dirty="0" err="1">
+                <a:solidFill>
+                  <a:srgbClr val="595959"/>
+                </a:solidFill>
+                <a:latin typeface="맑은 고딕"/>
+              </a:rPr>
+              <a:t>설비</a:t>
+            </a:r>
+            <a:r>
+              <a:rPr sz="1100" b="0" dirty="0">
+                <a:solidFill>
+                  <a:srgbClr val="595959"/>
+                </a:solidFill>
+                <a:latin typeface="맑은 고딕"/>
+              </a:rPr>
+              <a:t> </a:t>
+            </a:r>
+            <a:r>
+              <a:rPr sz="1100" b="0" dirty="0" err="1">
+                <a:solidFill>
+                  <a:srgbClr val="595959"/>
+                </a:solidFill>
+                <a:latin typeface="맑은 고딕"/>
+              </a:rPr>
+              <a:t>통신이</a:t>
+            </a:r>
+            <a:r>
+              <a:rPr sz="1100" b="0" dirty="0">
+                <a:solidFill>
+                  <a:srgbClr val="595959"/>
+                </a:solidFill>
+                <a:latin typeface="맑은 고딕"/>
+              </a:rPr>
+              <a:t> PLC 로 </a:t>
+            </a:r>
+            <a:r>
+              <a:rPr sz="1100" b="0" dirty="0" err="1">
+                <a:solidFill>
+                  <a:srgbClr val="595959"/>
+                </a:solidFill>
+                <a:latin typeface="맑은 고딕"/>
+              </a:rPr>
+              <a:t>전송한다</a:t>
+            </a:r>
+            <a:r>
+              <a:rPr sz="1100" b="0" dirty="0">
+                <a:solidFill>
+                  <a:srgbClr val="595959"/>
+                </a:solidFill>
+                <a:latin typeface="맑은 고딕"/>
+              </a:rPr>
+              <a:t>.</a:t>
             </a:r>
           </a:p>
           <a:p>
             <a:pPr algn="l"/>
             <a:r>
-              <a:rPr sz="1100" b="0">
-                <a:solidFill>
-                  <a:srgbClr val="595959"/>
-                </a:solidFill>
-                <a:latin typeface="맑은 고딕"/>
-              </a:rPr>
-              <a:t>· 설비가 올린 완료 신호는 설비 통신이 관측해 Ack 를 돌려주고 DB(_RD)에 남긴다. 스케줄러는 그 값과 화물 위치를 보고 상태를 올린다.</a:t>
+              <a:rPr sz="1100" b="0" dirty="0">
+                <a:solidFill>
+                  <a:srgbClr val="595959"/>
+                </a:solidFill>
+                <a:latin typeface="맑은 고딕"/>
+              </a:rPr>
+              <a:t>· </a:t>
+            </a:r>
+            <a:r>
+              <a:rPr sz="1100" b="0" dirty="0" err="1">
+                <a:solidFill>
+                  <a:srgbClr val="595959"/>
+                </a:solidFill>
+                <a:latin typeface="맑은 고딕"/>
+              </a:rPr>
+              <a:t>설비가</a:t>
+            </a:r>
+            <a:r>
+              <a:rPr sz="1100" b="0" dirty="0">
+                <a:solidFill>
+                  <a:srgbClr val="595959"/>
+                </a:solidFill>
+                <a:latin typeface="맑은 고딕"/>
+              </a:rPr>
+              <a:t> </a:t>
+            </a:r>
+            <a:r>
+              <a:rPr sz="1100" b="0" dirty="0" err="1">
+                <a:solidFill>
+                  <a:srgbClr val="595959"/>
+                </a:solidFill>
+                <a:latin typeface="맑은 고딕"/>
+              </a:rPr>
+              <a:t>올린</a:t>
+            </a:r>
+            <a:r>
+              <a:rPr sz="1100" b="0" dirty="0">
+                <a:solidFill>
+                  <a:srgbClr val="595959"/>
+                </a:solidFill>
+                <a:latin typeface="맑은 고딕"/>
+              </a:rPr>
+              <a:t> </a:t>
+            </a:r>
+            <a:r>
+              <a:rPr sz="1100" b="0" dirty="0" err="1">
+                <a:solidFill>
+                  <a:srgbClr val="595959"/>
+                </a:solidFill>
+                <a:latin typeface="맑은 고딕"/>
+              </a:rPr>
+              <a:t>완료</a:t>
+            </a:r>
+            <a:r>
+              <a:rPr sz="1100" b="0" dirty="0">
+                <a:solidFill>
+                  <a:srgbClr val="595959"/>
+                </a:solidFill>
+                <a:latin typeface="맑은 고딕"/>
+              </a:rPr>
+              <a:t> </a:t>
+            </a:r>
+            <a:r>
+              <a:rPr sz="1100" b="0" dirty="0" err="1">
+                <a:solidFill>
+                  <a:srgbClr val="595959"/>
+                </a:solidFill>
+                <a:latin typeface="맑은 고딕"/>
+              </a:rPr>
+              <a:t>신호는</a:t>
+            </a:r>
+            <a:r>
+              <a:rPr sz="1100" b="0" dirty="0">
+                <a:solidFill>
+                  <a:srgbClr val="595959"/>
+                </a:solidFill>
+                <a:latin typeface="맑은 고딕"/>
+              </a:rPr>
+              <a:t> </a:t>
+            </a:r>
+            <a:r>
+              <a:rPr sz="1100" b="0" dirty="0" err="1">
+                <a:solidFill>
+                  <a:srgbClr val="595959"/>
+                </a:solidFill>
+                <a:latin typeface="맑은 고딕"/>
+              </a:rPr>
+              <a:t>설비</a:t>
+            </a:r>
+            <a:r>
+              <a:rPr sz="1100" b="0" dirty="0">
+                <a:solidFill>
+                  <a:srgbClr val="595959"/>
+                </a:solidFill>
+                <a:latin typeface="맑은 고딕"/>
+              </a:rPr>
+              <a:t> </a:t>
+            </a:r>
+            <a:r>
+              <a:rPr sz="1100" b="0" dirty="0" err="1">
+                <a:solidFill>
+                  <a:srgbClr val="595959"/>
+                </a:solidFill>
+                <a:latin typeface="맑은 고딕"/>
+              </a:rPr>
+              <a:t>통신이</a:t>
+            </a:r>
+            <a:r>
+              <a:rPr sz="1100" b="0" dirty="0">
+                <a:solidFill>
+                  <a:srgbClr val="595959"/>
+                </a:solidFill>
+                <a:latin typeface="맑은 고딕"/>
+              </a:rPr>
+              <a:t> </a:t>
+            </a:r>
+            <a:r>
+              <a:rPr sz="1100" b="0" dirty="0" err="1">
+                <a:solidFill>
+                  <a:srgbClr val="595959"/>
+                </a:solidFill>
+                <a:latin typeface="맑은 고딕"/>
+              </a:rPr>
+              <a:t>관측해</a:t>
+            </a:r>
+            <a:r>
+              <a:rPr sz="1100" b="0" dirty="0">
+                <a:solidFill>
+                  <a:srgbClr val="595959"/>
+                </a:solidFill>
+                <a:latin typeface="맑은 고딕"/>
+              </a:rPr>
+              <a:t> Ack 를 </a:t>
+            </a:r>
+            <a:r>
+              <a:rPr sz="1100" b="0" dirty="0" err="1">
+                <a:solidFill>
+                  <a:srgbClr val="595959"/>
+                </a:solidFill>
+                <a:latin typeface="맑은 고딕"/>
+              </a:rPr>
+              <a:t>돌려주고</a:t>
+            </a:r>
+            <a:r>
+              <a:rPr sz="1100" b="0" dirty="0">
+                <a:solidFill>
+                  <a:srgbClr val="595959"/>
+                </a:solidFill>
+                <a:latin typeface="맑은 고딕"/>
+              </a:rPr>
+              <a:t> DB(_RD)에 </a:t>
+            </a:r>
+            <a:r>
+              <a:rPr sz="1100" b="0" dirty="0" err="1">
+                <a:solidFill>
+                  <a:srgbClr val="595959"/>
+                </a:solidFill>
+                <a:latin typeface="맑은 고딕"/>
+              </a:rPr>
+              <a:t>남긴다</a:t>
+            </a:r>
+            <a:r>
+              <a:rPr sz="1100" b="0" dirty="0">
+                <a:solidFill>
+                  <a:srgbClr val="595959"/>
+                </a:solidFill>
+                <a:latin typeface="맑은 고딕"/>
+              </a:rPr>
+              <a:t>. </a:t>
+            </a:r>
+            <a:r>
+              <a:rPr sz="1100" b="0" dirty="0" err="1">
+                <a:solidFill>
+                  <a:srgbClr val="595959"/>
+                </a:solidFill>
+                <a:latin typeface="맑은 고딕"/>
+              </a:rPr>
+              <a:t>스케줄러는</a:t>
+            </a:r>
+            <a:r>
+              <a:rPr sz="1100" b="0" dirty="0">
+                <a:solidFill>
+                  <a:srgbClr val="595959"/>
+                </a:solidFill>
+                <a:latin typeface="맑은 고딕"/>
+              </a:rPr>
+              <a:t> 그 </a:t>
+            </a:r>
+            <a:r>
+              <a:rPr sz="1100" b="0" dirty="0" err="1">
+                <a:solidFill>
+                  <a:srgbClr val="595959"/>
+                </a:solidFill>
+                <a:latin typeface="맑은 고딕"/>
+              </a:rPr>
+              <a:t>값과</a:t>
+            </a:r>
+            <a:r>
+              <a:rPr sz="1100" b="0" dirty="0">
+                <a:solidFill>
+                  <a:srgbClr val="595959"/>
+                </a:solidFill>
+                <a:latin typeface="맑은 고딕"/>
+              </a:rPr>
+              <a:t> </a:t>
+            </a:r>
+            <a:r>
+              <a:rPr sz="1100" b="0" dirty="0" err="1">
+                <a:solidFill>
+                  <a:srgbClr val="595959"/>
+                </a:solidFill>
+                <a:latin typeface="맑은 고딕"/>
+              </a:rPr>
+              <a:t>화물</a:t>
+            </a:r>
+            <a:r>
+              <a:rPr sz="1100" b="0" dirty="0">
+                <a:solidFill>
+                  <a:srgbClr val="595959"/>
+                </a:solidFill>
+                <a:latin typeface="맑은 고딕"/>
+              </a:rPr>
+              <a:t> </a:t>
+            </a:r>
+            <a:r>
+              <a:rPr sz="1100" b="0" dirty="0" err="1">
+                <a:solidFill>
+                  <a:srgbClr val="595959"/>
+                </a:solidFill>
+                <a:latin typeface="맑은 고딕"/>
+              </a:rPr>
+              <a:t>위치를</a:t>
+            </a:r>
+            <a:r>
+              <a:rPr sz="1100" b="0" dirty="0">
+                <a:solidFill>
+                  <a:srgbClr val="595959"/>
+                </a:solidFill>
+                <a:latin typeface="맑은 고딕"/>
+              </a:rPr>
+              <a:t> </a:t>
+            </a:r>
+            <a:r>
+              <a:rPr sz="1100" b="0" dirty="0" err="1">
+                <a:solidFill>
+                  <a:srgbClr val="595959"/>
+                </a:solidFill>
+                <a:latin typeface="맑은 고딕"/>
+              </a:rPr>
+              <a:t>보고</a:t>
+            </a:r>
+            <a:r>
+              <a:rPr sz="1100" b="0" dirty="0">
+                <a:solidFill>
+                  <a:srgbClr val="595959"/>
+                </a:solidFill>
+                <a:latin typeface="맑은 고딕"/>
+              </a:rPr>
+              <a:t> </a:t>
+            </a:r>
+            <a:r>
+              <a:rPr sz="1100" b="0" dirty="0" err="1">
+                <a:solidFill>
+                  <a:srgbClr val="595959"/>
+                </a:solidFill>
+                <a:latin typeface="맑은 고딕"/>
+              </a:rPr>
+              <a:t>상태를</a:t>
+            </a:r>
+            <a:r>
+              <a:rPr sz="1100" b="0" dirty="0">
+                <a:solidFill>
+                  <a:srgbClr val="595959"/>
+                </a:solidFill>
+                <a:latin typeface="맑은 고딕"/>
+              </a:rPr>
+              <a:t> </a:t>
+            </a:r>
+            <a:r>
+              <a:rPr sz="1100" b="0" dirty="0" err="1">
+                <a:solidFill>
+                  <a:srgbClr val="595959"/>
+                </a:solidFill>
+                <a:latin typeface="맑은 고딕"/>
+              </a:rPr>
+              <a:t>올린다</a:t>
+            </a:r>
+            <a:r>
+              <a:rPr sz="1100" b="0" dirty="0">
+                <a:solidFill>
+                  <a:srgbClr val="595959"/>
+                </a:solidFill>
+                <a:latin typeface="맑은 고딕"/>
+              </a:rPr>
+              <a:t>.</a:t>
             </a:r>
           </a:p>
           <a:p>
             <a:pPr algn="l"/>
             <a:r>
-              <a:rPr sz="1100" b="0">
-                <a:solidFill>
-                  <a:srgbClr val="595959"/>
-                </a:solidFill>
-                <a:latin typeface="맑은 고딕"/>
-              </a:rPr>
-              <a:t>· 입고는 크레인 완료 즉시 09(완료)가 되고, 상위 응답을 받으면 작업이 삭제된다. 응답이 없으면 RE_REPORT_09_SEC 간격으로 재보고한다.</a:t>
+              <a:rPr sz="1100" b="0" dirty="0">
+                <a:solidFill>
+                  <a:srgbClr val="595959"/>
+                </a:solidFill>
+                <a:latin typeface="맑은 고딕"/>
+              </a:rPr>
+              <a:t>· </a:t>
+            </a:r>
+            <a:r>
+              <a:rPr sz="1100" b="0" dirty="0" err="1">
+                <a:solidFill>
+                  <a:srgbClr val="595959"/>
+                </a:solidFill>
+                <a:latin typeface="맑은 고딕"/>
+              </a:rPr>
+              <a:t>입고는</a:t>
+            </a:r>
+            <a:r>
+              <a:rPr sz="1100" b="0" dirty="0">
+                <a:solidFill>
+                  <a:srgbClr val="595959"/>
+                </a:solidFill>
+                <a:latin typeface="맑은 고딕"/>
+              </a:rPr>
+              <a:t> </a:t>
+            </a:r>
+            <a:r>
+              <a:rPr sz="1100" b="0" dirty="0" err="1">
+                <a:solidFill>
+                  <a:srgbClr val="595959"/>
+                </a:solidFill>
+                <a:latin typeface="맑은 고딕"/>
+              </a:rPr>
+              <a:t>크레인</a:t>
+            </a:r>
+            <a:r>
+              <a:rPr sz="1100" b="0" dirty="0">
+                <a:solidFill>
+                  <a:srgbClr val="595959"/>
+                </a:solidFill>
+                <a:latin typeface="맑은 고딕"/>
+              </a:rPr>
+              <a:t> </a:t>
+            </a:r>
+            <a:r>
+              <a:rPr sz="1100" b="0" dirty="0" err="1">
+                <a:solidFill>
+                  <a:srgbClr val="595959"/>
+                </a:solidFill>
+                <a:latin typeface="맑은 고딕"/>
+              </a:rPr>
+              <a:t>완료</a:t>
+            </a:r>
+            <a:r>
+              <a:rPr sz="1100" b="0" dirty="0">
+                <a:solidFill>
+                  <a:srgbClr val="595959"/>
+                </a:solidFill>
+                <a:latin typeface="맑은 고딕"/>
+              </a:rPr>
+              <a:t> </a:t>
+            </a:r>
+            <a:r>
+              <a:rPr sz="1100" b="0" dirty="0" err="1">
+                <a:solidFill>
+                  <a:srgbClr val="595959"/>
+                </a:solidFill>
+                <a:latin typeface="맑은 고딕"/>
+              </a:rPr>
+              <a:t>즉시</a:t>
+            </a:r>
+            <a:r>
+              <a:rPr sz="1100" b="0" dirty="0">
+                <a:solidFill>
+                  <a:srgbClr val="595959"/>
+                </a:solidFill>
+                <a:latin typeface="맑은 고딕"/>
+              </a:rPr>
+              <a:t> 09(</a:t>
+            </a:r>
+            <a:r>
+              <a:rPr sz="1100" b="0" dirty="0" err="1">
+                <a:solidFill>
+                  <a:srgbClr val="595959"/>
+                </a:solidFill>
+                <a:latin typeface="맑은 고딕"/>
+              </a:rPr>
+              <a:t>완료</a:t>
+            </a:r>
+            <a:r>
+              <a:rPr sz="1100" b="0" dirty="0">
+                <a:solidFill>
+                  <a:srgbClr val="595959"/>
+                </a:solidFill>
+                <a:latin typeface="맑은 고딕"/>
+              </a:rPr>
+              <a:t>)가 </a:t>
+            </a:r>
+            <a:r>
+              <a:rPr sz="1100" b="0" dirty="0" err="1">
+                <a:solidFill>
+                  <a:srgbClr val="595959"/>
+                </a:solidFill>
+                <a:latin typeface="맑은 고딕"/>
+              </a:rPr>
+              <a:t>되고</a:t>
+            </a:r>
+            <a:r>
+              <a:rPr sz="1100" b="0" dirty="0">
+                <a:solidFill>
+                  <a:srgbClr val="595959"/>
+                </a:solidFill>
+                <a:latin typeface="맑은 고딕"/>
+              </a:rPr>
+              <a:t>, </a:t>
+            </a:r>
+            <a:r>
+              <a:rPr sz="1100" b="0" dirty="0" err="1">
+                <a:solidFill>
+                  <a:srgbClr val="595959"/>
+                </a:solidFill>
+                <a:latin typeface="맑은 고딕"/>
+              </a:rPr>
+              <a:t>상위</a:t>
+            </a:r>
+            <a:r>
+              <a:rPr sz="1100" b="0" dirty="0">
+                <a:solidFill>
+                  <a:srgbClr val="595959"/>
+                </a:solidFill>
+                <a:latin typeface="맑은 고딕"/>
+              </a:rPr>
+              <a:t> </a:t>
+            </a:r>
+            <a:r>
+              <a:rPr sz="1100" b="0" dirty="0" err="1">
+                <a:solidFill>
+                  <a:srgbClr val="595959"/>
+                </a:solidFill>
+                <a:latin typeface="맑은 고딕"/>
+              </a:rPr>
+              <a:t>응답을</a:t>
+            </a:r>
+            <a:r>
+              <a:rPr sz="1100" b="0" dirty="0">
+                <a:solidFill>
+                  <a:srgbClr val="595959"/>
+                </a:solidFill>
+                <a:latin typeface="맑은 고딕"/>
+              </a:rPr>
+              <a:t> </a:t>
+            </a:r>
+            <a:r>
+              <a:rPr sz="1100" b="0" dirty="0" err="1">
+                <a:solidFill>
+                  <a:srgbClr val="595959"/>
+                </a:solidFill>
+                <a:latin typeface="맑은 고딕"/>
+              </a:rPr>
+              <a:t>받으면</a:t>
+            </a:r>
+            <a:r>
+              <a:rPr sz="1100" b="0" dirty="0">
+                <a:solidFill>
+                  <a:srgbClr val="595959"/>
+                </a:solidFill>
+                <a:latin typeface="맑은 고딕"/>
+              </a:rPr>
+              <a:t> </a:t>
+            </a:r>
+            <a:r>
+              <a:rPr sz="1100" b="0" dirty="0" err="1">
+                <a:solidFill>
+                  <a:srgbClr val="595959"/>
+                </a:solidFill>
+                <a:latin typeface="맑은 고딕"/>
+              </a:rPr>
+              <a:t>작업이</a:t>
+            </a:r>
+            <a:r>
+              <a:rPr sz="1100" b="0" dirty="0">
+                <a:solidFill>
+                  <a:srgbClr val="595959"/>
+                </a:solidFill>
+                <a:latin typeface="맑은 고딕"/>
+              </a:rPr>
+              <a:t> </a:t>
+            </a:r>
+            <a:r>
+              <a:rPr sz="1100" b="0" dirty="0" err="1">
+                <a:solidFill>
+                  <a:srgbClr val="595959"/>
+                </a:solidFill>
+                <a:latin typeface="맑은 고딕"/>
+              </a:rPr>
+              <a:t>삭제된다</a:t>
+            </a:r>
+            <a:r>
+              <a:rPr sz="1100" b="0" dirty="0">
+                <a:solidFill>
+                  <a:srgbClr val="595959"/>
+                </a:solidFill>
+                <a:latin typeface="맑은 고딕"/>
+              </a:rPr>
+              <a:t>. </a:t>
+            </a:r>
+            <a:r>
+              <a:rPr sz="1100" b="0" dirty="0" err="1">
+                <a:solidFill>
+                  <a:srgbClr val="595959"/>
+                </a:solidFill>
+                <a:latin typeface="맑은 고딕"/>
+              </a:rPr>
+              <a:t>응답이</a:t>
+            </a:r>
+            <a:r>
+              <a:rPr sz="1100" b="0" dirty="0">
+                <a:solidFill>
+                  <a:srgbClr val="595959"/>
+                </a:solidFill>
+                <a:latin typeface="맑은 고딕"/>
+              </a:rPr>
+              <a:t> </a:t>
+            </a:r>
+            <a:r>
+              <a:rPr sz="1100" b="0" dirty="0" err="1">
+                <a:solidFill>
+                  <a:srgbClr val="595959"/>
+                </a:solidFill>
+                <a:latin typeface="맑은 고딕"/>
+              </a:rPr>
+              <a:t>없으면</a:t>
+            </a:r>
+            <a:r>
+              <a:rPr sz="1100" b="0" dirty="0">
+                <a:solidFill>
+                  <a:srgbClr val="595959"/>
+                </a:solidFill>
+                <a:latin typeface="맑은 고딕"/>
+              </a:rPr>
+              <a:t> RE_REPORT_09_SEC </a:t>
+            </a:r>
+            <a:r>
+              <a:rPr sz="1100" b="0" dirty="0" err="1">
+                <a:solidFill>
+                  <a:srgbClr val="595959"/>
+                </a:solidFill>
+                <a:latin typeface="맑은 고딕"/>
+              </a:rPr>
+              <a:t>간격으로</a:t>
+            </a:r>
+            <a:r>
+              <a:rPr sz="1100" b="0" dirty="0">
+                <a:solidFill>
+                  <a:srgbClr val="595959"/>
+                </a:solidFill>
+                <a:latin typeface="맑은 고딕"/>
+              </a:rPr>
+              <a:t> </a:t>
+            </a:r>
+            <a:r>
+              <a:rPr sz="1100" b="0" dirty="0" err="1">
+                <a:solidFill>
+                  <a:srgbClr val="595959"/>
+                </a:solidFill>
+                <a:latin typeface="맑은 고딕"/>
+              </a:rPr>
+              <a:t>재보고한다</a:t>
+            </a:r>
+            <a:r>
+              <a:rPr sz="1100" b="0" dirty="0">
+                <a:solidFill>
+                  <a:srgbClr val="595959"/>
+                </a:solidFill>
+                <a:latin typeface="맑은 고딕"/>
+              </a:rPr>
+              <a:t>.</a:t>
             </a:r>
           </a:p>
         </p:txBody>
@@ -10674,7 +14007,7 @@
           </a:fontRef>
         </p:style>
         <p:txBody>
-          <a:bodyPr rtlCol="0" anchor="ctr" wrap="square" lIns="36576" rIns="36576" tIns="0" bIns="0"/>
+          <a:bodyPr wrap="square" lIns="36576" tIns="0" rIns="36576" bIns="0" rtlCol="0" anchor="ctr"/>
           <a:lstStyle/>
           <a:p>
             <a:pPr algn="ctr"/>
@@ -10777,7 +14110,7 @@
           </a:fontRef>
         </p:style>
         <p:txBody>
-          <a:bodyPr rtlCol="0" anchor="ctr" wrap="square" lIns="36576" rIns="36576" tIns="0" bIns="0"/>
+          <a:bodyPr wrap="square" lIns="36576" tIns="0" rIns="36576" bIns="0" rtlCol="0" anchor="ctr"/>
           <a:lstStyle/>
           <a:p>
             <a:pPr algn="ctr"/>
@@ -10880,7 +14213,7 @@
           </a:fontRef>
         </p:style>
         <p:txBody>
-          <a:bodyPr rtlCol="0" anchor="ctr" wrap="square" lIns="36576" rIns="36576" tIns="0" bIns="0"/>
+          <a:bodyPr wrap="square" lIns="36576" tIns="0" rIns="36576" bIns="0" rtlCol="0" anchor="ctr"/>
           <a:lstStyle/>
           <a:p>
             <a:pPr algn="ctr"/>
@@ -10983,7 +14316,7 @@
           </a:fontRef>
         </p:style>
         <p:txBody>
-          <a:bodyPr rtlCol="0" anchor="ctr" wrap="square" lIns="36576" rIns="36576" tIns="0" bIns="0"/>
+          <a:bodyPr wrap="square" lIns="36576" tIns="0" rIns="36576" bIns="0" rtlCol="0" anchor="ctr"/>
           <a:lstStyle/>
           <a:p>
             <a:pPr algn="ctr"/>
@@ -11086,7 +14419,7 @@
           </a:fontRef>
         </p:style>
         <p:txBody>
-          <a:bodyPr rtlCol="0" anchor="ctr" wrap="square" lIns="36576" rIns="36576" tIns="0" bIns="0"/>
+          <a:bodyPr wrap="square" lIns="36576" tIns="0" rIns="36576" bIns="0" rtlCol="0" anchor="ctr"/>
           <a:lstStyle/>
           <a:p>
             <a:pPr algn="ctr"/>
@@ -11153,7 +14486,7 @@
           </a:fontRef>
         </p:style>
         <p:txBody>
-          <a:bodyPr rtlCol="0" anchor="ctr" wrap="square" lIns="36576" rIns="36576" tIns="0" bIns="0"/>
+          <a:bodyPr wrap="square" lIns="36576" tIns="0" rIns="36576" bIns="0" rtlCol="0" anchor="ctr"/>
           <a:lstStyle/>
           <a:p>
             <a:pPr algn="ctr"/>
@@ -11256,7 +14589,7 @@
           </a:fontRef>
         </p:style>
         <p:txBody>
-          <a:bodyPr rtlCol="0" anchor="ctr" wrap="square" lIns="36576" rIns="36576" tIns="0" bIns="0"/>
+          <a:bodyPr wrap="square" lIns="36576" tIns="0" rIns="36576" bIns="0" rtlCol="0" anchor="ctr"/>
           <a:lstStyle/>
           <a:p>
             <a:pPr algn="ctr"/>
@@ -11347,7 +14680,7 @@
           </a:fontRef>
         </p:style>
         <p:txBody>
-          <a:bodyPr rtlCol="0" anchor="ctr" wrap="square" lIns="36576" rIns="36576" tIns="0" bIns="0"/>
+          <a:bodyPr wrap="square" lIns="36576" tIns="0" rIns="36576" bIns="0" rtlCol="0" anchor="ctr"/>
           <a:lstStyle/>
           <a:p>
             <a:pPr algn="ctr"/>
@@ -11414,7 +14747,7 @@
           </a:fontRef>
         </p:style>
         <p:txBody>
-          <a:bodyPr rtlCol="0" anchor="ctr" wrap="square" lIns="36576" rIns="36576" tIns="0" bIns="0"/>
+          <a:bodyPr wrap="square" lIns="36576" tIns="0" rIns="36576" bIns="0" rtlCol="0" anchor="ctr"/>
           <a:lstStyle/>
           <a:p>
             <a:pPr algn="ctr"/>
@@ -11505,7 +14838,7 @@
           </a:fontRef>
         </p:style>
         <p:txBody>
-          <a:bodyPr rtlCol="0" anchor="ctr" wrap="square" lIns="36576" rIns="36576" tIns="0" bIns="0"/>
+          <a:bodyPr wrap="square" lIns="36576" tIns="0" rIns="36576" bIns="0" rtlCol="0" anchor="ctr"/>
           <a:lstStyle/>
           <a:p>
             <a:pPr algn="ctr"/>
@@ -11608,7 +14941,7 @@
           </a:fontRef>
         </p:style>
         <p:txBody>
-          <a:bodyPr rtlCol="0" anchor="ctr" wrap="square" lIns="36576" rIns="36576" tIns="0" bIns="0"/>
+          <a:bodyPr wrap="square" lIns="36576" tIns="0" rIns="36576" bIns="0" rtlCol="0" anchor="ctr"/>
           <a:lstStyle/>
           <a:p>
             <a:pPr algn="ctr"/>
@@ -11675,7 +15008,7 @@
           </a:fontRef>
         </p:style>
         <p:txBody>
-          <a:bodyPr rtlCol="0" anchor="ctr" wrap="square" lIns="36576" rIns="36576" tIns="0" bIns="0"/>
+          <a:bodyPr wrap="square" lIns="36576" tIns="0" rIns="36576" bIns="0" rtlCol="0" anchor="ctr"/>
           <a:lstStyle/>
           <a:p>
             <a:pPr algn="ctr"/>
@@ -11778,7 +15111,7 @@
           </a:fontRef>
         </p:style>
         <p:txBody>
-          <a:bodyPr rtlCol="0" anchor="ctr" wrap="square" lIns="36576" rIns="36576" tIns="0" bIns="0"/>
+          <a:bodyPr wrap="square" lIns="36576" tIns="0" rIns="36576" bIns="0" rtlCol="0" anchor="ctr"/>
           <a:lstStyle/>
           <a:p>
             <a:pPr algn="ctr"/>
@@ -11869,7 +15202,7 @@
           </a:fontRef>
         </p:style>
         <p:txBody>
-          <a:bodyPr rtlCol="0" anchor="ctr" wrap="square" lIns="36576" rIns="36576" tIns="0" bIns="0"/>
+          <a:bodyPr wrap="square" lIns="36576" tIns="0" rIns="36576" bIns="0" rtlCol="0" anchor="ctr"/>
           <a:lstStyle/>
           <a:p>
             <a:pPr algn="ctr"/>
@@ -11936,7 +15269,7 @@
           </a:fontRef>
         </p:style>
         <p:txBody>
-          <a:bodyPr rtlCol="0" anchor="ctr" wrap="square" lIns="36576" rIns="36576" tIns="0" bIns="0"/>
+          <a:bodyPr wrap="square" lIns="36576" tIns="0" rIns="36576" bIns="0" rtlCol="0" anchor="ctr"/>
           <a:lstStyle/>
           <a:p>
             <a:pPr algn="ctr"/>
@@ -12027,7 +15360,7 @@
           </a:fontRef>
         </p:style>
         <p:txBody>
-          <a:bodyPr rtlCol="0" anchor="ctr" wrap="square" lIns="36576" rIns="36576" tIns="0" bIns="0"/>
+          <a:bodyPr wrap="square" lIns="36576" tIns="0" rIns="36576" bIns="0" rtlCol="0" anchor="ctr"/>
           <a:lstStyle/>
           <a:p>
             <a:pPr algn="ctr"/>
@@ -12118,7 +15451,7 @@
           </a:fontRef>
         </p:style>
         <p:txBody>
-          <a:bodyPr rtlCol="0" anchor="ctr" wrap="square" lIns="36576" rIns="36576" tIns="0" bIns="0"/>
+          <a:bodyPr wrap="square" lIns="36576" tIns="0" rIns="36576" bIns="0" rtlCol="0" anchor="ctr"/>
           <a:lstStyle/>
           <a:p>
             <a:pPr algn="ctr"/>
@@ -12209,7 +15542,7 @@
           </a:fontRef>
         </p:style>
         <p:txBody>
-          <a:bodyPr rtlCol="0" anchor="ctr" wrap="square" lIns="36576" rIns="36576" tIns="0" bIns="0"/>
+          <a:bodyPr wrap="square" lIns="36576" tIns="0" rIns="36576" bIns="0" rtlCol="0" anchor="ctr"/>
           <a:lstStyle/>
           <a:p>
             <a:pPr algn="ctr"/>
@@ -12300,7 +15633,7 @@
           </a:fontRef>
         </p:style>
         <p:txBody>
-          <a:bodyPr rtlCol="0" anchor="ctr" wrap="square" lIns="36576" rIns="36576" tIns="0" bIns="0"/>
+          <a:bodyPr wrap="square" lIns="36576" tIns="0" rIns="36576" bIns="0" rtlCol="0" anchor="ctr"/>
           <a:lstStyle/>
           <a:p>
             <a:pPr algn="ctr"/>
@@ -12355,7 +15688,7 @@
           </a:fontRef>
         </p:style>
         <p:txBody>
-          <a:bodyPr rtlCol="0" anchor="ctr" wrap="square" lIns="36576" rIns="36576" tIns="0" bIns="0"/>
+          <a:bodyPr wrap="square" lIns="36576" tIns="0" rIns="36576" bIns="0" rtlCol="0" anchor="ctr"/>
           <a:lstStyle/>
           <a:p>
             <a:pPr algn="ctr"/>
@@ -12460,7 +15793,7 @@
           <a:noFill/>
         </p:spPr>
         <p:txBody>
-          <a:bodyPr wrap="square" anchor="t" lIns="36576" rIns="36576" tIns="0" bIns="0">
+          <a:bodyPr wrap="square" lIns="36576" tIns="0" rIns="36576" bIns="0" anchor="t">
             <a:spAutoFit/>
           </a:bodyPr>
           <a:lstStyle/>
@@ -12495,7 +15828,7 @@
           <a:noFill/>
         </p:spPr>
         <p:txBody>
-          <a:bodyPr wrap="square" anchor="t" lIns="36576" rIns="36576" tIns="0" bIns="0">
+          <a:bodyPr wrap="square" lIns="36576" tIns="0" rIns="36576" bIns="0" anchor="t">
             <a:spAutoFit/>
           </a:bodyPr>
           <a:lstStyle/>
@@ -12509,6 +15842,80 @@
                 <a:latin typeface="맑은 고딕"/>
               </a:rPr>
               <a:t>5</a:t>
+            </a:r>
+          </a:p>
+        </p:txBody>
+      </p:sp>
+      <p:sp>
+        <p:nvSpPr>
+          <p:cNvPr id="53" name="Rounded Rectangle 52"/>
+          <p:cNvSpPr/>
+          <p:nvPr/>
+        </p:nvSpPr>
+        <p:spPr>
+          <a:xfrm>
+            <a:off x="365760" y="1965960"/>
+            <a:ext cx="68580" cy="2212848"/>
+          </a:xfrm>
+          <a:prstGeom prst="roundRect">
+            <a:avLst/>
+          </a:prstGeom>
+          <a:solidFill>
+            <a:srgbClr val="1E4E8C"/>
+          </a:solidFill>
+          <a:ln>
+            <a:noFill/>
+          </a:ln>
+          <a:effectLst/>
+        </p:spPr>
+        <p:style>
+          <a:lnRef idx="1">
+            <a:schemeClr val="accent1"/>
+          </a:lnRef>
+          <a:fillRef idx="3">
+            <a:schemeClr val="accent1"/>
+          </a:fillRef>
+          <a:effectRef idx="2">
+            <a:schemeClr val="accent1"/>
+          </a:effectRef>
+          <a:fontRef idx="minor">
+            <a:schemeClr val="lt1"/>
+          </a:fontRef>
+        </p:style>
+        <p:txBody>
+          <a:bodyPr rtlCol="0" anchor="ctr" wrap="square"/>
+          <a:lstStyle/>
+          <a:p>
+            <a:pPr algn="ctr"/>
+            <a:r>
+              <a:rPr sz="800" b="1">
+                <a:solidFill>
+                  <a:srgbClr val="FFFFFF"/>
+                </a:solidFill>
+              </a:rPr>
+              <a:t>E</a:t>
+            </a:r>
+          </a:p>
+          <a:p>
+            <a:pPr algn="ctr"/>
+            <a:r>
+              <a:rPr sz="800" b="1">
+                <a:solidFill>
+                  <a:srgbClr val="FFFFFF"/>
+                </a:solidFill>
+              </a:rPr>
+              <a:t>C</a:t>
+            </a:r>
+          </a:p>
+          <a:p>
+            <a:pPr algn="ctr"/>
+            <a:r>
+              <a:rPr sz="800" b="1">
+                <a:solidFill>
+                  <a:srgbClr val="FFFFFF"/>
+                </a:solidFill>
+              </a:rPr>
+              <a:t>S</a:t>
             </a:r>
           </a:p>
         </p:txBody>
@@ -12522,7 +15929,7 @@
 </file>
 
 <file path=ppt/slides/slide6.xml><?xml version="1.0" encoding="utf-8"?>
-<p:sld xmlns:a="http://schemas.openxmlformats.org/drawingml/2006/main" xmlns:p="http://schemas.openxmlformats.org/presentationml/2006/main" xmlns:r="http://schemas.openxmlformats.org/officeDocument/2006/relationships">
+<p:sld xmlns:a="http://schemas.openxmlformats.org/drawingml/2006/main" xmlns:r="http://schemas.openxmlformats.org/officeDocument/2006/relationships" xmlns:p="http://schemas.openxmlformats.org/presentationml/2006/main">
   <p:cSld>
     <p:spTree>
       <p:nvGrpSpPr>
@@ -12530,7 +15937,14 @@
         <p:cNvGrpSpPr/>
         <p:nvPr/>
       </p:nvGrpSpPr>
-      <p:grpSpPr/>
+      <p:grpSpPr>
+        <a:xfrm>
+          <a:off x="0" y="0"/>
+          <a:ext cx="0" cy="0"/>
+          <a:chOff x="0" y="0"/>
+          <a:chExt cx="0" cy="0"/>
+        </a:xfrm>
+      </p:grpSpPr>
       <p:sp>
         <p:nvSpPr>
           <p:cNvPr id="2" name="TextBox 1"/>
@@ -12548,7 +15962,7 @@
           <a:noFill/>
         </p:spPr>
         <p:txBody>
-          <a:bodyPr wrap="square" anchor="ctr" lIns="36576" rIns="36576" tIns="0" bIns="0">
+          <a:bodyPr wrap="square" lIns="36576" tIns="0" rIns="36576" bIns="0" anchor="ctr">
             <a:spAutoFit/>
           </a:bodyPr>
           <a:lstStyle/>
@@ -12583,7 +15997,7 @@
           <a:noFill/>
         </p:spPr>
         <p:txBody>
-          <a:bodyPr wrap="square" anchor="t" lIns="36576" rIns="36576" tIns="0" bIns="0">
+          <a:bodyPr wrap="square" lIns="36576" tIns="0" rIns="36576" bIns="0" anchor="t">
             <a:spAutoFit/>
           </a:bodyPr>
           <a:lstStyle/>
@@ -12640,7 +16054,7 @@
           </a:fontRef>
         </p:style>
         <p:txBody>
-          <a:bodyPr rtlCol="0" anchor="ctr" wrap="square" lIns="36576" rIns="36576" tIns="0" bIns="0"/>
+          <a:bodyPr wrap="square" lIns="36576" tIns="0" rIns="36576" bIns="0" rtlCol="0" anchor="ctr"/>
           <a:lstStyle/>
           <a:p>
             <a:pPr algn="ctr"/>
@@ -12673,7 +16087,7 @@
           <a:noFill/>
         </p:spPr>
         <p:txBody>
-          <a:bodyPr wrap="square" anchor="t" lIns="36576" rIns="36576" tIns="0" bIns="0">
+          <a:bodyPr wrap="square" lIns="36576" tIns="0" rIns="36576" bIns="0" anchor="t">
             <a:spAutoFit/>
           </a:bodyPr>
           <a:lstStyle/>
@@ -12766,7 +16180,7 @@
           </a:fontRef>
         </p:style>
         <p:txBody>
-          <a:bodyPr rtlCol="0" anchor="ctr" wrap="square" lIns="36576" rIns="36576" tIns="0" bIns="0"/>
+          <a:bodyPr wrap="square" lIns="36576" tIns="0" rIns="36576" bIns="0" rtlCol="0" anchor="ctr"/>
           <a:lstStyle/>
           <a:p>
             <a:pPr algn="ctr"/>
@@ -12799,7 +16213,7 @@
           <a:noFill/>
         </p:spPr>
         <p:txBody>
-          <a:bodyPr wrap="square" anchor="t" lIns="36576" rIns="36576" tIns="0" bIns="0">
+          <a:bodyPr wrap="square" lIns="36576" tIns="0" rIns="36576" bIns="0" anchor="t">
             <a:spAutoFit/>
           </a:bodyPr>
           <a:lstStyle/>
@@ -12892,7 +16306,7 @@
           </a:fontRef>
         </p:style>
         <p:txBody>
-          <a:bodyPr rtlCol="0" anchor="ctr" wrap="square" lIns="36576" rIns="36576" tIns="0" bIns="0"/>
+          <a:bodyPr wrap="square" lIns="36576" tIns="0" rIns="36576" bIns="0" rtlCol="0" anchor="ctr"/>
           <a:lstStyle/>
           <a:p>
             <a:pPr algn="ctr"/>
@@ -12937,7 +16351,7 @@
           <a:noFill/>
         </p:spPr>
         <p:txBody>
-          <a:bodyPr wrap="square" anchor="t" lIns="36576" rIns="36576" tIns="0" bIns="0">
+          <a:bodyPr wrap="square" lIns="36576" tIns="0" rIns="36576" bIns="0" anchor="t">
             <a:spAutoFit/>
           </a:bodyPr>
           <a:lstStyle/>
@@ -13030,7 +16444,7 @@
           </a:fontRef>
         </p:style>
         <p:txBody>
-          <a:bodyPr rtlCol="0" anchor="ctr" wrap="square" lIns="36576" rIns="36576" tIns="0" bIns="0"/>
+          <a:bodyPr wrap="square" lIns="36576" tIns="0" rIns="36576" bIns="0" rtlCol="0" anchor="ctr"/>
           <a:lstStyle/>
           <a:p>
             <a:pPr algn="ctr"/>
@@ -13063,7 +16477,7 @@
           <a:noFill/>
         </p:spPr>
         <p:txBody>
-          <a:bodyPr wrap="square" anchor="t" lIns="36576" rIns="36576" tIns="0" bIns="0">
+          <a:bodyPr wrap="square" lIns="36576" tIns="0" rIns="36576" bIns="0" anchor="t">
             <a:spAutoFit/>
           </a:bodyPr>
           <a:lstStyle/>
@@ -13156,7 +16570,7 @@
           </a:fontRef>
         </p:style>
         <p:txBody>
-          <a:bodyPr rtlCol="0" anchor="ctr" wrap="square" lIns="36576" rIns="36576" tIns="0" bIns="0"/>
+          <a:bodyPr wrap="square" lIns="36576" tIns="0" rIns="36576" bIns="0" rtlCol="0" anchor="ctr"/>
           <a:lstStyle/>
           <a:p>
             <a:pPr algn="ctr"/>
@@ -13201,7 +16615,7 @@
           <a:noFill/>
         </p:spPr>
         <p:txBody>
-          <a:bodyPr wrap="square" anchor="t" lIns="36576" rIns="36576" tIns="0" bIns="0">
+          <a:bodyPr wrap="square" lIns="36576" tIns="0" rIns="36576" bIns="0" anchor="t">
             <a:spAutoFit/>
           </a:bodyPr>
           <a:lstStyle/>
@@ -13294,7 +16708,7 @@
           </a:fontRef>
         </p:style>
         <p:txBody>
-          <a:bodyPr rtlCol="0" anchor="ctr" wrap="square" lIns="36576" rIns="36576" tIns="0" bIns="0"/>
+          <a:bodyPr wrap="square" lIns="36576" tIns="0" rIns="36576" bIns="0" rtlCol="0" anchor="ctr"/>
           <a:lstStyle/>
           <a:p>
             <a:pPr algn="ctr"/>
@@ -13327,7 +16741,7 @@
           <a:noFill/>
         </p:spPr>
         <p:txBody>
-          <a:bodyPr wrap="square" anchor="t" lIns="36576" rIns="36576" tIns="0" bIns="0">
+          <a:bodyPr wrap="square" lIns="36576" tIns="0" rIns="36576" bIns="0" anchor="t">
             <a:spAutoFit/>
           </a:bodyPr>
           <a:lstStyle/>
@@ -13420,7 +16834,7 @@
           </a:fontRef>
         </p:style>
         <p:txBody>
-          <a:bodyPr rtlCol="0" anchor="ctr" wrap="square" lIns="36576" rIns="36576" tIns="0" bIns="0"/>
+          <a:bodyPr wrap="square" lIns="36576" tIns="0" rIns="36576" bIns="0" rtlCol="0" anchor="ctr"/>
           <a:lstStyle/>
           <a:p>
             <a:pPr algn="ctr"/>
@@ -13453,7 +16867,7 @@
           <a:noFill/>
         </p:spPr>
         <p:txBody>
-          <a:bodyPr wrap="square" anchor="t" lIns="36576" rIns="36576" tIns="0" bIns="0">
+          <a:bodyPr wrap="square" lIns="36576" tIns="0" rIns="36576" bIns="0" anchor="t">
             <a:spAutoFit/>
           </a:bodyPr>
           <a:lstStyle/>
@@ -13546,7 +16960,7 @@
           </a:fontRef>
         </p:style>
         <p:txBody>
-          <a:bodyPr rtlCol="0" anchor="ctr" wrap="square" lIns="36576" rIns="36576" tIns="0" bIns="0"/>
+          <a:bodyPr wrap="square" lIns="36576" tIns="0" rIns="36576" bIns="0" rtlCol="0" anchor="ctr"/>
           <a:lstStyle/>
           <a:p>
             <a:pPr algn="ctr"/>
@@ -13579,7 +16993,7 @@
           <a:noFill/>
         </p:spPr>
         <p:txBody>
-          <a:bodyPr wrap="square" anchor="t" lIns="36576" rIns="36576" tIns="0" bIns="0">
+          <a:bodyPr wrap="square" lIns="36576" tIns="0" rIns="36576" bIns="0" anchor="t">
             <a:spAutoFit/>
           </a:bodyPr>
           <a:lstStyle/>
@@ -13614,7 +17028,7 @@
           <a:noFill/>
         </p:spPr>
         <p:txBody>
-          <a:bodyPr wrap="square" anchor="t" lIns="36576" rIns="36576" tIns="0" bIns="0">
+          <a:bodyPr wrap="square" lIns="36576" tIns="0" rIns="36576" bIns="0" anchor="t">
             <a:spAutoFit/>
           </a:bodyPr>
           <a:lstStyle/>
@@ -13649,7 +17063,7 @@
           <a:noFill/>
         </p:spPr>
         <p:txBody>
-          <a:bodyPr wrap="square" anchor="t" lIns="36576" rIns="36576" tIns="0" bIns="0">
+          <a:bodyPr wrap="square" lIns="36576" tIns="0" rIns="36576" bIns="0" anchor="t">
             <a:spAutoFit/>
           </a:bodyPr>
           <a:lstStyle/>
@@ -13684,7 +17098,7 @@
           <a:noFill/>
         </p:spPr>
         <p:txBody>
-          <a:bodyPr wrap="square" anchor="t" lIns="36576" rIns="36576" tIns="0" bIns="0">
+          <a:bodyPr wrap="square" lIns="36576" tIns="0" rIns="36576" bIns="0" anchor="t">
             <a:spAutoFit/>
           </a:bodyPr>
           <a:lstStyle/>
@@ -13719,7 +17133,7 @@
           <a:noFill/>
         </p:spPr>
         <p:txBody>
-          <a:bodyPr wrap="square" anchor="t" lIns="36576" rIns="36576" tIns="0" bIns="0">
+          <a:bodyPr wrap="square" lIns="36576" tIns="0" rIns="36576" bIns="0" anchor="t">
             <a:spAutoFit/>
           </a:bodyPr>
           <a:lstStyle/>
@@ -13776,7 +17190,7 @@
           </a:fontRef>
         </p:style>
         <p:txBody>
-          <a:bodyPr rtlCol="0" anchor="ctr" wrap="square" lIns="36576" rIns="36576" tIns="0" bIns="0"/>
+          <a:bodyPr wrap="square" lIns="36576" tIns="0" rIns="36576" bIns="0" rtlCol="0" anchor="ctr"/>
           <a:lstStyle/>
           <a:p>
             <a:pPr algn="ctr"/>
@@ -13845,7 +17259,7 @@
           <a:noFill/>
         </p:spPr>
         <p:txBody>
-          <a:bodyPr wrap="square" anchor="t" lIns="36576" rIns="36576" tIns="0" bIns="0">
+          <a:bodyPr wrap="square" lIns="36576" tIns="0" rIns="36576" bIns="0" anchor="t">
             <a:spAutoFit/>
           </a:bodyPr>
           <a:lstStyle/>
@@ -13880,7 +17294,7 @@
           <a:noFill/>
         </p:spPr>
         <p:txBody>
-          <a:bodyPr wrap="square" anchor="t" lIns="36576" rIns="36576" tIns="0" bIns="0">
+          <a:bodyPr wrap="square" lIns="36576" tIns="0" rIns="36576" bIns="0" anchor="t">
             <a:spAutoFit/>
           </a:bodyPr>
           <a:lstStyle/>
@@ -13915,7 +17329,7 @@
           <a:noFill/>
         </p:spPr>
         <p:txBody>
-          <a:bodyPr wrap="square" anchor="t" lIns="36576" rIns="36576" tIns="0" bIns="0">
+          <a:bodyPr wrap="square" lIns="36576" tIns="0" rIns="36576" bIns="0" anchor="t">
             <a:spAutoFit/>
           </a:bodyPr>
           <a:lstStyle/>
@@ -13950,7 +17364,7 @@
           <a:noFill/>
         </p:spPr>
         <p:txBody>
-          <a:bodyPr wrap="square" anchor="t" lIns="36576" rIns="36576" tIns="0" bIns="0">
+          <a:bodyPr wrap="square" lIns="36576" tIns="0" rIns="36576" bIns="0" anchor="t">
             <a:spAutoFit/>
           </a:bodyPr>
           <a:lstStyle/>
@@ -13985,7 +17399,7 @@
           <a:noFill/>
         </p:spPr>
         <p:txBody>
-          <a:bodyPr wrap="square" anchor="t" lIns="36576" rIns="36576" tIns="0" bIns="0">
+          <a:bodyPr wrap="square" lIns="36576" tIns="0" rIns="36576" bIns="0" anchor="t">
             <a:spAutoFit/>
           </a:bodyPr>
           <a:lstStyle/>
@@ -14020,7 +17434,7 @@
           <a:noFill/>
         </p:spPr>
         <p:txBody>
-          <a:bodyPr wrap="square" anchor="t" lIns="36576" rIns="36576" tIns="0" bIns="0">
+          <a:bodyPr wrap="square" lIns="36576" tIns="0" rIns="36576" bIns="0" anchor="t">
             <a:spAutoFit/>
           </a:bodyPr>
           <a:lstStyle/>
@@ -14055,7 +17469,7 @@
           <a:noFill/>
         </p:spPr>
         <p:txBody>
-          <a:bodyPr wrap="square" anchor="t" lIns="36576" rIns="36576" tIns="0" bIns="0">
+          <a:bodyPr wrap="square" lIns="36576" tIns="0" rIns="36576" bIns="0" anchor="t">
             <a:spAutoFit/>
           </a:bodyPr>
           <a:lstStyle/>
@@ -14090,7 +17504,7 @@
           <a:noFill/>
         </p:spPr>
         <p:txBody>
-          <a:bodyPr wrap="square" anchor="t" lIns="36576" rIns="36576" tIns="0" bIns="0">
+          <a:bodyPr wrap="square" lIns="36576" tIns="0" rIns="36576" bIns="0" anchor="t">
             <a:spAutoFit/>
           </a:bodyPr>
           <a:lstStyle/>
@@ -14117,7 +17531,7 @@
 </file>
 
 <file path=ppt/slides/slide7.xml><?xml version="1.0" encoding="utf-8"?>
-<p:sld xmlns:a="http://schemas.openxmlformats.org/drawingml/2006/main" xmlns:p="http://schemas.openxmlformats.org/presentationml/2006/main" xmlns:r="http://schemas.openxmlformats.org/officeDocument/2006/relationships">
+<p:sld xmlns:a="http://schemas.openxmlformats.org/drawingml/2006/main" xmlns:r="http://schemas.openxmlformats.org/officeDocument/2006/relationships" xmlns:p="http://schemas.openxmlformats.org/presentationml/2006/main">
   <p:cSld>
     <p:spTree>
       <p:nvGrpSpPr>
@@ -14125,7 +17539,14 @@
         <p:cNvGrpSpPr/>
         <p:nvPr/>
       </p:nvGrpSpPr>
-      <p:grpSpPr/>
+      <p:grpSpPr>
+        <a:xfrm>
+          <a:off x="0" y="0"/>
+          <a:ext cx="0" cy="0"/>
+          <a:chOff x="0" y="0"/>
+          <a:chExt cx="0" cy="0"/>
+        </a:xfrm>
+      </p:grpSpPr>
       <p:sp>
         <p:nvSpPr>
           <p:cNvPr id="2" name="TextBox 1"/>
@@ -14143,7 +17564,7 @@
           <a:noFill/>
         </p:spPr>
         <p:txBody>
-          <a:bodyPr wrap="square" anchor="ctr" lIns="36576" rIns="36576" tIns="0" bIns="0">
+          <a:bodyPr wrap="square" lIns="36576" tIns="0" rIns="36576" bIns="0" anchor="ctr">
             <a:spAutoFit/>
           </a:bodyPr>
           <a:lstStyle/>
@@ -14178,7 +17599,7 @@
           <a:noFill/>
         </p:spPr>
         <p:txBody>
-          <a:bodyPr wrap="square" anchor="t" lIns="36576" rIns="36576" tIns="0" bIns="0">
+          <a:bodyPr wrap="square" lIns="36576" tIns="0" rIns="36576" bIns="0" anchor="t">
             <a:spAutoFit/>
           </a:bodyPr>
           <a:lstStyle/>
@@ -14211,11 +17632,11 @@
             <a:avLst/>
           </a:prstGeom>
           <a:solidFill>
-            <a:srgbClr val="EEF1F7"/>
+            <a:srgbClr val="EFE9E1"/>
           </a:solidFill>
           <a:ln w="9525">
             <a:solidFill>
-              <a:srgbClr val="B6BFD0"/>
+              <a:srgbClr val="B0A69A"/>
             </a:solidFill>
           </a:ln>
           <a:effectLst/>
@@ -14237,7 +17658,9 @@
         <p:txBody>
           <a:bodyPr rtlCol="0" anchor="ctr"/>
           <a:lstStyle/>
-          <a:p/>
+          <a:p>
+            <a:endParaRPr/>
+          </a:p>
         </p:txBody>
       </p:sp>
       <p:sp>
@@ -14257,7 +17680,7 @@
           <a:noFill/>
         </p:spPr>
         <p:txBody>
-          <a:bodyPr wrap="square" anchor="t" lIns="36576" rIns="36576" tIns="0" bIns="0">
+          <a:bodyPr wrap="square" lIns="36576" tIns="0" rIns="36576" bIns="0" anchor="t">
             <a:spAutoFit/>
           </a:bodyPr>
           <a:lstStyle/>
@@ -14270,7 +17693,7 @@
                 </a:solidFill>
                 <a:latin typeface="맑은 고딕"/>
               </a:rPr>
-              <a:t>WMS / IMS</a:t>
+              <a:t>WMS / IMS   (외부 시스템)</a:t>
             </a:r>
           </a:p>
         </p:txBody>
@@ -14290,11 +17713,11 @@
             <a:avLst/>
           </a:prstGeom>
           <a:solidFill>
-            <a:srgbClr val="EEF1F7"/>
+            <a:srgbClr val="E3EDFA"/>
           </a:solidFill>
-          <a:ln w="9525">
+          <a:ln w="15875">
             <a:solidFill>
-              <a:srgbClr val="B6BFD0"/>
+              <a:srgbClr val="2E5C9E"/>
             </a:solidFill>
           </a:ln>
           <a:effectLst/>
@@ -14316,7 +17739,9 @@
         <p:txBody>
           <a:bodyPr rtlCol="0" anchor="ctr"/>
           <a:lstStyle/>
-          <a:p/>
+          <a:p>
+            <a:endParaRPr/>
+          </a:p>
         </p:txBody>
       </p:sp>
       <p:sp>
@@ -14336,7 +17761,7 @@
           <a:noFill/>
         </p:spPr>
         <p:txBody>
-          <a:bodyPr wrap="square" anchor="t" lIns="36576" rIns="36576" tIns="0" bIns="0">
+          <a:bodyPr wrap="square" lIns="36576" tIns="0" rIns="36576" bIns="0" anchor="t">
             <a:spAutoFit/>
           </a:bodyPr>
           <a:lstStyle/>
@@ -14349,7 +17774,7 @@
                 </a:solidFill>
                 <a:latin typeface="맑은 고딕"/>
               </a:rPr>
-              <a:t>상위 통신</a:t>
+              <a:t>상위 통신   (ECS)</a:t>
             </a:r>
           </a:p>
         </p:txBody>
@@ -14369,11 +17794,11 @@
             <a:avLst/>
           </a:prstGeom>
           <a:solidFill>
-            <a:srgbClr val="EEF1F7"/>
+            <a:srgbClr val="E3EDFA"/>
           </a:solidFill>
-          <a:ln w="9525">
+          <a:ln w="15875">
             <a:solidFill>
-              <a:srgbClr val="B6BFD0"/>
+              <a:srgbClr val="2E5C9E"/>
             </a:solidFill>
           </a:ln>
           <a:effectLst/>
@@ -14395,7 +17820,9 @@
         <p:txBody>
           <a:bodyPr rtlCol="0" anchor="ctr"/>
           <a:lstStyle/>
-          <a:p/>
+          <a:p>
+            <a:endParaRPr/>
+          </a:p>
         </p:txBody>
       </p:sp>
       <p:sp>
@@ -14415,7 +17842,7 @@
           <a:noFill/>
         </p:spPr>
         <p:txBody>
-          <a:bodyPr wrap="square" anchor="t" lIns="36576" rIns="36576" tIns="0" bIns="0">
+          <a:bodyPr wrap="square" lIns="36576" tIns="0" rIns="36576" bIns="0" anchor="t">
             <a:spAutoFit/>
           </a:bodyPr>
           <a:lstStyle/>
@@ -14428,7 +17855,7 @@
                 </a:solidFill>
                 <a:latin typeface="맑은 고딕"/>
               </a:rPr>
-              <a:t>스케줄러</a:t>
+              <a:t>스케줄러   (ECS)</a:t>
             </a:r>
           </a:p>
         </p:txBody>
@@ -14448,11 +17875,11 @@
             <a:avLst/>
           </a:prstGeom>
           <a:solidFill>
-            <a:srgbClr val="EEF1F7"/>
+            <a:srgbClr val="E3EDFA"/>
           </a:solidFill>
-          <a:ln w="9525">
+          <a:ln w="15875">
             <a:solidFill>
-              <a:srgbClr val="B6BFD0"/>
+              <a:srgbClr val="2E5C9E"/>
             </a:solidFill>
           </a:ln>
           <a:effectLst/>
@@ -14474,7 +17901,9 @@
         <p:txBody>
           <a:bodyPr rtlCol="0" anchor="ctr"/>
           <a:lstStyle/>
-          <a:p/>
+          <a:p>
+            <a:endParaRPr/>
+          </a:p>
         </p:txBody>
       </p:sp>
       <p:sp>
@@ -14494,7 +17923,7 @@
           <a:noFill/>
         </p:spPr>
         <p:txBody>
-          <a:bodyPr wrap="square" anchor="t" lIns="36576" rIns="36576" tIns="0" bIns="0">
+          <a:bodyPr wrap="square" lIns="36576" tIns="0" rIns="36576" bIns="0" anchor="t">
             <a:spAutoFit/>
           </a:bodyPr>
           <a:lstStyle/>
@@ -14507,7 +17936,7 @@
                 </a:solidFill>
                 <a:latin typeface="맑은 고딕"/>
               </a:rPr>
-              <a:t>설비 통신</a:t>
+              <a:t>설비 통신   (ECS)</a:t>
             </a:r>
           </a:p>
         </p:txBody>
@@ -14527,11 +17956,11 @@
             <a:avLst/>
           </a:prstGeom>
           <a:solidFill>
-            <a:srgbClr val="EEF1F7"/>
+            <a:srgbClr val="EFE9E1"/>
           </a:solidFill>
           <a:ln w="9525">
             <a:solidFill>
-              <a:srgbClr val="B6BFD0"/>
+              <a:srgbClr val="B0A69A"/>
             </a:solidFill>
           </a:ln>
           <a:effectLst/>
@@ -14553,7 +17982,9 @@
         <p:txBody>
           <a:bodyPr rtlCol="0" anchor="ctr"/>
           <a:lstStyle/>
-          <a:p/>
+          <a:p>
+            <a:endParaRPr/>
+          </a:p>
         </p:txBody>
       </p:sp>
       <p:sp>
@@ -14573,7 +18004,7 @@
           <a:noFill/>
         </p:spPr>
         <p:txBody>
-          <a:bodyPr wrap="square" anchor="t" lIns="36576" rIns="36576" tIns="0" bIns="0">
+          <a:bodyPr wrap="square" lIns="36576" tIns="0" rIns="36576" bIns="0" anchor="t">
             <a:spAutoFit/>
           </a:bodyPr>
           <a:lstStyle/>
@@ -14586,7 +18017,7 @@
                 </a:solidFill>
                 <a:latin typeface="맑은 고딕"/>
               </a:rPr>
-              <a:t>설비 / PLC</a:t>
+              <a:t>설비 / PLC   (외부 설비)</a:t>
             </a:r>
           </a:p>
         </p:txBody>
@@ -14608,7 +18039,7 @@
           <a:noFill/>
         </p:spPr>
         <p:txBody>
-          <a:bodyPr wrap="square" anchor="t" lIns="36576" rIns="36576" tIns="0" bIns="0">
+          <a:bodyPr wrap="square" lIns="36576" tIns="0" rIns="36576" bIns="0" anchor="t">
             <a:spAutoFit/>
           </a:bodyPr>
           <a:lstStyle/>
@@ -14689,7 +18120,7 @@
           </a:fontRef>
         </p:style>
         <p:txBody>
-          <a:bodyPr rtlCol="0" anchor="ctr" wrap="square" lIns="36576" rIns="36576" tIns="0" bIns="0"/>
+          <a:bodyPr wrap="square" lIns="36576" tIns="0" rIns="36576" bIns="0" rtlCol="0" anchor="ctr"/>
           <a:lstStyle/>
           <a:p>
             <a:pPr algn="ctr"/>
@@ -14792,7 +18223,7 @@
           </a:fontRef>
         </p:style>
         <p:txBody>
-          <a:bodyPr rtlCol="0" anchor="ctr" wrap="square" lIns="36576" rIns="36576" tIns="0" bIns="0"/>
+          <a:bodyPr wrap="square" lIns="36576" tIns="0" rIns="36576" bIns="0" rtlCol="0" anchor="ctr"/>
           <a:lstStyle/>
           <a:p>
             <a:pPr algn="ctr"/>
@@ -14895,7 +18326,7 @@
           </a:fontRef>
         </p:style>
         <p:txBody>
-          <a:bodyPr rtlCol="0" anchor="ctr" wrap="square" lIns="36576" rIns="36576" tIns="0" bIns="0"/>
+          <a:bodyPr wrap="square" lIns="36576" tIns="0" rIns="36576" bIns="0" rtlCol="0" anchor="ctr"/>
           <a:lstStyle/>
           <a:p>
             <a:pPr algn="ctr"/>
@@ -14998,7 +18429,7 @@
           </a:fontRef>
         </p:style>
         <p:txBody>
-          <a:bodyPr rtlCol="0" anchor="ctr" wrap="square" lIns="36576" rIns="36576" tIns="0" bIns="0"/>
+          <a:bodyPr wrap="square" lIns="36576" tIns="0" rIns="36576" bIns="0" rtlCol="0" anchor="ctr"/>
           <a:lstStyle/>
           <a:p>
             <a:pPr algn="ctr"/>
@@ -15089,7 +18520,7 @@
           </a:fontRef>
         </p:style>
         <p:txBody>
-          <a:bodyPr rtlCol="0" anchor="ctr" wrap="square" lIns="36576" rIns="36576" tIns="0" bIns="0"/>
+          <a:bodyPr wrap="square" lIns="36576" tIns="0" rIns="36576" bIns="0" rtlCol="0" anchor="ctr"/>
           <a:lstStyle/>
           <a:p>
             <a:pPr algn="ctr"/>
@@ -15156,7 +18587,7 @@
           </a:fontRef>
         </p:style>
         <p:txBody>
-          <a:bodyPr rtlCol="0" anchor="ctr" wrap="square" lIns="36576" rIns="36576" tIns="0" bIns="0"/>
+          <a:bodyPr wrap="square" lIns="36576" tIns="0" rIns="36576" bIns="0" rtlCol="0" anchor="ctr"/>
           <a:lstStyle/>
           <a:p>
             <a:pPr algn="ctr"/>
@@ -15247,7 +18678,7 @@
           </a:fontRef>
         </p:style>
         <p:txBody>
-          <a:bodyPr rtlCol="0" anchor="ctr" wrap="square" lIns="36576" rIns="36576" tIns="0" bIns="0"/>
+          <a:bodyPr wrap="square" lIns="36576" tIns="0" rIns="36576" bIns="0" rtlCol="0" anchor="ctr"/>
           <a:lstStyle/>
           <a:p>
             <a:pPr algn="ctr"/>
@@ -15338,7 +18769,7 @@
           </a:fontRef>
         </p:style>
         <p:txBody>
-          <a:bodyPr rtlCol="0" anchor="ctr" wrap="square" lIns="36576" rIns="36576" tIns="0" bIns="0"/>
+          <a:bodyPr wrap="square" lIns="36576" tIns="0" rIns="36576" bIns="0" rtlCol="0" anchor="ctr"/>
           <a:lstStyle/>
           <a:p>
             <a:pPr algn="ctr"/>
@@ -15429,7 +18860,7 @@
           </a:fontRef>
         </p:style>
         <p:txBody>
-          <a:bodyPr rtlCol="0" anchor="ctr" wrap="square" lIns="36576" rIns="36576" tIns="0" bIns="0"/>
+          <a:bodyPr wrap="square" lIns="36576" tIns="0" rIns="36576" bIns="0" rtlCol="0" anchor="ctr"/>
           <a:lstStyle/>
           <a:p>
             <a:pPr algn="ctr"/>
@@ -15484,7 +18915,7 @@
           </a:fontRef>
         </p:style>
         <p:txBody>
-          <a:bodyPr rtlCol="0" anchor="ctr" wrap="square" lIns="36576" rIns="36576" tIns="0" bIns="0"/>
+          <a:bodyPr wrap="square" lIns="36576" tIns="0" rIns="36576" bIns="0" rtlCol="0" anchor="ctr"/>
           <a:lstStyle/>
           <a:p>
             <a:pPr algn="ctr"/>
@@ -15587,7 +19018,7 @@
           </a:fontRef>
         </p:style>
         <p:txBody>
-          <a:bodyPr rtlCol="0" anchor="ctr" wrap="square" lIns="36576" rIns="36576" tIns="0" bIns="0"/>
+          <a:bodyPr wrap="square" lIns="36576" tIns="0" rIns="36576" bIns="0" rtlCol="0" anchor="ctr"/>
           <a:lstStyle/>
           <a:p>
             <a:pPr algn="ctr"/>
@@ -15678,7 +19109,7 @@
           </a:fontRef>
         </p:style>
         <p:txBody>
-          <a:bodyPr rtlCol="0" anchor="ctr" wrap="square" lIns="36576" rIns="36576" tIns="0" bIns="0"/>
+          <a:bodyPr wrap="square" lIns="36576" tIns="0" rIns="36576" bIns="0" rtlCol="0" anchor="ctr"/>
           <a:lstStyle/>
           <a:p>
             <a:pPr algn="ctr"/>
@@ -15745,7 +19176,7 @@
           </a:fontRef>
         </p:style>
         <p:txBody>
-          <a:bodyPr rtlCol="0" anchor="ctr" wrap="square" lIns="36576" rIns="36576" tIns="0" bIns="0"/>
+          <a:bodyPr wrap="square" lIns="36576" tIns="0" rIns="36576" bIns="0" rtlCol="0" anchor="ctr"/>
           <a:lstStyle/>
           <a:p>
             <a:pPr algn="ctr"/>
@@ -15836,7 +19267,7 @@
           </a:fontRef>
         </p:style>
         <p:txBody>
-          <a:bodyPr rtlCol="0" anchor="ctr" wrap="square" lIns="36576" rIns="36576" tIns="0" bIns="0"/>
+          <a:bodyPr wrap="square" lIns="36576" tIns="0" rIns="36576" bIns="0" rtlCol="0" anchor="ctr"/>
           <a:lstStyle/>
           <a:p>
             <a:pPr algn="ctr"/>
@@ -15927,7 +19358,7 @@
           </a:fontRef>
         </p:style>
         <p:txBody>
-          <a:bodyPr rtlCol="0" anchor="ctr" wrap="square" lIns="36576" rIns="36576" tIns="0" bIns="0"/>
+          <a:bodyPr wrap="square" lIns="36576" tIns="0" rIns="36576" bIns="0" rtlCol="0" anchor="ctr"/>
           <a:lstStyle/>
           <a:p>
             <a:pPr algn="ctr"/>
@@ -15982,7 +19413,7 @@
           </a:fontRef>
         </p:style>
         <p:txBody>
-          <a:bodyPr rtlCol="0" anchor="ctr" wrap="square" lIns="36576" rIns="36576" tIns="0" bIns="0"/>
+          <a:bodyPr wrap="square" lIns="36576" tIns="0" rIns="36576" bIns="0" rtlCol="0" anchor="ctr"/>
           <a:lstStyle/>
           <a:p>
             <a:pPr algn="ctr"/>
@@ -16085,7 +19516,7 @@
           </a:fontRef>
         </p:style>
         <p:txBody>
-          <a:bodyPr rtlCol="0" anchor="ctr" wrap="square" lIns="36576" rIns="36576" tIns="0" bIns="0"/>
+          <a:bodyPr wrap="square" lIns="36576" tIns="0" rIns="36576" bIns="0" rtlCol="0" anchor="ctr"/>
           <a:lstStyle/>
           <a:p>
             <a:pPr algn="ctr"/>
@@ -16176,7 +19607,7 @@
           </a:fontRef>
         </p:style>
         <p:txBody>
-          <a:bodyPr rtlCol="0" anchor="ctr" wrap="square" lIns="36576" rIns="36576" tIns="0" bIns="0"/>
+          <a:bodyPr wrap="square" lIns="36576" tIns="0" rIns="36576" bIns="0" rtlCol="0" anchor="ctr"/>
           <a:lstStyle/>
           <a:p>
             <a:pPr algn="ctr"/>
@@ -16267,7 +19698,7 @@
           </a:fontRef>
         </p:style>
         <p:txBody>
-          <a:bodyPr rtlCol="0" anchor="ctr" wrap="square" lIns="36576" rIns="36576" tIns="0" bIns="0"/>
+          <a:bodyPr wrap="square" lIns="36576" tIns="0" rIns="36576" bIns="0" rtlCol="0" anchor="ctr"/>
           <a:lstStyle/>
           <a:p>
             <a:pPr algn="ctr"/>
@@ -16358,7 +19789,7 @@
           </a:fontRef>
         </p:style>
         <p:txBody>
-          <a:bodyPr rtlCol="0" anchor="ctr" wrap="square" lIns="36576" rIns="36576" tIns="0" bIns="0"/>
+          <a:bodyPr wrap="square" lIns="36576" tIns="0" rIns="36576" bIns="0" rtlCol="0" anchor="ctr"/>
           <a:lstStyle/>
           <a:p>
             <a:pPr algn="ctr"/>
@@ -16413,7 +19844,7 @@
           </a:fontRef>
         </p:style>
         <p:txBody>
-          <a:bodyPr rtlCol="0" anchor="ctr" wrap="square" lIns="36576" rIns="36576" tIns="0" bIns="0"/>
+          <a:bodyPr wrap="square" lIns="36576" tIns="0" rIns="36576" bIns="0" rtlCol="0" anchor="ctr"/>
           <a:lstStyle/>
           <a:p>
             <a:pPr algn="ctr"/>
@@ -16518,7 +19949,7 @@
           <a:noFill/>
         </p:spPr>
         <p:txBody>
-          <a:bodyPr wrap="square" anchor="t" lIns="36576" rIns="36576" tIns="0" bIns="0">
+          <a:bodyPr wrap="square" lIns="36576" tIns="0" rIns="36576" bIns="0" anchor="t">
             <a:spAutoFit/>
           </a:bodyPr>
           <a:lstStyle/>
@@ -16553,7 +19984,7 @@
           <a:noFill/>
         </p:spPr>
         <p:txBody>
-          <a:bodyPr wrap="square" anchor="t" lIns="36576" rIns="36576" tIns="0" bIns="0">
+          <a:bodyPr wrap="square" lIns="36576" tIns="0" rIns="36576" bIns="0" anchor="t">
             <a:spAutoFit/>
           </a:bodyPr>
           <a:lstStyle/>
@@ -16567,6 +19998,80 @@
                 <a:latin typeface="맑은 고딕"/>
               </a:rPr>
               <a:t>7</a:t>
+            </a:r>
+          </a:p>
+        </p:txBody>
+      </p:sp>
+      <p:sp>
+        <p:nvSpPr>
+          <p:cNvPr id="55" name="Rounded Rectangle 54"/>
+          <p:cNvSpPr/>
+          <p:nvPr/>
+        </p:nvSpPr>
+        <p:spPr>
+          <a:xfrm>
+            <a:off x="365760" y="1965960"/>
+            <a:ext cx="68580" cy="2212848"/>
+          </a:xfrm>
+          <a:prstGeom prst="roundRect">
+            <a:avLst/>
+          </a:prstGeom>
+          <a:solidFill>
+            <a:srgbClr val="1E4E8C"/>
+          </a:solidFill>
+          <a:ln>
+            <a:noFill/>
+          </a:ln>
+          <a:effectLst/>
+        </p:spPr>
+        <p:style>
+          <a:lnRef idx="1">
+            <a:schemeClr val="accent1"/>
+          </a:lnRef>
+          <a:fillRef idx="3">
+            <a:schemeClr val="accent1"/>
+          </a:fillRef>
+          <a:effectRef idx="2">
+            <a:schemeClr val="accent1"/>
+          </a:effectRef>
+          <a:fontRef idx="minor">
+            <a:schemeClr val="lt1"/>
+          </a:fontRef>
+        </p:style>
+        <p:txBody>
+          <a:bodyPr rtlCol="0" anchor="ctr" wrap="square"/>
+          <a:lstStyle/>
+          <a:p>
+            <a:pPr algn="ctr"/>
+            <a:r>
+              <a:rPr sz="800" b="1">
+                <a:solidFill>
+                  <a:srgbClr val="FFFFFF"/>
+                </a:solidFill>
+              </a:rPr>
+              <a:t>E</a:t>
+            </a:r>
+          </a:p>
+          <a:p>
+            <a:pPr algn="ctr"/>
+            <a:r>
+              <a:rPr sz="800" b="1">
+                <a:solidFill>
+                  <a:srgbClr val="FFFFFF"/>
+                </a:solidFill>
+              </a:rPr>
+              <a:t>C</a:t>
+            </a:r>
+          </a:p>
+          <a:p>
+            <a:pPr algn="ctr"/>
+            <a:r>
+              <a:rPr sz="800" b="1">
+                <a:solidFill>
+                  <a:srgbClr val="FFFFFF"/>
+                </a:solidFill>
+              </a:rPr>
+              <a:t>S</a:t>
             </a:r>
           </a:p>
         </p:txBody>
@@ -16580,7 +20085,7 @@
 </file>
 
 <file path=ppt/slides/slide8.xml><?xml version="1.0" encoding="utf-8"?>
-<p:sld xmlns:a="http://schemas.openxmlformats.org/drawingml/2006/main" xmlns:p="http://schemas.openxmlformats.org/presentationml/2006/main" xmlns:r="http://schemas.openxmlformats.org/officeDocument/2006/relationships">
+<p:sld xmlns:a="http://schemas.openxmlformats.org/drawingml/2006/main" xmlns:r="http://schemas.openxmlformats.org/officeDocument/2006/relationships" xmlns:p="http://schemas.openxmlformats.org/presentationml/2006/main">
   <p:cSld>
     <p:spTree>
       <p:nvGrpSpPr>
@@ -16588,7 +20093,14 @@
         <p:cNvGrpSpPr/>
         <p:nvPr/>
       </p:nvGrpSpPr>
-      <p:grpSpPr/>
+      <p:grpSpPr>
+        <a:xfrm>
+          <a:off x="0" y="0"/>
+          <a:ext cx="0" cy="0"/>
+          <a:chOff x="0" y="0"/>
+          <a:chExt cx="0" cy="0"/>
+        </a:xfrm>
+      </p:grpSpPr>
       <p:sp>
         <p:nvSpPr>
           <p:cNvPr id="2" name="TextBox 1"/>
@@ -16606,7 +20118,7 @@
           <a:noFill/>
         </p:spPr>
         <p:txBody>
-          <a:bodyPr wrap="square" anchor="ctr" lIns="36576" rIns="36576" tIns="0" bIns="0">
+          <a:bodyPr wrap="square" lIns="36576" tIns="0" rIns="36576" bIns="0" anchor="ctr">
             <a:spAutoFit/>
           </a:bodyPr>
           <a:lstStyle/>
@@ -16641,7 +20153,7 @@
           <a:noFill/>
         </p:spPr>
         <p:txBody>
-          <a:bodyPr wrap="square" anchor="t" lIns="36576" rIns="36576" tIns="0" bIns="0">
+          <a:bodyPr wrap="square" lIns="36576" tIns="0" rIns="36576" bIns="0" anchor="t">
             <a:spAutoFit/>
           </a:bodyPr>
           <a:lstStyle/>
@@ -16676,7 +20188,7 @@
           <a:noFill/>
         </p:spPr>
         <p:txBody>
-          <a:bodyPr wrap="square" anchor="t" lIns="36576" rIns="36576" tIns="0" bIns="0">
+          <a:bodyPr wrap="square" lIns="36576" tIns="0" rIns="36576" bIns="0" anchor="t">
             <a:spAutoFit/>
           </a:bodyPr>
           <a:lstStyle/>
@@ -16733,7 +20245,7 @@
           </a:fontRef>
         </p:style>
         <p:txBody>
-          <a:bodyPr rtlCol="0" anchor="ctr" wrap="square" lIns="36576" rIns="36576" tIns="0" bIns="0"/>
+          <a:bodyPr wrap="square" lIns="36576" tIns="0" rIns="36576" bIns="0" rtlCol="0" anchor="ctr"/>
           <a:lstStyle/>
           <a:p>
             <a:pPr algn="ctr"/>
@@ -16802,7 +20314,7 @@
           <a:noFill/>
         </p:spPr>
         <p:txBody>
-          <a:bodyPr wrap="square" anchor="t" lIns="36576" rIns="36576" tIns="0" bIns="0">
+          <a:bodyPr wrap="square" lIns="36576" tIns="0" rIns="36576" bIns="0" anchor="t">
             <a:spAutoFit/>
           </a:bodyPr>
           <a:lstStyle/>
@@ -16895,7 +20407,7 @@
           </a:fontRef>
         </p:style>
         <p:txBody>
-          <a:bodyPr rtlCol="0" anchor="ctr" wrap="square" lIns="36576" rIns="36576" tIns="0" bIns="0"/>
+          <a:bodyPr wrap="square" lIns="36576" tIns="0" rIns="36576" bIns="0" rtlCol="0" anchor="ctr"/>
           <a:lstStyle/>
           <a:p>
             <a:pPr algn="ctr"/>
@@ -16976,7 +20488,7 @@
           <a:noFill/>
         </p:spPr>
         <p:txBody>
-          <a:bodyPr wrap="square" anchor="t" lIns="36576" rIns="36576" tIns="0" bIns="0">
+          <a:bodyPr wrap="square" lIns="36576" tIns="0" rIns="36576" bIns="0" anchor="t">
             <a:spAutoFit/>
           </a:bodyPr>
           <a:lstStyle/>
@@ -17069,7 +20581,7 @@
           </a:fontRef>
         </p:style>
         <p:txBody>
-          <a:bodyPr rtlCol="0" anchor="ctr" wrap="square" lIns="36576" rIns="36576" tIns="0" bIns="0"/>
+          <a:bodyPr wrap="square" lIns="36576" tIns="0" rIns="36576" bIns="0" rtlCol="0" anchor="ctr"/>
           <a:lstStyle/>
           <a:p>
             <a:pPr algn="ctr"/>
@@ -17160,7 +20672,7 @@
           </a:fontRef>
         </p:style>
         <p:txBody>
-          <a:bodyPr rtlCol="0" anchor="ctr" wrap="square" lIns="36576" rIns="36576" tIns="0" bIns="0"/>
+          <a:bodyPr wrap="square" lIns="36576" tIns="0" rIns="36576" bIns="0" rtlCol="0" anchor="ctr"/>
           <a:lstStyle/>
           <a:p>
             <a:pPr algn="ctr"/>
@@ -17263,7 +20775,7 @@
           </a:fontRef>
         </p:style>
         <p:txBody>
-          <a:bodyPr rtlCol="0" anchor="ctr" wrap="square" lIns="36576" rIns="36576" tIns="0" bIns="0"/>
+          <a:bodyPr wrap="square" lIns="36576" tIns="0" rIns="36576" bIns="0" rtlCol="0" anchor="ctr"/>
           <a:lstStyle/>
           <a:p>
             <a:pPr algn="ctr"/>
@@ -17354,7 +20866,7 @@
           </a:fontRef>
         </p:style>
         <p:txBody>
-          <a:bodyPr rtlCol="0" anchor="ctr" wrap="square" lIns="36576" rIns="36576" tIns="0" bIns="0"/>
+          <a:bodyPr wrap="square" lIns="36576" tIns="0" rIns="36576" bIns="0" rtlCol="0" anchor="ctr"/>
           <a:lstStyle/>
           <a:p>
             <a:pPr algn="ctr"/>
@@ -17399,7 +20911,7 @@
           <a:noFill/>
         </p:spPr>
         <p:txBody>
-          <a:bodyPr wrap="square" anchor="t" lIns="36576" rIns="36576" tIns="0" bIns="0">
+          <a:bodyPr wrap="square" lIns="36576" tIns="0" rIns="36576" bIns="0" anchor="t">
             <a:spAutoFit/>
           </a:bodyPr>
           <a:lstStyle/>
@@ -17434,7 +20946,7 @@
           <a:noFill/>
         </p:spPr>
         <p:txBody>
-          <a:bodyPr wrap="square" anchor="t" lIns="36576" rIns="36576" tIns="0" bIns="0">
+          <a:bodyPr wrap="square" lIns="36576" tIns="0" rIns="36576" bIns="0" anchor="t">
             <a:spAutoFit/>
           </a:bodyPr>
           <a:lstStyle/>
@@ -17491,7 +21003,7 @@
           </a:fontRef>
         </p:style>
         <p:txBody>
-          <a:bodyPr rtlCol="0" anchor="ctr" wrap="square" lIns="36576" rIns="36576" tIns="0" bIns="0"/>
+          <a:bodyPr wrap="square" lIns="36576" tIns="0" rIns="36576" bIns="0" rtlCol="0" anchor="ctr"/>
           <a:lstStyle/>
           <a:p>
             <a:pPr algn="ctr"/>
@@ -17560,7 +21072,7 @@
           <a:noFill/>
         </p:spPr>
         <p:txBody>
-          <a:bodyPr wrap="square" anchor="t" lIns="36576" rIns="36576" tIns="0" bIns="0">
+          <a:bodyPr wrap="square" lIns="36576" tIns="0" rIns="36576" bIns="0" anchor="t">
             <a:spAutoFit/>
           </a:bodyPr>
           <a:lstStyle/>
@@ -17653,7 +21165,7 @@
           </a:fontRef>
         </p:style>
         <p:txBody>
-          <a:bodyPr rtlCol="0" anchor="ctr" wrap="square" lIns="36576" rIns="36576" tIns="0" bIns="0"/>
+          <a:bodyPr wrap="square" lIns="36576" tIns="0" rIns="36576" bIns="0" rtlCol="0" anchor="ctr"/>
           <a:lstStyle/>
           <a:p>
             <a:pPr algn="ctr"/>
@@ -17734,7 +21246,7 @@
           <a:noFill/>
         </p:spPr>
         <p:txBody>
-          <a:bodyPr wrap="square" anchor="t" lIns="36576" rIns="36576" tIns="0" bIns="0">
+          <a:bodyPr wrap="square" lIns="36576" tIns="0" rIns="36576" bIns="0" anchor="t">
             <a:spAutoFit/>
           </a:bodyPr>
           <a:lstStyle/>
@@ -17827,7 +21339,7 @@
           </a:fontRef>
         </p:style>
         <p:txBody>
-          <a:bodyPr rtlCol="0" anchor="ctr" wrap="square" lIns="36576" rIns="36576" tIns="0" bIns="0"/>
+          <a:bodyPr wrap="square" lIns="36576" tIns="0" rIns="36576" bIns="0" rtlCol="0" anchor="ctr"/>
           <a:lstStyle/>
           <a:p>
             <a:pPr algn="ctr"/>
@@ -17918,7 +21430,7 @@
           </a:fontRef>
         </p:style>
         <p:txBody>
-          <a:bodyPr rtlCol="0" anchor="ctr" wrap="square" lIns="36576" rIns="36576" tIns="0" bIns="0"/>
+          <a:bodyPr wrap="square" lIns="36576" tIns="0" rIns="36576" bIns="0" rtlCol="0" anchor="ctr"/>
           <a:lstStyle/>
           <a:p>
             <a:pPr algn="ctr"/>
@@ -18021,7 +21533,7 @@
           </a:fontRef>
         </p:style>
         <p:txBody>
-          <a:bodyPr rtlCol="0" anchor="ctr" wrap="square" lIns="36576" rIns="36576" tIns="0" bIns="0"/>
+          <a:bodyPr wrap="square" lIns="36576" tIns="0" rIns="36576" bIns="0" rtlCol="0" anchor="ctr"/>
           <a:lstStyle/>
           <a:p>
             <a:pPr algn="ctr"/>
@@ -18112,7 +21624,7 @@
           </a:fontRef>
         </p:style>
         <p:txBody>
-          <a:bodyPr rtlCol="0" anchor="ctr" wrap="square" lIns="36576" rIns="36576" tIns="0" bIns="0"/>
+          <a:bodyPr wrap="square" lIns="36576" tIns="0" rIns="36576" bIns="0" rtlCol="0" anchor="ctr"/>
           <a:lstStyle/>
           <a:p>
             <a:pPr algn="ctr"/>
@@ -18157,7 +21669,7 @@
           <a:noFill/>
         </p:spPr>
         <p:txBody>
-          <a:bodyPr wrap="square" anchor="t" lIns="36576" rIns="36576" tIns="0" bIns="0">
+          <a:bodyPr wrap="square" lIns="36576" tIns="0" rIns="36576" bIns="0" anchor="t">
             <a:spAutoFit/>
           </a:bodyPr>
           <a:lstStyle/>
@@ -18192,7 +21704,7 @@
           <a:noFill/>
         </p:spPr>
         <p:txBody>
-          <a:bodyPr wrap="square" anchor="t" lIns="36576" rIns="36576" tIns="0" bIns="0">
+          <a:bodyPr wrap="square" lIns="36576" tIns="0" rIns="36576" bIns="0" anchor="t">
             <a:spAutoFit/>
           </a:bodyPr>
           <a:lstStyle/>
@@ -18220,7 +21732,7 @@
         </p:nvGraphicFramePr>
         <p:xfrm>
           <a:off x="8092440" y="1389888"/>
-          <a:ext cx="3657600" cy="1097280"/>
+          <a:ext cx="3657600" cy="1248156"/>
         </p:xfrm>
         <a:graphic>
           <a:graphicData uri="http://schemas.openxmlformats.org/drawingml/2006/table">
@@ -18229,8 +21741,20 @@
                 <a:tableStyleId>{5C22544A-7EE6-4342-B048-85BDC9FD1C3A}</a:tableStyleId>
               </a:tblPr>
               <a:tblGrid>
-                <a:gridCol w="502920"/>
-                <a:gridCol w="3154680"/>
+                <a:gridCol w="502920">
+                  <a:extLst>
+                    <a:ext uri="{9D8B030D-6E8A-4147-A177-3AD203B41FA5}">
+                      <a16:colId xmlns:a16="http://schemas.microsoft.com/office/drawing/2014/main" val="20000"/>
+                    </a:ext>
+                  </a:extLst>
+                </a:gridCol>
+                <a:gridCol w="3154680">
+                  <a:extLst>
+                    <a:ext uri="{9D8B030D-6E8A-4147-A177-3AD203B41FA5}">
+                      <a16:colId xmlns:a16="http://schemas.microsoft.com/office/drawing/2014/main" val="20001"/>
+                    </a:ext>
+                  </a:extLst>
+                </a:gridCol>
               </a:tblGrid>
               <a:tr h="274320">
                 <a:tc>
@@ -18277,6 +21801,11 @@
                     </a:solidFill>
                   </a:tcPr>
                 </a:tc>
+                <a:extLst>
+                  <a:ext uri="{0D108BD9-81ED-4DB2-BD59-A6C34878D82A}">
+                    <a16:rowId xmlns:a16="http://schemas.microsoft.com/office/drawing/2014/main" val="10000"/>
+                  </a:ext>
+                </a:extLst>
               </a:tr>
               <a:tr h="274320">
                 <a:tc>
@@ -18323,6 +21852,11 @@
                     </a:solidFill>
                   </a:tcPr>
                 </a:tc>
+                <a:extLst>
+                  <a:ext uri="{0D108BD9-81ED-4DB2-BD59-A6C34878D82A}">
+                    <a16:rowId xmlns:a16="http://schemas.microsoft.com/office/drawing/2014/main" val="10001"/>
+                  </a:ext>
+                </a:extLst>
               </a:tr>
               <a:tr h="274320">
                 <a:tc>
@@ -18369,6 +21903,11 @@
                     </a:solidFill>
                   </a:tcPr>
                 </a:tc>
+                <a:extLst>
+                  <a:ext uri="{0D108BD9-81ED-4DB2-BD59-A6C34878D82A}">
+                    <a16:rowId xmlns:a16="http://schemas.microsoft.com/office/drawing/2014/main" val="10002"/>
+                  </a:ext>
+                </a:extLst>
               </a:tr>
               <a:tr h="274320">
                 <a:tc>
@@ -18415,6 +21954,11 @@
                     </a:solidFill>
                   </a:tcPr>
                 </a:tc>
+                <a:extLst>
+                  <a:ext uri="{0D108BD9-81ED-4DB2-BD59-A6C34878D82A}">
+                    <a16:rowId xmlns:a16="http://schemas.microsoft.com/office/drawing/2014/main" val="10003"/>
+                  </a:ext>
+                </a:extLst>
               </a:tr>
             </a:tbl>
           </a:graphicData>
@@ -18437,7 +21981,7 @@
           <a:noFill/>
         </p:spPr>
         <p:txBody>
-          <a:bodyPr wrap="square" anchor="t" lIns="36576" rIns="36576" tIns="0" bIns="0">
+          <a:bodyPr wrap="square" lIns="36576" tIns="0" rIns="36576" bIns="0" anchor="t">
             <a:spAutoFit/>
           </a:bodyPr>
           <a:lstStyle/>
@@ -18474,8 +22018,20 @@
                 <a:tableStyleId>{5C22544A-7EE6-4342-B048-85BDC9FD1C3A}</a:tableStyleId>
               </a:tblPr>
               <a:tblGrid>
-                <a:gridCol w="594360"/>
-                <a:gridCol w="3154680"/>
+                <a:gridCol w="594360">
+                  <a:extLst>
+                    <a:ext uri="{9D8B030D-6E8A-4147-A177-3AD203B41FA5}">
+                      <a16:colId xmlns:a16="http://schemas.microsoft.com/office/drawing/2014/main" val="20000"/>
+                    </a:ext>
+                  </a:extLst>
+                </a:gridCol>
+                <a:gridCol w="3154680">
+                  <a:extLst>
+                    <a:ext uri="{9D8B030D-6E8A-4147-A177-3AD203B41FA5}">
+                      <a16:colId xmlns:a16="http://schemas.microsoft.com/office/drawing/2014/main" val="20001"/>
+                    </a:ext>
+                  </a:extLst>
+                </a:gridCol>
               </a:tblGrid>
               <a:tr h="256032">
                 <a:tc>
@@ -18522,6 +22078,11 @@
                     </a:solidFill>
                   </a:tcPr>
                 </a:tc>
+                <a:extLst>
+                  <a:ext uri="{0D108BD9-81ED-4DB2-BD59-A6C34878D82A}">
+                    <a16:rowId xmlns:a16="http://schemas.microsoft.com/office/drawing/2014/main" val="10000"/>
+                  </a:ext>
+                </a:extLst>
               </a:tr>
               <a:tr h="256032">
                 <a:tc>
@@ -18568,6 +22129,11 @@
                     </a:solidFill>
                   </a:tcPr>
                 </a:tc>
+                <a:extLst>
+                  <a:ext uri="{0D108BD9-81ED-4DB2-BD59-A6C34878D82A}">
+                    <a16:rowId xmlns:a16="http://schemas.microsoft.com/office/drawing/2014/main" val="10001"/>
+                  </a:ext>
+                </a:extLst>
               </a:tr>
               <a:tr h="256032">
                 <a:tc>
@@ -18614,6 +22180,11 @@
                     </a:solidFill>
                   </a:tcPr>
                 </a:tc>
+                <a:extLst>
+                  <a:ext uri="{0D108BD9-81ED-4DB2-BD59-A6C34878D82A}">
+                    <a16:rowId xmlns:a16="http://schemas.microsoft.com/office/drawing/2014/main" val="10002"/>
+                  </a:ext>
+                </a:extLst>
               </a:tr>
               <a:tr h="256032">
                 <a:tc>
@@ -18660,6 +22231,11 @@
                     </a:solidFill>
                   </a:tcPr>
                 </a:tc>
+                <a:extLst>
+                  <a:ext uri="{0D108BD9-81ED-4DB2-BD59-A6C34878D82A}">
+                    <a16:rowId xmlns:a16="http://schemas.microsoft.com/office/drawing/2014/main" val="10003"/>
+                  </a:ext>
+                </a:extLst>
               </a:tr>
               <a:tr h="256032">
                 <a:tc>
@@ -18706,6 +22282,11 @@
                     </a:solidFill>
                   </a:tcPr>
                 </a:tc>
+                <a:extLst>
+                  <a:ext uri="{0D108BD9-81ED-4DB2-BD59-A6C34878D82A}">
+                    <a16:rowId xmlns:a16="http://schemas.microsoft.com/office/drawing/2014/main" val="10004"/>
+                  </a:ext>
+                </a:extLst>
               </a:tr>
             </a:tbl>
           </a:graphicData>
@@ -18750,7 +22331,7 @@
           </a:fontRef>
         </p:style>
         <p:txBody>
-          <a:bodyPr rtlCol="0" anchor="ctr" wrap="square" lIns="36576" rIns="36576" tIns="0" bIns="0"/>
+          <a:bodyPr wrap="square" lIns="36576" tIns="0" rIns="36576" bIns="0" rtlCol="0" anchor="ctr"/>
           <a:lstStyle/>
           <a:p>
             <a:pPr algn="ctr"/>
@@ -18831,7 +22412,7 @@
           <a:noFill/>
         </p:spPr>
         <p:txBody>
-          <a:bodyPr wrap="square" anchor="t" lIns="36576" rIns="36576" tIns="0" bIns="0">
+          <a:bodyPr wrap="square" lIns="36576" tIns="0" rIns="36576" bIns="0" anchor="t">
             <a:spAutoFit/>
           </a:bodyPr>
           <a:lstStyle/>
@@ -18866,7 +22447,7 @@
           <a:noFill/>
         </p:spPr>
         <p:txBody>
-          <a:bodyPr wrap="square" anchor="t" lIns="36576" rIns="36576" tIns="0" bIns="0">
+          <a:bodyPr wrap="square" lIns="36576" tIns="0" rIns="36576" bIns="0" anchor="t">
             <a:spAutoFit/>
           </a:bodyPr>
           <a:lstStyle/>
@@ -18893,7 +22474,7 @@
 </file>
 
 <file path=ppt/slides/slide9.xml><?xml version="1.0" encoding="utf-8"?>
-<p:sld xmlns:a="http://schemas.openxmlformats.org/drawingml/2006/main" xmlns:p="http://schemas.openxmlformats.org/presentationml/2006/main" xmlns:r="http://schemas.openxmlformats.org/officeDocument/2006/relationships">
+<p:sld xmlns:a="http://schemas.openxmlformats.org/drawingml/2006/main" xmlns:r="http://schemas.openxmlformats.org/officeDocument/2006/relationships" xmlns:p="http://schemas.openxmlformats.org/presentationml/2006/main">
   <p:cSld>
     <p:spTree>
       <p:nvGrpSpPr>
@@ -18901,7 +22482,14 @@
         <p:cNvGrpSpPr/>
         <p:nvPr/>
       </p:nvGrpSpPr>
-      <p:grpSpPr/>
+      <p:grpSpPr>
+        <a:xfrm>
+          <a:off x="0" y="0"/>
+          <a:ext cx="0" cy="0"/>
+          <a:chOff x="0" y="0"/>
+          <a:chExt cx="0" cy="0"/>
+        </a:xfrm>
+      </p:grpSpPr>
       <p:sp>
         <p:nvSpPr>
           <p:cNvPr id="2" name="TextBox 1"/>
@@ -18919,7 +22507,7 @@
           <a:noFill/>
         </p:spPr>
         <p:txBody>
-          <a:bodyPr wrap="square" anchor="ctr" lIns="36576" rIns="36576" tIns="0" bIns="0">
+          <a:bodyPr wrap="square" lIns="36576" tIns="0" rIns="36576" bIns="0" anchor="ctr">
             <a:spAutoFit/>
           </a:bodyPr>
           <a:lstStyle/>
@@ -18954,7 +22542,7 @@
           <a:noFill/>
         </p:spPr>
         <p:txBody>
-          <a:bodyPr wrap="square" anchor="t" lIns="36576" rIns="36576" tIns="0" bIns="0">
+          <a:bodyPr wrap="square" lIns="36576" tIns="0" rIns="36576" bIns="0" anchor="t">
             <a:spAutoFit/>
           </a:bodyPr>
           <a:lstStyle/>
@@ -18989,7 +22577,7 @@
           <a:noFill/>
         </p:spPr>
         <p:txBody>
-          <a:bodyPr wrap="square" anchor="t" lIns="36576" rIns="36576" tIns="0" bIns="0">
+          <a:bodyPr wrap="square" lIns="36576" tIns="0" rIns="36576" bIns="0" anchor="t">
             <a:spAutoFit/>
           </a:bodyPr>
           <a:lstStyle/>
@@ -19046,7 +22634,7 @@
           </a:fontRef>
         </p:style>
         <p:txBody>
-          <a:bodyPr rtlCol="0" anchor="ctr" wrap="square" lIns="36576" rIns="36576" tIns="0" bIns="0"/>
+          <a:bodyPr wrap="square" lIns="36576" tIns="0" rIns="36576" bIns="0" rtlCol="0" anchor="ctr"/>
           <a:lstStyle/>
           <a:p>
             <a:pPr algn="ctr"/>
@@ -19149,7 +22737,7 @@
           </a:fontRef>
         </p:style>
         <p:txBody>
-          <a:bodyPr rtlCol="0" anchor="ctr" wrap="square" lIns="36576" rIns="36576" tIns="0" bIns="0"/>
+          <a:bodyPr wrap="square" lIns="36576" tIns="0" rIns="36576" bIns="0" rtlCol="0" anchor="ctr"/>
           <a:lstStyle/>
           <a:p>
             <a:pPr algn="ctr"/>
@@ -19218,7 +22806,7 @@
           <a:noFill/>
         </p:spPr>
         <p:txBody>
-          <a:bodyPr wrap="square" anchor="t" lIns="36576" rIns="36576" tIns="0" bIns="0">
+          <a:bodyPr wrap="square" lIns="36576" tIns="0" rIns="36576" bIns="0" anchor="t">
             <a:spAutoFit/>
           </a:bodyPr>
           <a:lstStyle/>
@@ -19311,7 +22899,7 @@
           </a:fontRef>
         </p:style>
         <p:txBody>
-          <a:bodyPr rtlCol="0" anchor="ctr" wrap="square" lIns="36576" rIns="36576" tIns="0" bIns="0"/>
+          <a:bodyPr wrap="square" lIns="36576" tIns="0" rIns="36576" bIns="0" rtlCol="0" anchor="ctr"/>
           <a:lstStyle/>
           <a:p>
             <a:pPr algn="ctr"/>
@@ -19380,7 +22968,7 @@
           <a:noFill/>
         </p:spPr>
         <p:txBody>
-          <a:bodyPr wrap="square" anchor="t" lIns="36576" rIns="36576" tIns="0" bIns="0">
+          <a:bodyPr wrap="square" lIns="36576" tIns="0" rIns="36576" bIns="0" anchor="t">
             <a:spAutoFit/>
           </a:bodyPr>
           <a:lstStyle/>
@@ -19473,7 +23061,7 @@
           </a:fontRef>
         </p:style>
         <p:txBody>
-          <a:bodyPr rtlCol="0" anchor="ctr" wrap="square" lIns="36576" rIns="36576" tIns="0" bIns="0"/>
+          <a:bodyPr wrap="square" lIns="36576" tIns="0" rIns="36576" bIns="0" rtlCol="0" anchor="ctr"/>
           <a:lstStyle/>
           <a:p>
             <a:pPr algn="ctr"/>
@@ -19542,7 +23130,7 @@
           <a:noFill/>
         </p:spPr>
         <p:txBody>
-          <a:bodyPr wrap="square" anchor="t" lIns="36576" rIns="36576" tIns="0" bIns="0">
+          <a:bodyPr wrap="square" lIns="36576" tIns="0" rIns="36576" bIns="0" anchor="t">
             <a:spAutoFit/>
           </a:bodyPr>
           <a:lstStyle/>
@@ -19635,7 +23223,7 @@
           </a:fontRef>
         </p:style>
         <p:txBody>
-          <a:bodyPr rtlCol="0" anchor="ctr" wrap="square" lIns="36576" rIns="36576" tIns="0" bIns="0"/>
+          <a:bodyPr wrap="square" lIns="36576" tIns="0" rIns="36576" bIns="0" rtlCol="0" anchor="ctr"/>
           <a:lstStyle/>
           <a:p>
             <a:pPr algn="ctr"/>
@@ -19704,7 +23292,7 @@
           <a:noFill/>
         </p:spPr>
         <p:txBody>
-          <a:bodyPr wrap="square" anchor="t" lIns="36576" rIns="36576" tIns="0" bIns="0">
+          <a:bodyPr wrap="square" lIns="36576" tIns="0" rIns="36576" bIns="0" anchor="t">
             <a:spAutoFit/>
           </a:bodyPr>
           <a:lstStyle/>
@@ -19797,7 +23385,7 @@
           </a:fontRef>
         </p:style>
         <p:txBody>
-          <a:bodyPr rtlCol="0" anchor="ctr" wrap="square" lIns="36576" rIns="36576" tIns="0" bIns="0"/>
+          <a:bodyPr wrap="square" lIns="36576" tIns="0" rIns="36576" bIns="0" rtlCol="0" anchor="ctr"/>
           <a:lstStyle/>
           <a:p>
             <a:pPr algn="ctr"/>
@@ -19830,7 +23418,7 @@
           <a:noFill/>
         </p:spPr>
         <p:txBody>
-          <a:bodyPr wrap="square" anchor="t" lIns="36576" rIns="36576" tIns="0" bIns="0">
+          <a:bodyPr wrap="square" lIns="36576" tIns="0" rIns="36576" bIns="0" anchor="t">
             <a:spAutoFit/>
           </a:bodyPr>
           <a:lstStyle/>
@@ -19865,7 +23453,7 @@
           <a:noFill/>
         </p:spPr>
         <p:txBody>
-          <a:bodyPr wrap="square" anchor="t" lIns="36576" rIns="36576" tIns="0" bIns="0">
+          <a:bodyPr wrap="square" lIns="36576" tIns="0" rIns="36576" bIns="0" anchor="t">
             <a:spAutoFit/>
           </a:bodyPr>
           <a:lstStyle/>
@@ -19900,7 +23488,7 @@
           <a:noFill/>
         </p:spPr>
         <p:txBody>
-          <a:bodyPr wrap="square" anchor="t" lIns="36576" rIns="36576" tIns="0" bIns="0">
+          <a:bodyPr wrap="square" lIns="36576" tIns="0" rIns="36576" bIns="0" anchor="t">
             <a:spAutoFit/>
           </a:bodyPr>
           <a:lstStyle/>
@@ -19935,7 +23523,7 @@
           <a:noFill/>
         </p:spPr>
         <p:txBody>
-          <a:bodyPr wrap="square" anchor="t" lIns="36576" rIns="36576" tIns="0" bIns="0">
+          <a:bodyPr wrap="square" lIns="36576" tIns="0" rIns="36576" bIns="0" anchor="t">
             <a:spAutoFit/>
           </a:bodyPr>
           <a:lstStyle/>
@@ -19970,7 +23558,7 @@
           <a:noFill/>
         </p:spPr>
         <p:txBody>
-          <a:bodyPr wrap="square" anchor="t" lIns="36576" rIns="36576" tIns="0" bIns="0">
+          <a:bodyPr wrap="square" lIns="36576" tIns="0" rIns="36576" bIns="0" anchor="t">
             <a:spAutoFit/>
           </a:bodyPr>
           <a:lstStyle/>
@@ -20005,7 +23593,7 @@
           <a:noFill/>
         </p:spPr>
         <p:txBody>
-          <a:bodyPr wrap="square" anchor="t" lIns="36576" rIns="36576" tIns="0" bIns="0">
+          <a:bodyPr wrap="square" lIns="36576" tIns="0" rIns="36576" bIns="0" anchor="t">
             <a:spAutoFit/>
           </a:bodyPr>
           <a:lstStyle/>
@@ -20040,7 +23628,7 @@
           <a:noFill/>
         </p:spPr>
         <p:txBody>
-          <a:bodyPr wrap="square" anchor="t" lIns="36576" rIns="36576" tIns="0" bIns="0">
+          <a:bodyPr wrap="square" lIns="36576" tIns="0" rIns="36576" bIns="0" anchor="t">
             <a:spAutoFit/>
           </a:bodyPr>
           <a:lstStyle/>
@@ -20075,7 +23663,7 @@
           <a:noFill/>
         </p:spPr>
         <p:txBody>
-          <a:bodyPr wrap="square" anchor="t" lIns="36576" rIns="36576" tIns="0" bIns="0">
+          <a:bodyPr wrap="square" lIns="36576" tIns="0" rIns="36576" bIns="0" anchor="t">
             <a:spAutoFit/>
           </a:bodyPr>
           <a:lstStyle/>
@@ -20110,7 +23698,7 @@
           <a:noFill/>
         </p:spPr>
         <p:txBody>
-          <a:bodyPr wrap="square" anchor="t" lIns="36576" rIns="36576" tIns="0" bIns="0">
+          <a:bodyPr wrap="square" lIns="36576" tIns="0" rIns="36576" bIns="0" anchor="t">
             <a:spAutoFit/>
           </a:bodyPr>
           <a:lstStyle/>
@@ -20145,7 +23733,7 @@
           <a:noFill/>
         </p:spPr>
         <p:txBody>
-          <a:bodyPr wrap="square" anchor="t" lIns="36576" rIns="36576" tIns="0" bIns="0">
+          <a:bodyPr wrap="square" lIns="36576" tIns="0" rIns="36576" bIns="0" anchor="t">
             <a:spAutoFit/>
           </a:bodyPr>
           <a:lstStyle/>
@@ -20180,7 +23768,7 @@
           <a:noFill/>
         </p:spPr>
         <p:txBody>
-          <a:bodyPr wrap="square" anchor="t" lIns="36576" rIns="36576" tIns="0" bIns="0">
+          <a:bodyPr wrap="square" lIns="36576" tIns="0" rIns="36576" bIns="0" anchor="t">
             <a:spAutoFit/>
           </a:bodyPr>
           <a:lstStyle/>
@@ -20215,7 +23803,7 @@
           <a:noFill/>
         </p:spPr>
         <p:txBody>
-          <a:bodyPr wrap="square" anchor="t" lIns="36576" rIns="36576" tIns="0" bIns="0">
+          <a:bodyPr wrap="square" lIns="36576" tIns="0" rIns="36576" bIns="0" anchor="t">
             <a:spAutoFit/>
           </a:bodyPr>
           <a:lstStyle/>
@@ -20250,7 +23838,7 @@
           <a:noFill/>
         </p:spPr>
         <p:txBody>
-          <a:bodyPr wrap="square" anchor="t" lIns="36576" rIns="36576" tIns="0" bIns="0">
+          <a:bodyPr wrap="square" lIns="36576" tIns="0" rIns="36576" bIns="0" anchor="t">
             <a:spAutoFit/>
           </a:bodyPr>
           <a:lstStyle/>
@@ -20285,7 +23873,7 @@
           <a:noFill/>
         </p:spPr>
         <p:txBody>
-          <a:bodyPr wrap="square" anchor="t" lIns="36576" rIns="36576" tIns="0" bIns="0">
+          <a:bodyPr wrap="square" lIns="36576" tIns="0" rIns="36576" bIns="0" anchor="t">
             <a:spAutoFit/>
           </a:bodyPr>
           <a:lstStyle/>
@@ -20320,7 +23908,7 @@
           <a:noFill/>
         </p:spPr>
         <p:txBody>
-          <a:bodyPr wrap="square" anchor="t" lIns="36576" rIns="36576" tIns="0" bIns="0">
+          <a:bodyPr wrap="square" lIns="36576" tIns="0" rIns="36576" bIns="0" anchor="t">
             <a:spAutoFit/>
           </a:bodyPr>
           <a:lstStyle/>
